--- a/pres-paperwhite.pptx
+++ b/pres-paperwhite.pptx
@@ -5,10 +5,10 @@
     <p:sldMasterId id="2147483689" r:id="rId1"/>
   </p:sldMasterIdLst>
   <p:notesMasterIdLst>
-    <p:notesMasterId r:id="rId60"/>
+    <p:notesMasterId r:id="rId61"/>
   </p:notesMasterIdLst>
   <p:handoutMasterIdLst>
-    <p:handoutMasterId r:id="rId61"/>
+    <p:handoutMasterId r:id="rId62"/>
   </p:handoutMasterIdLst>
   <p:sldIdLst>
     <p:sldId id="282" r:id="rId2"/>
@@ -38,37 +38,38 @@
     <p:sldId id="332" r:id="rId26"/>
     <p:sldId id="334" r:id="rId27"/>
     <p:sldId id="350" r:id="rId28"/>
-    <p:sldId id="329" r:id="rId29"/>
-    <p:sldId id="328" r:id="rId30"/>
-    <p:sldId id="336" r:id="rId31"/>
-    <p:sldId id="338" r:id="rId32"/>
-    <p:sldId id="337" r:id="rId33"/>
-    <p:sldId id="335" r:id="rId34"/>
-    <p:sldId id="340" r:id="rId35"/>
-    <p:sldId id="341" r:id="rId36"/>
-    <p:sldId id="343" r:id="rId37"/>
-    <p:sldId id="344" r:id="rId38"/>
-    <p:sldId id="339" r:id="rId39"/>
-    <p:sldId id="347" r:id="rId40"/>
-    <p:sldId id="348" r:id="rId41"/>
-    <p:sldId id="346" r:id="rId42"/>
-    <p:sldId id="257" r:id="rId43"/>
-    <p:sldId id="269" r:id="rId44"/>
-    <p:sldId id="268" r:id="rId45"/>
-    <p:sldId id="272" r:id="rId46"/>
-    <p:sldId id="263" r:id="rId47"/>
-    <p:sldId id="261" r:id="rId48"/>
-    <p:sldId id="270" r:id="rId49"/>
-    <p:sldId id="271" r:id="rId50"/>
-    <p:sldId id="273" r:id="rId51"/>
-    <p:sldId id="274" r:id="rId52"/>
-    <p:sldId id="275" r:id="rId53"/>
-    <p:sldId id="277" r:id="rId54"/>
-    <p:sldId id="276" r:id="rId55"/>
-    <p:sldId id="278" r:id="rId56"/>
-    <p:sldId id="267" r:id="rId57"/>
-    <p:sldId id="281" r:id="rId58"/>
-    <p:sldId id="258" r:id="rId59"/>
+    <p:sldId id="352" r:id="rId29"/>
+    <p:sldId id="329" r:id="rId30"/>
+    <p:sldId id="328" r:id="rId31"/>
+    <p:sldId id="336" r:id="rId32"/>
+    <p:sldId id="338" r:id="rId33"/>
+    <p:sldId id="337" r:id="rId34"/>
+    <p:sldId id="335" r:id="rId35"/>
+    <p:sldId id="340" r:id="rId36"/>
+    <p:sldId id="341" r:id="rId37"/>
+    <p:sldId id="343" r:id="rId38"/>
+    <p:sldId id="344" r:id="rId39"/>
+    <p:sldId id="339" r:id="rId40"/>
+    <p:sldId id="347" r:id="rId41"/>
+    <p:sldId id="348" r:id="rId42"/>
+    <p:sldId id="346" r:id="rId43"/>
+    <p:sldId id="257" r:id="rId44"/>
+    <p:sldId id="269" r:id="rId45"/>
+    <p:sldId id="268" r:id="rId46"/>
+    <p:sldId id="272" r:id="rId47"/>
+    <p:sldId id="263" r:id="rId48"/>
+    <p:sldId id="261" r:id="rId49"/>
+    <p:sldId id="270" r:id="rId50"/>
+    <p:sldId id="271" r:id="rId51"/>
+    <p:sldId id="273" r:id="rId52"/>
+    <p:sldId id="274" r:id="rId53"/>
+    <p:sldId id="275" r:id="rId54"/>
+    <p:sldId id="277" r:id="rId55"/>
+    <p:sldId id="276" r:id="rId56"/>
+    <p:sldId id="278" r:id="rId57"/>
+    <p:sldId id="267" r:id="rId58"/>
+    <p:sldId id="281" r:id="rId59"/>
+    <p:sldId id="258" r:id="rId60"/>
   </p:sldIdLst>
   <p:sldSz cx="12192000" cy="6858000"/>
   <p:notesSz cx="6858000" cy="9144000"/>
@@ -283,7 +284,7 @@
           <a:p>
             <a:fld id="{02C60018-7CC8-401C-AB78-8B75404606AA}" type="datetimeFigureOut">
               <a:rPr lang="en-US" smtClean="0"/>
-              <a:t>11/28/2025</a:t>
+              <a:t>2/27/2026</a:t>
             </a:fld>
             <a:endParaRPr lang="en-US"/>
           </a:p>
@@ -460,7 +461,7 @@
           <a:p>
             <a:fld id="{E4D59BB8-8670-4246-B25D-4FC5ED36B8F7}" type="datetimeFigureOut">
               <a:rPr lang="en-US" smtClean="0"/>
-              <a:t>11/28/2025</a:t>
+              <a:t>2/27/2026</a:t>
             </a:fld>
             <a:endParaRPr lang="en-US"/>
           </a:p>
@@ -887,7 +888,7 @@
           <a:p>
             <a:fld id="{4BF6D765-002A-4342-9A27-1499FB12475C}" type="datetime1">
               <a:rPr lang="en-US" smtClean="0"/>
-              <a:t>11/28/2025</a:t>
+              <a:t>2/27/2026</a:t>
             </a:fld>
             <a:endParaRPr lang="en-US" dirty="0"/>
           </a:p>
@@ -1147,7 +1148,7 @@
           <a:p>
             <a:fld id="{5212ED1A-FEFC-44CA-B4FE-E0737B71C631}" type="datetime1">
               <a:rPr lang="en-US" smtClean="0"/>
-              <a:t>11/28/2025</a:t>
+              <a:t>2/27/2026</a:t>
             </a:fld>
             <a:endParaRPr lang="en-US" dirty="0"/>
           </a:p>
@@ -1331,7 +1332,7 @@
           <a:p>
             <a:fld id="{A5AFF9B8-0434-4E77-A033-3A5C17C8663C}" type="datetime1">
               <a:rPr lang="en-US" smtClean="0"/>
-              <a:t>11/28/2025</a:t>
+              <a:t>2/27/2026</a:t>
             </a:fld>
             <a:endParaRPr lang="en-US" dirty="0"/>
           </a:p>
@@ -1427,7 +1428,7 @@
           <a:p>
             <a:fld id="{477E7C12-67C9-485C-820C-513DE461645A}" type="datetime1">
               <a:rPr lang="en-US" smtClean="0"/>
-              <a:t>11/28/2025</a:t>
+              <a:t>2/27/2026</a:t>
             </a:fld>
             <a:endParaRPr lang="en-US" dirty="0"/>
           </a:p>
@@ -1805,7 +1806,7 @@
           <a:p>
             <a:fld id="{BFF978D1-8A5E-4FEF-BEEE-7C5FD85138FC}" type="datetime1">
               <a:rPr lang="en-US" smtClean="0"/>
-              <a:t>11/28/2025</a:t>
+              <a:t>2/27/2026</a:t>
             </a:fld>
             <a:endParaRPr lang="en-US" dirty="0"/>
           </a:p>
@@ -2145,7 +2146,7 @@
           <a:p>
             <a:fld id="{CF6C8F2A-3531-4A29-9F1E-3978A22101A4}" type="datetime1">
               <a:rPr lang="en-US" smtClean="0"/>
-              <a:t>11/28/2025</a:t>
+              <a:t>2/27/2026</a:t>
             </a:fld>
             <a:endParaRPr lang="en-US" dirty="0"/>
           </a:p>
@@ -2609,7 +2610,7 @@
           <a:p>
             <a:fld id="{EA4D1F1A-0741-496E-8B9C-B92A95DD16AD}" type="datetime1">
               <a:rPr lang="en-US" smtClean="0"/>
-              <a:t>11/28/2025</a:t>
+              <a:t>2/27/2026</a:t>
             </a:fld>
             <a:endParaRPr lang="en-US" dirty="0"/>
           </a:p>
@@ -2728,7 +2729,7 @@
           <a:p>
             <a:fld id="{9F76A380-FA24-4993-8830-303CEC9CE16B}" type="datetime1">
               <a:rPr lang="en-US" smtClean="0"/>
-              <a:t>11/28/2025</a:t>
+              <a:t>2/27/2026</a:t>
             </a:fld>
             <a:endParaRPr lang="en-US" dirty="0"/>
           </a:p>
@@ -2824,7 +2825,7 @@
           <a:p>
             <a:fld id="{E7A6E378-4A2A-47BA-9986-40FF8A7619DE}" type="datetime1">
               <a:rPr lang="en-US" smtClean="0"/>
-              <a:t>11/28/2025</a:t>
+              <a:t>2/27/2026</a:t>
             </a:fld>
             <a:endParaRPr lang="en-US" dirty="0"/>
           </a:p>
@@ -3118,7 +3119,7 @@
           <a:p>
             <a:fld id="{839EA816-D1F5-4388-842B-7976C0692158}" type="datetime1">
               <a:rPr lang="en-US" smtClean="0"/>
-              <a:t>11/28/2025</a:t>
+              <a:t>2/27/2026</a:t>
             </a:fld>
             <a:endParaRPr lang="en-US" dirty="0"/>
           </a:p>
@@ -3454,7 +3455,7 @@
           <a:p>
             <a:fld id="{48F47C5A-0C90-426A-BA35-78C5C3FF49DC}" type="datetime1">
               <a:rPr lang="en-US" smtClean="0"/>
-              <a:t>11/28/2025</a:t>
+              <a:t>2/27/2026</a:t>
             </a:fld>
             <a:endParaRPr lang="en-US" dirty="0"/>
           </a:p>
@@ -3712,7 +3713,7 @@
           <a:p>
             <a:fld id="{39A0FD01-2B24-4C0C-9B52-4F23CD4DFF11}" type="datetime1">
               <a:rPr lang="en-US" smtClean="0"/>
-              <a:t>11/28/2025</a:t>
+              <a:t>2/27/2026</a:t>
             </a:fld>
             <a:endParaRPr lang="en-US" dirty="0"/>
           </a:p>
@@ -17525,7 +17526,13 @@
   <p:cSld>
     <p:spTree>
       <p:nvGrpSpPr>
-        <p:cNvPr id="1" name=""/>
+        <p:cNvPr id="1" name="">
+          <a:extLst>
+            <a:ext uri="{FF2B5EF4-FFF2-40B4-BE49-F238E27FC236}">
+              <a16:creationId xmlns:a16="http://schemas.microsoft.com/office/drawing/2014/main" id="{958CC37F-4488-944C-E779-0CBEAE02EF56}"/>
+            </a:ext>
+          </a:extLst>
+        </p:cNvPr>
         <p:cNvGrpSpPr/>
         <p:nvPr/>
       </p:nvGrpSpPr>
@@ -17537,12 +17544,351 @@
           <a:chExt cx="0" cy="0"/>
         </a:xfrm>
       </p:grpSpPr>
+      <p:cxnSp>
+        <p:nvCxnSpPr>
+          <p:cNvPr id="6" name="Connector: Elbow 5">
+            <a:extLst>
+              <a:ext uri="{FF2B5EF4-FFF2-40B4-BE49-F238E27FC236}">
+                <a16:creationId xmlns:a16="http://schemas.microsoft.com/office/drawing/2014/main" id="{E63B4954-82EA-ACF0-A080-7C02648BA444}"/>
+              </a:ext>
+            </a:extLst>
+          </p:cNvPr>
+          <p:cNvCxnSpPr>
+            <a:cxnSpLocks/>
+          </p:cNvCxnSpPr>
+          <p:nvPr/>
+        </p:nvCxnSpPr>
+        <p:spPr>
+          <a:xfrm flipH="1" flipV="1">
+            <a:off x="658368" y="3435260"/>
+            <a:ext cx="10937750" cy="6"/>
+          </a:xfrm>
+          <a:prstGeom prst="bentConnector5">
+            <a:avLst>
+              <a:gd name="adj1" fmla="val -2090"/>
+              <a:gd name="adj2" fmla="val 14706700000"/>
+              <a:gd name="adj3" fmla="val 102090"/>
+            </a:avLst>
+          </a:prstGeom>
+          <a:ln w="12700">
+            <a:solidFill>
+              <a:schemeClr val="tx2"/>
+            </a:solidFill>
+            <a:tailEnd type="triangle"/>
+          </a:ln>
+        </p:spPr>
+        <p:style>
+          <a:lnRef idx="1">
+            <a:schemeClr val="accent1"/>
+          </a:lnRef>
+          <a:fillRef idx="0">
+            <a:schemeClr val="accent1"/>
+          </a:fillRef>
+          <a:effectRef idx="0">
+            <a:schemeClr val="accent1"/>
+          </a:effectRef>
+          <a:fontRef idx="minor">
+            <a:schemeClr val="tx1"/>
+          </a:fontRef>
+        </p:style>
+      </p:cxnSp>
+      <p:sp>
+        <p:nvSpPr>
+          <p:cNvPr id="37" name="Rectangle: Rounded Corners 36">
+            <a:extLst>
+              <a:ext uri="{FF2B5EF4-FFF2-40B4-BE49-F238E27FC236}">
+                <a16:creationId xmlns:a16="http://schemas.microsoft.com/office/drawing/2014/main" id="{52ECF5CE-06B9-1B0C-3B31-F4F2B703A65B}"/>
+              </a:ext>
+            </a:extLst>
+          </p:cNvPr>
+          <p:cNvSpPr/>
+          <p:nvPr/>
+        </p:nvSpPr>
+        <p:spPr>
+          <a:xfrm>
+            <a:off x="5771013" y="2169391"/>
+            <a:ext cx="1938528" cy="1307592"/>
+          </a:xfrm>
+          <a:prstGeom prst="roundRect">
+            <a:avLst/>
+          </a:prstGeom>
+          <a:solidFill>
+            <a:srgbClr val="FFFFFF"/>
+          </a:solidFill>
+          <a:ln>
+            <a:solidFill>
+              <a:schemeClr val="tx1"/>
+            </a:solidFill>
+          </a:ln>
+          <a:effectLst>
+            <a:outerShdw blurRad="50800" dist="38100" dir="2700000" algn="tl" rotWithShape="0">
+              <a:prstClr val="black">
+                <a:alpha val="40000"/>
+              </a:prstClr>
+            </a:outerShdw>
+          </a:effectLst>
+        </p:spPr>
+        <p:style>
+          <a:lnRef idx="2">
+            <a:schemeClr val="accent6"/>
+          </a:lnRef>
+          <a:fillRef idx="1">
+            <a:schemeClr val="lt1"/>
+          </a:fillRef>
+          <a:effectRef idx="0">
+            <a:schemeClr val="accent6"/>
+          </a:effectRef>
+          <a:fontRef idx="minor">
+            <a:schemeClr val="dk1"/>
+          </a:fontRef>
+        </p:style>
+        <p:txBody>
+          <a:bodyPr rtlCol="0" anchor="ctr"/>
+          <a:lstStyle/>
+          <a:p>
+            <a:pPr algn="ctr"/>
+            <a:endParaRPr lang="en-US" dirty="0">
+              <a:solidFill>
+                <a:schemeClr val="tx1"/>
+              </a:solidFill>
+              <a:latin typeface="Times New Roman" panose="02020603050405020304" pitchFamily="18" charset="0"/>
+              <a:cs typeface="Times New Roman" panose="02020603050405020304" pitchFamily="18" charset="0"/>
+            </a:endParaRPr>
+          </a:p>
+          <a:p>
+            <a:pPr algn="ctr"/>
+            <a:r>
+              <a:rPr lang="en-US" dirty="0">
+                <a:solidFill>
+                  <a:schemeClr val="tx1"/>
+                </a:solidFill>
+                <a:latin typeface="Times New Roman" panose="02020603050405020304" pitchFamily="18" charset="0"/>
+                <a:cs typeface="Times New Roman" panose="02020603050405020304" pitchFamily="18" charset="0"/>
+              </a:rPr>
+              <a:t>Sentence</a:t>
+            </a:r>
+            <a:br>
+              <a:rPr lang="en-US" dirty="0">
+                <a:solidFill>
+                  <a:schemeClr val="tx1"/>
+                </a:solidFill>
+                <a:latin typeface="Times New Roman" panose="02020603050405020304" pitchFamily="18" charset="0"/>
+                <a:cs typeface="Times New Roman" panose="02020603050405020304" pitchFamily="18" charset="0"/>
+              </a:rPr>
+            </a:br>
+            <a:r>
+              <a:rPr lang="en-US" dirty="0">
+                <a:solidFill>
+                  <a:schemeClr val="tx1"/>
+                </a:solidFill>
+                <a:latin typeface="Times New Roman" panose="02020603050405020304" pitchFamily="18" charset="0"/>
+                <a:cs typeface="Times New Roman" panose="02020603050405020304" pitchFamily="18" charset="0"/>
+              </a:rPr>
+              <a:t>(SPR)</a:t>
+            </a:r>
+          </a:p>
+        </p:txBody>
+      </p:sp>
+      <p:sp>
+        <p:nvSpPr>
+          <p:cNvPr id="33" name="Rectangle: Rounded Corners 32">
+            <a:extLst>
+              <a:ext uri="{FF2B5EF4-FFF2-40B4-BE49-F238E27FC236}">
+                <a16:creationId xmlns:a16="http://schemas.microsoft.com/office/drawing/2014/main" id="{CC9B5B7A-AE2B-DDDF-5994-D24BE96A960C}"/>
+              </a:ext>
+            </a:extLst>
+          </p:cNvPr>
+          <p:cNvSpPr/>
+          <p:nvPr/>
+        </p:nvSpPr>
+        <p:spPr>
+          <a:xfrm>
+            <a:off x="5669413" y="2260831"/>
+            <a:ext cx="1938528" cy="1307592"/>
+          </a:xfrm>
+          <a:prstGeom prst="roundRect">
+            <a:avLst/>
+          </a:prstGeom>
+          <a:solidFill>
+            <a:srgbClr val="FFFFFF"/>
+          </a:solidFill>
+          <a:ln>
+            <a:solidFill>
+              <a:schemeClr val="tx1"/>
+            </a:solidFill>
+          </a:ln>
+          <a:effectLst>
+            <a:outerShdw blurRad="50800" dist="38100" dir="2700000" algn="tl" rotWithShape="0">
+              <a:prstClr val="black">
+                <a:alpha val="40000"/>
+              </a:prstClr>
+            </a:outerShdw>
+          </a:effectLst>
+        </p:spPr>
+        <p:style>
+          <a:lnRef idx="2">
+            <a:schemeClr val="accent6"/>
+          </a:lnRef>
+          <a:fillRef idx="1">
+            <a:schemeClr val="lt1"/>
+          </a:fillRef>
+          <a:effectRef idx="0">
+            <a:schemeClr val="accent6"/>
+          </a:effectRef>
+          <a:fontRef idx="minor">
+            <a:schemeClr val="dk1"/>
+          </a:fontRef>
+        </p:style>
+        <p:txBody>
+          <a:bodyPr rtlCol="0" anchor="ctr"/>
+          <a:lstStyle/>
+          <a:p>
+            <a:pPr algn="ctr"/>
+            <a:endParaRPr lang="en-US" dirty="0">
+              <a:solidFill>
+                <a:schemeClr val="tx1"/>
+              </a:solidFill>
+              <a:latin typeface="Times New Roman" panose="02020603050405020304" pitchFamily="18" charset="0"/>
+              <a:cs typeface="Times New Roman" panose="02020603050405020304" pitchFamily="18" charset="0"/>
+            </a:endParaRPr>
+          </a:p>
+          <a:p>
+            <a:pPr algn="ctr"/>
+            <a:r>
+              <a:rPr lang="en-US" dirty="0">
+                <a:solidFill>
+                  <a:schemeClr val="tx1"/>
+                </a:solidFill>
+                <a:latin typeface="Times New Roman" panose="02020603050405020304" pitchFamily="18" charset="0"/>
+                <a:cs typeface="Times New Roman" panose="02020603050405020304" pitchFamily="18" charset="0"/>
+              </a:rPr>
+              <a:t>Sentence</a:t>
+            </a:r>
+            <a:br>
+              <a:rPr lang="en-US" dirty="0">
+                <a:solidFill>
+                  <a:schemeClr val="tx1"/>
+                </a:solidFill>
+                <a:latin typeface="Times New Roman" panose="02020603050405020304" pitchFamily="18" charset="0"/>
+                <a:cs typeface="Times New Roman" panose="02020603050405020304" pitchFamily="18" charset="0"/>
+              </a:rPr>
+            </a:br>
+            <a:r>
+              <a:rPr lang="en-US" dirty="0">
+                <a:solidFill>
+                  <a:schemeClr val="tx1"/>
+                </a:solidFill>
+                <a:latin typeface="Times New Roman" panose="02020603050405020304" pitchFamily="18" charset="0"/>
+                <a:cs typeface="Times New Roman" panose="02020603050405020304" pitchFamily="18" charset="0"/>
+              </a:rPr>
+              <a:t>(SPR)</a:t>
+            </a:r>
+          </a:p>
+        </p:txBody>
+      </p:sp>
+      <p:sp>
+        <p:nvSpPr>
+          <p:cNvPr id="32" name="Rectangle: Rounded Corners 31">
+            <a:extLst>
+              <a:ext uri="{FF2B5EF4-FFF2-40B4-BE49-F238E27FC236}">
+                <a16:creationId xmlns:a16="http://schemas.microsoft.com/office/drawing/2014/main" id="{83D236AB-9627-F114-683A-968A9065D04C}"/>
+              </a:ext>
+            </a:extLst>
+          </p:cNvPr>
+          <p:cNvSpPr/>
+          <p:nvPr/>
+        </p:nvSpPr>
+        <p:spPr>
+          <a:xfrm>
+            <a:off x="5561461" y="2364891"/>
+            <a:ext cx="1938528" cy="1307592"/>
+          </a:xfrm>
+          <a:prstGeom prst="roundRect">
+            <a:avLst/>
+          </a:prstGeom>
+          <a:solidFill>
+            <a:srgbClr val="FFFFFF"/>
+          </a:solidFill>
+          <a:ln>
+            <a:solidFill>
+              <a:schemeClr val="tx1"/>
+            </a:solidFill>
+          </a:ln>
+          <a:effectLst>
+            <a:outerShdw blurRad="50800" dist="38100" dir="2700000" algn="tl" rotWithShape="0">
+              <a:prstClr val="black">
+                <a:alpha val="40000"/>
+              </a:prstClr>
+            </a:outerShdw>
+          </a:effectLst>
+        </p:spPr>
+        <p:style>
+          <a:lnRef idx="2">
+            <a:schemeClr val="accent6"/>
+          </a:lnRef>
+          <a:fillRef idx="1">
+            <a:schemeClr val="lt1"/>
+          </a:fillRef>
+          <a:effectRef idx="0">
+            <a:schemeClr val="accent6"/>
+          </a:effectRef>
+          <a:fontRef idx="minor">
+            <a:schemeClr val="dk1"/>
+          </a:fontRef>
+        </p:style>
+        <p:txBody>
+          <a:bodyPr rtlCol="0" anchor="ctr"/>
+          <a:lstStyle/>
+          <a:p>
+            <a:pPr algn="ctr"/>
+            <a:endParaRPr lang="en-US" dirty="0">
+              <a:solidFill>
+                <a:schemeClr val="tx1"/>
+              </a:solidFill>
+              <a:latin typeface="Times New Roman" panose="02020603050405020304" pitchFamily="18" charset="0"/>
+              <a:cs typeface="Times New Roman" panose="02020603050405020304" pitchFamily="18" charset="0"/>
+            </a:endParaRPr>
+          </a:p>
+          <a:p>
+            <a:pPr algn="ctr"/>
+            <a:r>
+              <a:rPr lang="en-US" dirty="0">
+                <a:solidFill>
+                  <a:schemeClr val="tx1"/>
+                </a:solidFill>
+                <a:latin typeface="Times New Roman" panose="02020603050405020304" pitchFamily="18" charset="0"/>
+                <a:cs typeface="Times New Roman" panose="02020603050405020304" pitchFamily="18" charset="0"/>
+              </a:rPr>
+              <a:t>Sentence</a:t>
+            </a:r>
+            <a:br>
+              <a:rPr lang="en-US" dirty="0">
+                <a:solidFill>
+                  <a:schemeClr val="tx1"/>
+                </a:solidFill>
+                <a:latin typeface="Times New Roman" panose="02020603050405020304" pitchFamily="18" charset="0"/>
+                <a:cs typeface="Times New Roman" panose="02020603050405020304" pitchFamily="18" charset="0"/>
+              </a:rPr>
+            </a:br>
+            <a:r>
+              <a:rPr lang="en-US" dirty="0">
+                <a:solidFill>
+                  <a:schemeClr val="tx1"/>
+                </a:solidFill>
+                <a:latin typeface="Times New Roman" panose="02020603050405020304" pitchFamily="18" charset="0"/>
+                <a:cs typeface="Times New Roman" panose="02020603050405020304" pitchFamily="18" charset="0"/>
+              </a:rPr>
+              <a:t>(SPR)</a:t>
+            </a:r>
+          </a:p>
+        </p:txBody>
+      </p:sp>
       <p:sp>
         <p:nvSpPr>
           <p:cNvPr id="2" name="Slide Number Placeholder 1">
             <a:extLst>
               <a:ext uri="{FF2B5EF4-FFF2-40B4-BE49-F238E27FC236}">
-                <a16:creationId xmlns:a16="http://schemas.microsoft.com/office/drawing/2014/main" id="{F18E0336-BD63-1957-5B03-03C82956C1BD}"/>
+                <a16:creationId xmlns:a16="http://schemas.microsoft.com/office/drawing/2014/main" id="{4D09474E-E1F9-8ACD-BDAC-EA5C9FE76113}"/>
               </a:ext>
             </a:extLst>
           </p:cNvPr>
@@ -17553,142 +17899,1957 @@
             <p:ph type="sldNum" sz="quarter" idx="12"/>
           </p:nvPr>
         </p:nvSpPr>
-        <p:spPr/>
+        <p:spPr>
+          <a:xfrm>
+            <a:off x="11292840" y="6639560"/>
+            <a:ext cx="914400" cy="593725"/>
+          </a:xfrm>
+        </p:spPr>
         <p:txBody>
           <a:bodyPr>
-            <a:normAutofit fontScale="92500" lnSpcReduction="10000"/>
+            <a:normAutofit/>
           </a:bodyPr>
           <a:lstStyle/>
           <a:p>
             <a:fld id="{D57F1E4F-1CFF-5643-939E-217C01CDF565}" type="slidenum">
-              <a:rPr lang="en-US" smtClean="0"/>
+              <a:rPr lang="en-US" sz="3200" smtClean="0">
+                <a:latin typeface="Times New Roman" panose="02020603050405020304" pitchFamily="18" charset="0"/>
+                <a:cs typeface="Times New Roman" panose="02020603050405020304" pitchFamily="18" charset="0"/>
+              </a:rPr>
               <a:pPr/>
               <a:t>28</a:t>
             </a:fld>
-            <a:endParaRPr lang="en-US" dirty="0"/>
-          </a:p>
-        </p:txBody>
-      </p:sp>
-      <p:sp>
-        <p:nvSpPr>
-          <p:cNvPr id="3" name="Title 2">
-            <a:extLst>
-              <a:ext uri="{FF2B5EF4-FFF2-40B4-BE49-F238E27FC236}">
-                <a16:creationId xmlns:a16="http://schemas.microsoft.com/office/drawing/2014/main" id="{A498CB36-9F19-C46B-4257-A3F39B8C0E60}"/>
-              </a:ext>
-            </a:extLst>
-          </p:cNvPr>
-          <p:cNvSpPr>
-            <a:spLocks noGrp="1"/>
-          </p:cNvSpPr>
-          <p:nvPr>
-            <p:ph type="title"/>
-          </p:nvPr>
-        </p:nvSpPr>
-        <p:spPr/>
-        <p:txBody>
-          <a:bodyPr>
-            <a:normAutofit fontScale="90000"/>
+            <a:endParaRPr lang="en-US" sz="3200" dirty="0">
+              <a:latin typeface="Times New Roman" panose="02020603050405020304" pitchFamily="18" charset="0"/>
+              <a:cs typeface="Times New Roman" panose="02020603050405020304" pitchFamily="18" charset="0"/>
+            </a:endParaRPr>
+          </a:p>
+        </p:txBody>
+      </p:sp>
+      <p:sp>
+        <p:nvSpPr>
+          <p:cNvPr id="5" name="Rectangle: Rounded Corners 4">
+            <a:extLst>
+              <a:ext uri="{FF2B5EF4-FFF2-40B4-BE49-F238E27FC236}">
+                <a16:creationId xmlns:a16="http://schemas.microsoft.com/office/drawing/2014/main" id="{C342523D-37D3-952F-B215-30D151208BBF}"/>
+              </a:ext>
+            </a:extLst>
+          </p:cNvPr>
+          <p:cNvSpPr/>
+          <p:nvPr/>
+        </p:nvSpPr>
+        <p:spPr>
+          <a:xfrm>
+            <a:off x="658368" y="2789936"/>
+            <a:ext cx="1938528" cy="1307592"/>
+          </a:xfrm>
+          <a:prstGeom prst="roundRect">
+            <a:avLst/>
+          </a:prstGeom>
+          <a:solidFill>
+            <a:srgbClr val="FFFFFF"/>
+          </a:solidFill>
+          <a:ln>
+            <a:solidFill>
+              <a:schemeClr val="tx1"/>
+            </a:solidFill>
+          </a:ln>
+          <a:effectLst>
+            <a:outerShdw blurRad="50800" dist="38100" dir="2700000" algn="tl" rotWithShape="0">
+              <a:prstClr val="black">
+                <a:alpha val="40000"/>
+              </a:prstClr>
+            </a:outerShdw>
+          </a:effectLst>
+        </p:spPr>
+        <p:style>
+          <a:lnRef idx="2">
+            <a:schemeClr val="accent6"/>
+          </a:lnRef>
+          <a:fillRef idx="1">
+            <a:schemeClr val="lt1"/>
+          </a:fillRef>
+          <a:effectRef idx="0">
+            <a:schemeClr val="accent6"/>
+          </a:effectRef>
+          <a:fontRef idx="minor">
+            <a:schemeClr val="dk1"/>
+          </a:fontRef>
+        </p:style>
+        <p:txBody>
+          <a:bodyPr rtlCol="0" anchor="ctr"/>
+          <a:lstStyle/>
+          <a:p>
+            <a:pPr algn="ctr"/>
+            <a:endParaRPr lang="en-US" sz="1600">
+              <a:latin typeface="Times New Roman" panose="02020603050405020304" pitchFamily="18" charset="0"/>
+              <a:cs typeface="Times New Roman" panose="02020603050405020304" pitchFamily="18" charset="0"/>
+            </a:endParaRPr>
+          </a:p>
+        </p:txBody>
+      </p:sp>
+      <p:sp>
+        <p:nvSpPr>
+          <p:cNvPr id="10" name="Rectangle: Rounded Corners 9">
+            <a:extLst>
+              <a:ext uri="{FF2B5EF4-FFF2-40B4-BE49-F238E27FC236}">
+                <a16:creationId xmlns:a16="http://schemas.microsoft.com/office/drawing/2014/main" id="{0D14F74E-6698-1A64-B7FC-0BE28D15C1CF}"/>
+              </a:ext>
+            </a:extLst>
+          </p:cNvPr>
+          <p:cNvSpPr/>
+          <p:nvPr/>
+        </p:nvSpPr>
+        <p:spPr>
+          <a:xfrm>
+            <a:off x="2906268" y="2789936"/>
+            <a:ext cx="1938528" cy="1307592"/>
+          </a:xfrm>
+          <a:prstGeom prst="roundRect">
+            <a:avLst/>
+          </a:prstGeom>
+          <a:solidFill>
+            <a:srgbClr val="FFFFFF"/>
+          </a:solidFill>
+          <a:ln>
+            <a:solidFill>
+              <a:schemeClr val="tx1"/>
+            </a:solidFill>
+          </a:ln>
+          <a:effectLst>
+            <a:outerShdw blurRad="50800" dist="38100" dir="2700000" algn="tl" rotWithShape="0">
+              <a:prstClr val="black">
+                <a:alpha val="40000"/>
+              </a:prstClr>
+            </a:outerShdw>
+          </a:effectLst>
+        </p:spPr>
+        <p:style>
+          <a:lnRef idx="2">
+            <a:schemeClr val="accent6"/>
+          </a:lnRef>
+          <a:fillRef idx="1">
+            <a:schemeClr val="lt1"/>
+          </a:fillRef>
+          <a:effectRef idx="0">
+            <a:schemeClr val="accent6"/>
+          </a:effectRef>
+          <a:fontRef idx="minor">
+            <a:schemeClr val="dk1"/>
+          </a:fontRef>
+        </p:style>
+        <p:txBody>
+          <a:bodyPr rtlCol="0" anchor="ctr"/>
+          <a:lstStyle/>
+          <a:p>
+            <a:pPr algn="ctr"/>
+            <a:endParaRPr lang="en-US" sz="1600" dirty="0">
+              <a:latin typeface="Times New Roman" panose="02020603050405020304" pitchFamily="18" charset="0"/>
+              <a:cs typeface="Times New Roman" panose="02020603050405020304" pitchFamily="18" charset="0"/>
+            </a:endParaRPr>
+          </a:p>
+        </p:txBody>
+      </p:sp>
+      <p:sp>
+        <p:nvSpPr>
+          <p:cNvPr id="12" name="TextBox 11">
+            <a:extLst>
+              <a:ext uri="{FF2B5EF4-FFF2-40B4-BE49-F238E27FC236}">
+                <a16:creationId xmlns:a16="http://schemas.microsoft.com/office/drawing/2014/main" id="{20568D43-C5F6-538E-9444-39C7182C2BD4}"/>
+              </a:ext>
+            </a:extLst>
+          </p:cNvPr>
+          <p:cNvSpPr txBox="1"/>
+          <p:nvPr/>
+        </p:nvSpPr>
+        <p:spPr>
+          <a:xfrm>
+            <a:off x="1317301" y="4040849"/>
+            <a:ext cx="618744" cy="400110"/>
+          </a:xfrm>
+          <a:prstGeom prst="rect">
+            <a:avLst/>
+          </a:prstGeom>
+          <a:noFill/>
+        </p:spPr>
+        <p:txBody>
+          <a:bodyPr wrap="square">
+            <a:spAutoFit/>
           </a:bodyPr>
           <a:lstStyle/>
           <a:p>
-            <a:r>
-              <a:rPr lang="en-US" dirty="0"/>
-              <a:t>Participants</a:t>
-            </a:r>
-          </a:p>
-        </p:txBody>
-      </p:sp>
-      <p:sp>
-        <p:nvSpPr>
-          <p:cNvPr id="4" name="Content Placeholder 3">
-            <a:extLst>
-              <a:ext uri="{FF2B5EF4-FFF2-40B4-BE49-F238E27FC236}">
-                <a16:creationId xmlns:a16="http://schemas.microsoft.com/office/drawing/2014/main" id="{5CC6FB7D-8385-6F5E-836E-AAF57B6FD8A9}"/>
-              </a:ext>
-            </a:extLst>
-          </p:cNvPr>
-          <p:cNvSpPr>
-            <a:spLocks noGrp="1"/>
-          </p:cNvSpPr>
-          <p:nvPr>
-            <p:ph idx="1"/>
-          </p:nvPr>
-        </p:nvSpPr>
-        <p:spPr/>
-        <p:txBody>
-          <a:bodyPr/>
-          <a:lstStyle/>
-          <a:p>
-            <a:r>
-              <a:rPr lang="en-US" dirty="0"/>
-              <a:t>Via Prolific</a:t>
-            </a:r>
-          </a:p>
-          <a:p>
-            <a:pPr lvl="1"/>
-            <a:r>
-              <a:rPr lang="en-US" dirty="0"/>
-              <a:t>Screener: First language: Hungarian</a:t>
-            </a:r>
-          </a:p>
-          <a:p>
-            <a:r>
-              <a:rPr lang="en-US" dirty="0"/>
-              <a:t>35 participants recruited</a:t>
-            </a:r>
-          </a:p>
-          <a:p>
-            <a:pPr lvl="1"/>
-            <a:r>
-              <a:rPr lang="en-US" dirty="0"/>
-              <a:t>Cleaning: 1 did not submit, 1 gave no ET data, 1 took too long, 1 failed AC, etc.</a:t>
-            </a:r>
-          </a:p>
-          <a:p>
-            <a:r>
-              <a:rPr lang="en-US" dirty="0"/>
-              <a:t>Took them around 25-30 minutes</a:t>
-            </a:r>
-          </a:p>
-          <a:p>
-            <a:r>
-              <a:rPr lang="en-US" dirty="0"/>
-              <a:t>30 valid answers/3 groups </a:t>
-            </a:r>
+            <a:pPr algn="ctr"/>
+            <a:r>
+              <a:rPr lang="hu-HU" sz="2000" dirty="0">
+                <a:latin typeface="Times New Roman" panose="02020603050405020304" pitchFamily="18" charset="0"/>
+                <a:cs typeface="Times New Roman" panose="02020603050405020304" pitchFamily="18" charset="0"/>
+              </a:rPr>
+              <a:t>␣</a:t>
+            </a:r>
+            <a:endParaRPr lang="en-US" sz="2000" dirty="0">
+              <a:latin typeface="Times New Roman" panose="02020603050405020304" pitchFamily="18" charset="0"/>
+              <a:cs typeface="Times New Roman" panose="02020603050405020304" pitchFamily="18" charset="0"/>
+            </a:endParaRPr>
+          </a:p>
+        </p:txBody>
+      </p:sp>
+      <p:sp>
+        <p:nvSpPr>
+          <p:cNvPr id="13" name="TextBox 12">
+            <a:extLst>
+              <a:ext uri="{FF2B5EF4-FFF2-40B4-BE49-F238E27FC236}">
+                <a16:creationId xmlns:a16="http://schemas.microsoft.com/office/drawing/2014/main" id="{608E4C8C-E873-59E2-7AE6-E26E1A49DD27}"/>
+              </a:ext>
+            </a:extLst>
+          </p:cNvPr>
+          <p:cNvSpPr txBox="1"/>
+          <p:nvPr/>
+        </p:nvSpPr>
+        <p:spPr>
+          <a:xfrm>
+            <a:off x="3566160" y="3192579"/>
+            <a:ext cx="618744" cy="461665"/>
+          </a:xfrm>
+          <a:prstGeom prst="rect">
+            <a:avLst/>
+          </a:prstGeom>
+          <a:noFill/>
+        </p:spPr>
+        <p:txBody>
+          <a:bodyPr wrap="square">
+            <a:spAutoFit/>
+          </a:bodyPr>
+          <a:lstStyle/>
+          <a:p>
+            <a:pPr algn="ctr"/>
+            <a:r>
+              <a:rPr lang="en-US" sz="2400" b="1" dirty="0">
+                <a:latin typeface="Times New Roman" panose="02020603050405020304" pitchFamily="18" charset="0"/>
+                <a:cs typeface="Times New Roman" panose="02020603050405020304" pitchFamily="18" charset="0"/>
+              </a:rPr>
+              <a:t>+</a:t>
+            </a:r>
+          </a:p>
+        </p:txBody>
+      </p:sp>
+      <p:sp>
+        <p:nvSpPr>
+          <p:cNvPr id="19" name="TextBox 18">
+            <a:extLst>
+              <a:ext uri="{FF2B5EF4-FFF2-40B4-BE49-F238E27FC236}">
+                <a16:creationId xmlns:a16="http://schemas.microsoft.com/office/drawing/2014/main" id="{BEA7F9A3-F176-EA51-D677-12675AC10E1B}"/>
+              </a:ext>
+            </a:extLst>
+          </p:cNvPr>
+          <p:cNvSpPr txBox="1"/>
+          <p:nvPr/>
+        </p:nvSpPr>
+        <p:spPr>
+          <a:xfrm>
+            <a:off x="5780655" y="4040849"/>
+            <a:ext cx="618744" cy="400110"/>
+          </a:xfrm>
+          <a:prstGeom prst="rect">
+            <a:avLst/>
+          </a:prstGeom>
+          <a:noFill/>
+        </p:spPr>
+        <p:txBody>
+          <a:bodyPr wrap="square">
+            <a:spAutoFit/>
+          </a:bodyPr>
+          <a:lstStyle/>
+          <a:p>
+            <a:pPr algn="ctr"/>
+            <a:r>
+              <a:rPr lang="hu-HU" sz="2000" dirty="0">
+                <a:latin typeface="Times New Roman" panose="02020603050405020304" pitchFamily="18" charset="0"/>
+                <a:cs typeface="Times New Roman" panose="02020603050405020304" pitchFamily="18" charset="0"/>
+              </a:rPr>
+              <a:t>␣</a:t>
+            </a:r>
+            <a:endParaRPr lang="en-US" sz="2000" dirty="0">
+              <a:latin typeface="Times New Roman" panose="02020603050405020304" pitchFamily="18" charset="0"/>
+              <a:cs typeface="Times New Roman" panose="02020603050405020304" pitchFamily="18" charset="0"/>
+            </a:endParaRPr>
+          </a:p>
+        </p:txBody>
+      </p:sp>
+      <p:sp>
+        <p:nvSpPr>
+          <p:cNvPr id="25" name="TextBox 24">
+            <a:extLst>
+              <a:ext uri="{FF2B5EF4-FFF2-40B4-BE49-F238E27FC236}">
+                <a16:creationId xmlns:a16="http://schemas.microsoft.com/office/drawing/2014/main" id="{1535301A-6883-2B8E-9F17-2D5E51893219}"/>
+              </a:ext>
+            </a:extLst>
+          </p:cNvPr>
+          <p:cNvSpPr txBox="1"/>
+          <p:nvPr/>
+        </p:nvSpPr>
+        <p:spPr>
+          <a:xfrm>
+            <a:off x="8037576" y="3156732"/>
+            <a:ext cx="618744" cy="461665"/>
+          </a:xfrm>
+          <a:prstGeom prst="rect">
+            <a:avLst/>
+          </a:prstGeom>
+          <a:noFill/>
+        </p:spPr>
+        <p:txBody>
+          <a:bodyPr wrap="square" anchor="t">
+            <a:spAutoFit/>
+          </a:bodyPr>
+          <a:lstStyle/>
+          <a:p>
+            <a:pPr algn="ctr"/>
+            <a:r>
+              <a:rPr lang="en-US" sz="2400" b="1" dirty="0">
+                <a:latin typeface="Times New Roman" panose="02020603050405020304" pitchFamily="18" charset="0"/>
+                <a:cs typeface="Times New Roman" panose="02020603050405020304" pitchFamily="18" charset="0"/>
+              </a:rPr>
+              <a:t>+</a:t>
+            </a:r>
+          </a:p>
+        </p:txBody>
+      </p:sp>
+      <p:sp>
+        <p:nvSpPr>
+          <p:cNvPr id="27" name="Rectangle: Rounded Corners 26">
+            <a:extLst>
+              <a:ext uri="{FF2B5EF4-FFF2-40B4-BE49-F238E27FC236}">
+                <a16:creationId xmlns:a16="http://schemas.microsoft.com/office/drawing/2014/main" id="{65AD63B5-7890-3568-9948-A45937FD24A0}"/>
+              </a:ext>
+            </a:extLst>
+          </p:cNvPr>
+          <p:cNvSpPr/>
+          <p:nvPr/>
+        </p:nvSpPr>
+        <p:spPr>
+          <a:xfrm>
+            <a:off x="9657590" y="2789930"/>
+            <a:ext cx="1938528" cy="1307592"/>
+          </a:xfrm>
+          <a:prstGeom prst="roundRect">
+            <a:avLst/>
+          </a:prstGeom>
+          <a:solidFill>
+            <a:srgbClr val="FFFFFF"/>
+          </a:solidFill>
+          <a:ln>
+            <a:solidFill>
+              <a:schemeClr val="tx1"/>
+            </a:solidFill>
+          </a:ln>
+          <a:effectLst>
+            <a:outerShdw blurRad="50800" dist="38100" dir="2700000" algn="tl" rotWithShape="0">
+              <a:prstClr val="black">
+                <a:alpha val="40000"/>
+              </a:prstClr>
+            </a:outerShdw>
+          </a:effectLst>
+        </p:spPr>
+        <p:style>
+          <a:lnRef idx="2">
+            <a:schemeClr val="accent6"/>
+          </a:lnRef>
+          <a:fillRef idx="1">
+            <a:schemeClr val="lt1"/>
+          </a:fillRef>
+          <a:effectRef idx="0">
+            <a:schemeClr val="accent6"/>
+          </a:effectRef>
+          <a:fontRef idx="minor">
+            <a:schemeClr val="dk1"/>
+          </a:fontRef>
+        </p:style>
+        <p:txBody>
+          <a:bodyPr rtlCol="0" anchor="ctr"/>
+          <a:lstStyle/>
+          <a:p>
+            <a:pPr algn="ctr"/>
+            <a:endParaRPr lang="en-US" sz="1600">
+              <a:latin typeface="Times New Roman" panose="02020603050405020304" pitchFamily="18" charset="0"/>
+              <a:cs typeface="Times New Roman" panose="02020603050405020304" pitchFamily="18" charset="0"/>
+            </a:endParaRPr>
+          </a:p>
+        </p:txBody>
+      </p:sp>
+      <p:sp>
+        <p:nvSpPr>
+          <p:cNvPr id="30" name="TextBox 29">
+            <a:extLst>
+              <a:ext uri="{FF2B5EF4-FFF2-40B4-BE49-F238E27FC236}">
+                <a16:creationId xmlns:a16="http://schemas.microsoft.com/office/drawing/2014/main" id="{B8DF6D65-94A8-6CBF-9B9A-978E238B9CD6}"/>
+              </a:ext>
+            </a:extLst>
+          </p:cNvPr>
+          <p:cNvSpPr txBox="1"/>
+          <p:nvPr/>
+        </p:nvSpPr>
+        <p:spPr>
+          <a:xfrm>
+            <a:off x="1098804" y="2783283"/>
+            <a:ext cx="1050034" cy="369332"/>
+          </a:xfrm>
+          <a:prstGeom prst="rect">
+            <a:avLst/>
+          </a:prstGeom>
+          <a:noFill/>
+        </p:spPr>
+        <p:txBody>
+          <a:bodyPr wrap="square">
+            <a:spAutoFit/>
+          </a:bodyPr>
+          <a:lstStyle/>
+          <a:p>
+            <a:pPr algn="ctr"/>
             <a:r>
               <a:rPr lang="en-US" dirty="0">
-                <a:latin typeface="Brill" panose="020F0602050406030203" pitchFamily="34" charset="0"/>
-              </a:rPr>
-              <a:t>→ every stimuli has </a:t>
-            </a:r>
-            <a:r>
-              <a:rPr lang="en-US" b="1" dirty="0">
-                <a:latin typeface="Brill" panose="020F0602050406030203" pitchFamily="34" charset="0"/>
-              </a:rPr>
-              <a:t>10</a:t>
-            </a:r>
+                <a:latin typeface="Times New Roman" panose="02020603050405020304" pitchFamily="18" charset="0"/>
+                <a:cs typeface="Times New Roman" panose="02020603050405020304" pitchFamily="18" charset="0"/>
+              </a:rPr>
+              <a:t>Preview</a:t>
+            </a:r>
+          </a:p>
+        </p:txBody>
+      </p:sp>
+      <p:sp>
+        <p:nvSpPr>
+          <p:cNvPr id="31" name="TextBox 30">
+            <a:extLst>
+              <a:ext uri="{FF2B5EF4-FFF2-40B4-BE49-F238E27FC236}">
+                <a16:creationId xmlns:a16="http://schemas.microsoft.com/office/drawing/2014/main" id="{B94E816B-394C-A370-B6C0-9EA4A5E8850F}"/>
+              </a:ext>
+            </a:extLst>
+          </p:cNvPr>
+          <p:cNvSpPr txBox="1"/>
+          <p:nvPr/>
+        </p:nvSpPr>
+        <p:spPr>
+          <a:xfrm>
+            <a:off x="9657590" y="2787400"/>
+            <a:ext cx="1938526" cy="369332"/>
+          </a:xfrm>
+          <a:prstGeom prst="rect">
+            <a:avLst/>
+          </a:prstGeom>
+          <a:noFill/>
+        </p:spPr>
+        <p:txBody>
+          <a:bodyPr wrap="square">
+            <a:spAutoFit/>
+          </a:bodyPr>
+          <a:lstStyle/>
+          <a:p>
+            <a:pPr algn="ctr"/>
             <a:r>
               <a:rPr lang="en-US" dirty="0">
-                <a:latin typeface="Brill" panose="020F0602050406030203" pitchFamily="34" charset="0"/>
-              </a:rPr>
-              <a:t> responses = </a:t>
-            </a:r>
-          </a:p>
-          <a:p>
+                <a:latin typeface="Times New Roman" panose="02020603050405020304" pitchFamily="18" charset="0"/>
+                <a:cs typeface="Times New Roman" panose="02020603050405020304" pitchFamily="18" charset="0"/>
+              </a:rPr>
+              <a:t>Choice</a:t>
+            </a:r>
+          </a:p>
+        </p:txBody>
+      </p:sp>
+      <p:sp>
+        <p:nvSpPr>
+          <p:cNvPr id="34" name="TextBox 33">
+            <a:extLst>
+              <a:ext uri="{FF2B5EF4-FFF2-40B4-BE49-F238E27FC236}">
+                <a16:creationId xmlns:a16="http://schemas.microsoft.com/office/drawing/2014/main" id="{AEA5FBF4-CECE-D45A-5096-958D45AC2186}"/>
+              </a:ext>
+            </a:extLst>
+          </p:cNvPr>
+          <p:cNvSpPr txBox="1"/>
+          <p:nvPr/>
+        </p:nvSpPr>
+        <p:spPr>
+          <a:xfrm>
+            <a:off x="10312146" y="4114948"/>
+            <a:ext cx="618744" cy="400110"/>
+          </a:xfrm>
+          <a:prstGeom prst="rect">
+            <a:avLst/>
+          </a:prstGeom>
+          <a:noFill/>
+        </p:spPr>
+        <p:txBody>
+          <a:bodyPr wrap="square">
+            <a:spAutoFit/>
+          </a:bodyPr>
+          <a:lstStyle/>
+          <a:p>
+            <a:pPr algn="ctr"/>
+            <a:r>
+              <a:rPr lang="hu-HU" sz="2000" dirty="0">
+                <a:latin typeface="Times New Roman" panose="02020603050405020304" pitchFamily="18" charset="0"/>
+                <a:cs typeface="Times New Roman" panose="02020603050405020304" pitchFamily="18" charset="0"/>
+              </a:rPr>
+              <a:t>🖰</a:t>
+            </a:r>
+            <a:endParaRPr lang="en-US" sz="2000" dirty="0">
+              <a:latin typeface="Times New Roman" panose="02020603050405020304" pitchFamily="18" charset="0"/>
+              <a:cs typeface="Times New Roman" panose="02020603050405020304" pitchFamily="18" charset="0"/>
+            </a:endParaRPr>
+          </a:p>
+        </p:txBody>
+      </p:sp>
+      <p:sp>
+        <p:nvSpPr>
+          <p:cNvPr id="35" name="TextBox 34">
+            <a:extLst>
+              <a:ext uri="{FF2B5EF4-FFF2-40B4-BE49-F238E27FC236}">
+                <a16:creationId xmlns:a16="http://schemas.microsoft.com/office/drawing/2014/main" id="{5F379549-8E17-6A96-9CDE-01E755648F75}"/>
+              </a:ext>
+            </a:extLst>
+          </p:cNvPr>
+          <p:cNvSpPr txBox="1"/>
+          <p:nvPr/>
+        </p:nvSpPr>
+        <p:spPr>
+          <a:xfrm>
+            <a:off x="9657589" y="3716716"/>
+            <a:ext cx="1938527" cy="373797"/>
+          </a:xfrm>
+          <a:prstGeom prst="rect">
+            <a:avLst/>
+          </a:prstGeom>
+          <a:noFill/>
+        </p:spPr>
+        <p:txBody>
+          <a:bodyPr wrap="square">
+            <a:spAutoFit/>
+          </a:bodyPr>
+          <a:lstStyle/>
+          <a:p>
+            <a:pPr algn="ctr"/>
             <a:r>
               <a:rPr lang="en-US" dirty="0">
-                <a:latin typeface="Brill" panose="020F0602050406030203" pitchFamily="34" charset="0"/>
-              </a:rPr>
-              <a:t>540 inputs.</a:t>
-            </a:r>
-          </a:p>
-          <a:p>
+                <a:latin typeface="Times New Roman" panose="02020603050405020304" pitchFamily="18" charset="0"/>
+                <a:cs typeface="Times New Roman" panose="02020603050405020304" pitchFamily="18" charset="0"/>
+              </a:rPr>
+              <a:t>(ET)</a:t>
+            </a:r>
+          </a:p>
+        </p:txBody>
+      </p:sp>
+      <p:sp>
+        <p:nvSpPr>
+          <p:cNvPr id="14" name="TextBox 13">
+            <a:extLst>
+              <a:ext uri="{FF2B5EF4-FFF2-40B4-BE49-F238E27FC236}">
+                <a16:creationId xmlns:a16="http://schemas.microsoft.com/office/drawing/2014/main" id="{3F39672A-3C05-49DF-8B3F-9BC0953138FF}"/>
+              </a:ext>
+            </a:extLst>
+          </p:cNvPr>
+          <p:cNvSpPr txBox="1"/>
+          <p:nvPr/>
+        </p:nvSpPr>
+        <p:spPr>
+          <a:xfrm>
+            <a:off x="2489072" y="3151268"/>
+            <a:ext cx="532513" cy="492443"/>
+          </a:xfrm>
+          <a:prstGeom prst="rect">
+            <a:avLst/>
+          </a:prstGeom>
+          <a:noFill/>
+          <a:ln>
+            <a:noFill/>
+          </a:ln>
+        </p:spPr>
+        <p:txBody>
+          <a:bodyPr wrap="square">
+            <a:spAutoFit/>
+          </a:bodyPr>
+          <a:lstStyle/>
+          <a:p>
+            <a:pPr algn="ctr"/>
+            <a:r>
+              <a:rPr lang="en-US" sz="2600" dirty="0">
+                <a:solidFill>
+                  <a:schemeClr val="tx2"/>
+                </a:solidFill>
+                <a:latin typeface="Times New Roman" panose="02020603050405020304" pitchFamily="18" charset="0"/>
+                <a:cs typeface="Times New Roman" panose="02020603050405020304" pitchFamily="18" charset="0"/>
+              </a:rPr>
+              <a:t>→</a:t>
+            </a:r>
+          </a:p>
+        </p:txBody>
+      </p:sp>
+      <p:cxnSp>
+        <p:nvCxnSpPr>
+          <p:cNvPr id="36" name="Straight Arrow Connector 35">
+            <a:extLst>
+              <a:ext uri="{FF2B5EF4-FFF2-40B4-BE49-F238E27FC236}">
+                <a16:creationId xmlns:a16="http://schemas.microsoft.com/office/drawing/2014/main" id="{31ED76CC-CF9A-8239-0A83-EF65392D75DF}"/>
+              </a:ext>
+            </a:extLst>
+          </p:cNvPr>
+          <p:cNvCxnSpPr>
+            <a:cxnSpLocks/>
+          </p:cNvCxnSpPr>
+          <p:nvPr/>
+        </p:nvCxnSpPr>
+        <p:spPr>
+          <a:xfrm flipV="1">
+            <a:off x="466344" y="4495823"/>
+            <a:ext cx="11382756" cy="22250"/>
+          </a:xfrm>
+          <a:prstGeom prst="straightConnector1">
+            <a:avLst/>
+          </a:prstGeom>
+          <a:ln w="38100">
+            <a:solidFill>
+              <a:schemeClr val="tx1"/>
+            </a:solidFill>
+            <a:tailEnd type="triangle"/>
+          </a:ln>
+        </p:spPr>
+        <p:style>
+          <a:lnRef idx="1">
+            <a:schemeClr val="accent1"/>
+          </a:lnRef>
+          <a:fillRef idx="0">
+            <a:schemeClr val="accent1"/>
+          </a:fillRef>
+          <a:effectRef idx="0">
+            <a:schemeClr val="accent1"/>
+          </a:effectRef>
+          <a:fontRef idx="minor">
+            <a:schemeClr val="tx1"/>
+          </a:fontRef>
+        </p:style>
+      </p:cxnSp>
+      <p:sp>
+        <p:nvSpPr>
+          <p:cNvPr id="26" name="Rectangle: Rounded Corners 25">
+            <a:extLst>
+              <a:ext uri="{FF2B5EF4-FFF2-40B4-BE49-F238E27FC236}">
+                <a16:creationId xmlns:a16="http://schemas.microsoft.com/office/drawing/2014/main" id="{F68F23E4-0A99-C37D-E42B-B358C56B3169}"/>
+              </a:ext>
+            </a:extLst>
+          </p:cNvPr>
+          <p:cNvSpPr/>
+          <p:nvPr/>
+        </p:nvSpPr>
+        <p:spPr>
+          <a:xfrm>
+            <a:off x="5467864" y="2465959"/>
+            <a:ext cx="1938528" cy="1307592"/>
+          </a:xfrm>
+          <a:prstGeom prst="roundRect">
+            <a:avLst/>
+          </a:prstGeom>
+          <a:solidFill>
+            <a:srgbClr val="FFFFFF"/>
+          </a:solidFill>
+          <a:ln>
+            <a:solidFill>
+              <a:schemeClr val="tx1"/>
+            </a:solidFill>
+          </a:ln>
+          <a:effectLst>
+            <a:outerShdw blurRad="50800" dist="38100" dir="2700000" algn="tl" rotWithShape="0">
+              <a:prstClr val="black">
+                <a:alpha val="40000"/>
+              </a:prstClr>
+            </a:outerShdw>
+          </a:effectLst>
+        </p:spPr>
+        <p:style>
+          <a:lnRef idx="2">
+            <a:schemeClr val="accent6"/>
+          </a:lnRef>
+          <a:fillRef idx="1">
+            <a:schemeClr val="lt1"/>
+          </a:fillRef>
+          <a:effectRef idx="0">
+            <a:schemeClr val="accent6"/>
+          </a:effectRef>
+          <a:fontRef idx="minor">
+            <a:schemeClr val="dk1"/>
+          </a:fontRef>
+        </p:style>
+        <p:txBody>
+          <a:bodyPr rtlCol="0" anchor="ctr"/>
+          <a:lstStyle/>
+          <a:p>
+            <a:pPr algn="ctr"/>
+            <a:endParaRPr lang="en-US" dirty="0">
+              <a:solidFill>
+                <a:schemeClr val="tx1"/>
+              </a:solidFill>
+              <a:latin typeface="Times New Roman" panose="02020603050405020304" pitchFamily="18" charset="0"/>
+              <a:cs typeface="Times New Roman" panose="02020603050405020304" pitchFamily="18" charset="0"/>
+            </a:endParaRPr>
+          </a:p>
+          <a:p>
+            <a:pPr algn="ctr"/>
             <a:r>
               <a:rPr lang="en-US" dirty="0">
-                <a:latin typeface="Brill" panose="020F0602050406030203" pitchFamily="34" charset="0"/>
-              </a:rPr>
-              <a:t>Many people (40~45%) had technical problems.</a:t>
+                <a:solidFill>
+                  <a:schemeClr val="tx1"/>
+                </a:solidFill>
+                <a:latin typeface="Times New Roman" panose="02020603050405020304" pitchFamily="18" charset="0"/>
+                <a:cs typeface="Times New Roman" panose="02020603050405020304" pitchFamily="18" charset="0"/>
+              </a:rPr>
+              <a:t>Sentence</a:t>
+            </a:r>
+            <a:br>
+              <a:rPr lang="en-US" dirty="0">
+                <a:solidFill>
+                  <a:schemeClr val="tx1"/>
+                </a:solidFill>
+                <a:latin typeface="Times New Roman" panose="02020603050405020304" pitchFamily="18" charset="0"/>
+                <a:cs typeface="Times New Roman" panose="02020603050405020304" pitchFamily="18" charset="0"/>
+              </a:rPr>
+            </a:br>
+            <a:r>
+              <a:rPr lang="en-US" dirty="0">
+                <a:solidFill>
+                  <a:schemeClr val="tx1"/>
+                </a:solidFill>
+                <a:latin typeface="Times New Roman" panose="02020603050405020304" pitchFamily="18" charset="0"/>
+                <a:cs typeface="Times New Roman" panose="02020603050405020304" pitchFamily="18" charset="0"/>
+              </a:rPr>
+              <a:t>(SPR)</a:t>
+            </a:r>
+          </a:p>
+        </p:txBody>
+      </p:sp>
+      <p:sp>
+        <p:nvSpPr>
+          <p:cNvPr id="11" name="Rectangle: Rounded Corners 10">
+            <a:extLst>
+              <a:ext uri="{FF2B5EF4-FFF2-40B4-BE49-F238E27FC236}">
+                <a16:creationId xmlns:a16="http://schemas.microsoft.com/office/drawing/2014/main" id="{2E725E4A-B172-090C-24FB-AA82E4768DDF}"/>
+              </a:ext>
+            </a:extLst>
+          </p:cNvPr>
+          <p:cNvSpPr/>
+          <p:nvPr/>
+        </p:nvSpPr>
+        <p:spPr>
+          <a:xfrm>
+            <a:off x="5370072" y="2574641"/>
+            <a:ext cx="1938528" cy="1307592"/>
+          </a:xfrm>
+          <a:prstGeom prst="roundRect">
+            <a:avLst/>
+          </a:prstGeom>
+          <a:solidFill>
+            <a:srgbClr val="FFFFFF"/>
+          </a:solidFill>
+          <a:ln>
+            <a:solidFill>
+              <a:schemeClr val="tx1"/>
+            </a:solidFill>
+          </a:ln>
+          <a:effectLst>
+            <a:outerShdw blurRad="50800" dist="38100" dir="2700000" algn="tl" rotWithShape="0">
+              <a:prstClr val="black">
+                <a:alpha val="40000"/>
+              </a:prstClr>
+            </a:outerShdw>
+          </a:effectLst>
+        </p:spPr>
+        <p:style>
+          <a:lnRef idx="2">
+            <a:schemeClr val="accent6"/>
+          </a:lnRef>
+          <a:fillRef idx="1">
+            <a:schemeClr val="lt1"/>
+          </a:fillRef>
+          <a:effectRef idx="0">
+            <a:schemeClr val="accent6"/>
+          </a:effectRef>
+          <a:fontRef idx="minor">
+            <a:schemeClr val="dk1"/>
+          </a:fontRef>
+        </p:style>
+        <p:txBody>
+          <a:bodyPr rtlCol="0" anchor="ctr"/>
+          <a:lstStyle/>
+          <a:p>
+            <a:pPr algn="ctr"/>
+            <a:endParaRPr lang="en-US" dirty="0">
+              <a:solidFill>
+                <a:schemeClr val="tx1"/>
+              </a:solidFill>
+              <a:latin typeface="Times New Roman" panose="02020603050405020304" pitchFamily="18" charset="0"/>
+              <a:cs typeface="Times New Roman" panose="02020603050405020304" pitchFamily="18" charset="0"/>
+            </a:endParaRPr>
+          </a:p>
+          <a:p>
+            <a:pPr algn="ctr"/>
+            <a:r>
+              <a:rPr lang="en-US" dirty="0">
+                <a:solidFill>
+                  <a:schemeClr val="tx1"/>
+                </a:solidFill>
+                <a:latin typeface="Times New Roman" panose="02020603050405020304" pitchFamily="18" charset="0"/>
+                <a:cs typeface="Times New Roman" panose="02020603050405020304" pitchFamily="18" charset="0"/>
+              </a:rPr>
+              <a:t>Sentence</a:t>
+            </a:r>
+            <a:br>
+              <a:rPr lang="en-US" dirty="0">
+                <a:solidFill>
+                  <a:schemeClr val="tx1"/>
+                </a:solidFill>
+                <a:latin typeface="Times New Roman" panose="02020603050405020304" pitchFamily="18" charset="0"/>
+                <a:cs typeface="Times New Roman" panose="02020603050405020304" pitchFamily="18" charset="0"/>
+              </a:rPr>
+            </a:br>
+            <a:r>
+              <a:rPr lang="en-US" dirty="0">
+                <a:solidFill>
+                  <a:schemeClr val="tx1"/>
+                </a:solidFill>
+                <a:latin typeface="Times New Roman" panose="02020603050405020304" pitchFamily="18" charset="0"/>
+                <a:cs typeface="Times New Roman" panose="02020603050405020304" pitchFamily="18" charset="0"/>
+              </a:rPr>
+              <a:t>(SPR)</a:t>
+            </a:r>
+          </a:p>
+        </p:txBody>
+      </p:sp>
+      <p:sp>
+        <p:nvSpPr>
+          <p:cNvPr id="9" name="Rectangle: Rounded Corners 8">
+            <a:extLst>
+              <a:ext uri="{FF2B5EF4-FFF2-40B4-BE49-F238E27FC236}">
+                <a16:creationId xmlns:a16="http://schemas.microsoft.com/office/drawing/2014/main" id="{1D5DEDF1-AED4-D92E-2C2E-4B506EE7A56B}"/>
+              </a:ext>
+            </a:extLst>
+          </p:cNvPr>
+          <p:cNvSpPr/>
+          <p:nvPr/>
+        </p:nvSpPr>
+        <p:spPr>
+          <a:xfrm>
+            <a:off x="5251960" y="2681381"/>
+            <a:ext cx="1938528" cy="1307592"/>
+          </a:xfrm>
+          <a:prstGeom prst="roundRect">
+            <a:avLst/>
+          </a:prstGeom>
+          <a:solidFill>
+            <a:srgbClr val="FFFFFF"/>
+          </a:solidFill>
+          <a:ln>
+            <a:solidFill>
+              <a:schemeClr val="tx1"/>
+            </a:solidFill>
+          </a:ln>
+          <a:effectLst>
+            <a:outerShdw blurRad="50800" dist="38100" dir="2700000" algn="tl" rotWithShape="0">
+              <a:prstClr val="black">
+                <a:alpha val="40000"/>
+              </a:prstClr>
+            </a:outerShdw>
+          </a:effectLst>
+        </p:spPr>
+        <p:style>
+          <a:lnRef idx="2">
+            <a:schemeClr val="accent6"/>
+          </a:lnRef>
+          <a:fillRef idx="1">
+            <a:schemeClr val="lt1"/>
+          </a:fillRef>
+          <a:effectRef idx="0">
+            <a:schemeClr val="accent6"/>
+          </a:effectRef>
+          <a:fontRef idx="minor">
+            <a:schemeClr val="dk1"/>
+          </a:fontRef>
+        </p:style>
+        <p:txBody>
+          <a:bodyPr rtlCol="0" anchor="ctr"/>
+          <a:lstStyle/>
+          <a:p>
+            <a:pPr algn="ctr"/>
+            <a:endParaRPr lang="en-US" dirty="0">
+              <a:solidFill>
+                <a:schemeClr val="tx1"/>
+              </a:solidFill>
+              <a:latin typeface="Times New Roman" panose="02020603050405020304" pitchFamily="18" charset="0"/>
+              <a:cs typeface="Times New Roman" panose="02020603050405020304" pitchFamily="18" charset="0"/>
+            </a:endParaRPr>
+          </a:p>
+          <a:p>
+            <a:pPr algn="ctr"/>
+            <a:r>
+              <a:rPr lang="en-US" dirty="0">
+                <a:solidFill>
+                  <a:schemeClr val="tx1"/>
+                </a:solidFill>
+                <a:latin typeface="Times New Roman" panose="02020603050405020304" pitchFamily="18" charset="0"/>
+                <a:cs typeface="Times New Roman" panose="02020603050405020304" pitchFamily="18" charset="0"/>
+              </a:rPr>
+              <a:t>Sentence</a:t>
+            </a:r>
+            <a:br>
+              <a:rPr lang="en-US" dirty="0">
+                <a:solidFill>
+                  <a:schemeClr val="tx1"/>
+                </a:solidFill>
+                <a:latin typeface="Times New Roman" panose="02020603050405020304" pitchFamily="18" charset="0"/>
+                <a:cs typeface="Times New Roman" panose="02020603050405020304" pitchFamily="18" charset="0"/>
+              </a:rPr>
+            </a:br>
+            <a:r>
+              <a:rPr lang="en-US" dirty="0">
+                <a:solidFill>
+                  <a:schemeClr val="tx1"/>
+                </a:solidFill>
+                <a:latin typeface="Times New Roman" panose="02020603050405020304" pitchFamily="18" charset="0"/>
+                <a:cs typeface="Times New Roman" panose="02020603050405020304" pitchFamily="18" charset="0"/>
+              </a:rPr>
+              <a:t>(SPR)</a:t>
+            </a:r>
+          </a:p>
+        </p:txBody>
+      </p:sp>
+      <p:sp>
+        <p:nvSpPr>
+          <p:cNvPr id="18" name="Rectangle: Rounded Corners 17">
+            <a:extLst>
+              <a:ext uri="{FF2B5EF4-FFF2-40B4-BE49-F238E27FC236}">
+                <a16:creationId xmlns:a16="http://schemas.microsoft.com/office/drawing/2014/main" id="{A7059E0C-06D7-BCDC-052F-593D78345F51}"/>
+              </a:ext>
+            </a:extLst>
+          </p:cNvPr>
+          <p:cNvSpPr/>
+          <p:nvPr/>
+        </p:nvSpPr>
+        <p:spPr>
+          <a:xfrm>
+            <a:off x="5154168" y="2789931"/>
+            <a:ext cx="1938528" cy="1307592"/>
+          </a:xfrm>
+          <a:prstGeom prst="roundRect">
+            <a:avLst/>
+          </a:prstGeom>
+          <a:solidFill>
+            <a:srgbClr val="FFFFFF"/>
+          </a:solidFill>
+          <a:ln>
+            <a:solidFill>
+              <a:schemeClr val="tx1"/>
+            </a:solidFill>
+          </a:ln>
+          <a:effectLst>
+            <a:outerShdw blurRad="50800" dist="38100" dir="2700000" algn="tl" rotWithShape="0">
+              <a:prstClr val="black">
+                <a:alpha val="40000"/>
+              </a:prstClr>
+            </a:outerShdw>
+          </a:effectLst>
+        </p:spPr>
+        <p:style>
+          <a:lnRef idx="2">
+            <a:schemeClr val="accent6"/>
+          </a:lnRef>
+          <a:fillRef idx="1">
+            <a:schemeClr val="lt1"/>
+          </a:fillRef>
+          <a:effectRef idx="0">
+            <a:schemeClr val="accent6"/>
+          </a:effectRef>
+          <a:fontRef idx="minor">
+            <a:schemeClr val="dk1"/>
+          </a:fontRef>
+        </p:style>
+        <p:txBody>
+          <a:bodyPr rtlCol="0" anchor="ctr"/>
+          <a:lstStyle/>
+          <a:p>
+            <a:pPr algn="ctr"/>
+            <a:endParaRPr lang="en-US" dirty="0">
+              <a:solidFill>
+                <a:schemeClr val="tx1"/>
+              </a:solidFill>
+              <a:latin typeface="Times New Roman" panose="02020603050405020304" pitchFamily="18" charset="0"/>
+              <a:cs typeface="Times New Roman" panose="02020603050405020304" pitchFamily="18" charset="0"/>
+            </a:endParaRPr>
+          </a:p>
+          <a:p>
+            <a:pPr algn="ctr"/>
+            <a:r>
+              <a:rPr lang="en-US" dirty="0">
+                <a:solidFill>
+                  <a:schemeClr val="tx1"/>
+                </a:solidFill>
+                <a:latin typeface="Times New Roman" panose="02020603050405020304" pitchFamily="18" charset="0"/>
+                <a:cs typeface="Times New Roman" panose="02020603050405020304" pitchFamily="18" charset="0"/>
+              </a:rPr>
+              <a:t>Sentence</a:t>
+            </a:r>
+            <a:br>
+              <a:rPr lang="en-US" dirty="0">
+                <a:solidFill>
+                  <a:schemeClr val="tx1"/>
+                </a:solidFill>
+                <a:latin typeface="Times New Roman" panose="02020603050405020304" pitchFamily="18" charset="0"/>
+                <a:cs typeface="Times New Roman" panose="02020603050405020304" pitchFamily="18" charset="0"/>
+              </a:rPr>
+            </a:br>
+            <a:r>
+              <a:rPr lang="en-US" dirty="0">
+                <a:solidFill>
+                  <a:schemeClr val="tx1"/>
+                </a:solidFill>
+                <a:latin typeface="Times New Roman" panose="02020603050405020304" pitchFamily="18" charset="0"/>
+                <a:cs typeface="Times New Roman" panose="02020603050405020304" pitchFamily="18" charset="0"/>
+              </a:rPr>
+              <a:t>(SPR)</a:t>
+            </a:r>
+            <a:br>
+              <a:rPr lang="en-US" dirty="0">
+                <a:solidFill>
+                  <a:schemeClr val="tx1"/>
+                </a:solidFill>
+                <a:latin typeface="Times New Roman" panose="02020603050405020304" pitchFamily="18" charset="0"/>
+                <a:cs typeface="Times New Roman" panose="02020603050405020304" pitchFamily="18" charset="0"/>
+              </a:rPr>
+            </a:br>
+            <a:endParaRPr lang="en-US" dirty="0">
+              <a:solidFill>
+                <a:schemeClr val="tx1"/>
+              </a:solidFill>
+              <a:latin typeface="Times New Roman" panose="02020603050405020304" pitchFamily="18" charset="0"/>
+              <a:cs typeface="Times New Roman" panose="02020603050405020304" pitchFamily="18" charset="0"/>
+            </a:endParaRPr>
+          </a:p>
+        </p:txBody>
+      </p:sp>
+      <p:sp>
+        <p:nvSpPr>
+          <p:cNvPr id="21" name="Rectangle: Rounded Corners 20">
+            <a:extLst>
+              <a:ext uri="{FF2B5EF4-FFF2-40B4-BE49-F238E27FC236}">
+                <a16:creationId xmlns:a16="http://schemas.microsoft.com/office/drawing/2014/main" id="{7D89940C-7480-EED8-978A-1263F4406B2B}"/>
+              </a:ext>
+            </a:extLst>
+          </p:cNvPr>
+          <p:cNvSpPr/>
+          <p:nvPr/>
+        </p:nvSpPr>
+        <p:spPr>
+          <a:xfrm>
+            <a:off x="7405879" y="2789931"/>
+            <a:ext cx="1938528" cy="1307592"/>
+          </a:xfrm>
+          <a:prstGeom prst="roundRect">
+            <a:avLst/>
+          </a:prstGeom>
+          <a:solidFill>
+            <a:srgbClr val="FFFFFF"/>
+          </a:solidFill>
+          <a:ln>
+            <a:solidFill>
+              <a:schemeClr val="tx1"/>
+            </a:solidFill>
+          </a:ln>
+          <a:effectLst>
+            <a:outerShdw blurRad="50800" dist="38100" dir="2700000" algn="tl" rotWithShape="0">
+              <a:prstClr val="black">
+                <a:alpha val="40000"/>
+              </a:prstClr>
+            </a:outerShdw>
+          </a:effectLst>
+        </p:spPr>
+        <p:style>
+          <a:lnRef idx="2">
+            <a:schemeClr val="accent6"/>
+          </a:lnRef>
+          <a:fillRef idx="1">
+            <a:schemeClr val="lt1"/>
+          </a:fillRef>
+          <a:effectRef idx="0">
+            <a:schemeClr val="accent6"/>
+          </a:effectRef>
+          <a:fontRef idx="minor">
+            <a:schemeClr val="dk1"/>
+          </a:fontRef>
+        </p:style>
+        <p:txBody>
+          <a:bodyPr rtlCol="0" anchor="ctr"/>
+          <a:lstStyle/>
+          <a:p>
+            <a:pPr algn="ctr"/>
+            <a:endParaRPr lang="en-US" sz="1600" dirty="0">
+              <a:latin typeface="Times New Roman" panose="02020603050405020304" pitchFamily="18" charset="0"/>
+              <a:cs typeface="Times New Roman" panose="02020603050405020304" pitchFamily="18" charset="0"/>
+            </a:endParaRPr>
+          </a:p>
+        </p:txBody>
+      </p:sp>
+      <p:sp>
+        <p:nvSpPr>
+          <p:cNvPr id="38" name="TextBox 37">
+            <a:extLst>
+              <a:ext uri="{FF2B5EF4-FFF2-40B4-BE49-F238E27FC236}">
+                <a16:creationId xmlns:a16="http://schemas.microsoft.com/office/drawing/2014/main" id="{F09C9B0D-08F9-216E-D0F8-4EA392FB65F7}"/>
+              </a:ext>
+            </a:extLst>
+          </p:cNvPr>
+          <p:cNvSpPr txBox="1"/>
+          <p:nvPr/>
+        </p:nvSpPr>
+        <p:spPr>
+          <a:xfrm>
+            <a:off x="8061960" y="3192579"/>
+            <a:ext cx="618744" cy="461665"/>
+          </a:xfrm>
+          <a:prstGeom prst="rect">
+            <a:avLst/>
+          </a:prstGeom>
+          <a:noFill/>
+        </p:spPr>
+        <p:txBody>
+          <a:bodyPr wrap="square">
+            <a:spAutoFit/>
+          </a:bodyPr>
+          <a:lstStyle/>
+          <a:p>
+            <a:pPr algn="ctr"/>
+            <a:r>
+              <a:rPr lang="en-US" sz="2400" b="1" dirty="0">
+                <a:latin typeface="Times New Roman" panose="02020603050405020304" pitchFamily="18" charset="0"/>
+                <a:cs typeface="Times New Roman" panose="02020603050405020304" pitchFamily="18" charset="0"/>
+              </a:rPr>
+              <a:t>+</a:t>
+            </a:r>
+          </a:p>
+        </p:txBody>
+      </p:sp>
+      <p:sp>
+        <p:nvSpPr>
+          <p:cNvPr id="39" name="TextBox 38">
+            <a:extLst>
+              <a:ext uri="{FF2B5EF4-FFF2-40B4-BE49-F238E27FC236}">
+                <a16:creationId xmlns:a16="http://schemas.microsoft.com/office/drawing/2014/main" id="{FD491E32-17FF-9068-2EDC-31D957B3E773}"/>
+              </a:ext>
+            </a:extLst>
+          </p:cNvPr>
+          <p:cNvSpPr txBox="1"/>
+          <p:nvPr/>
+        </p:nvSpPr>
+        <p:spPr>
+          <a:xfrm>
+            <a:off x="8593668" y="1943700"/>
+            <a:ext cx="3002448" cy="584775"/>
+          </a:xfrm>
+          <a:prstGeom prst="rect">
+            <a:avLst/>
+          </a:prstGeom>
+          <a:noFill/>
+        </p:spPr>
+        <p:txBody>
+          <a:bodyPr wrap="square">
+            <a:spAutoFit/>
+          </a:bodyPr>
+          <a:lstStyle/>
+          <a:p>
+            <a:pPr algn="r"/>
+            <a:r>
+              <a:rPr lang="en-US" sz="1600" dirty="0">
+                <a:latin typeface="Times New Roman" panose="02020603050405020304" pitchFamily="18" charset="0"/>
+                <a:cs typeface="Times New Roman" panose="02020603050405020304" pitchFamily="18" charset="0"/>
+              </a:rPr>
+              <a:t>= spacebar to advance</a:t>
+            </a:r>
+            <a:br>
+              <a:rPr lang="en-US" sz="1600" dirty="0">
+                <a:latin typeface="Times New Roman" panose="02020603050405020304" pitchFamily="18" charset="0"/>
+                <a:cs typeface="Times New Roman" panose="02020603050405020304" pitchFamily="18" charset="0"/>
+              </a:rPr>
+            </a:br>
+            <a:r>
+              <a:rPr lang="hu-HU" sz="1600" dirty="0">
+                <a:latin typeface="Times New Roman" panose="02020603050405020304" pitchFamily="18" charset="0"/>
+                <a:cs typeface="Times New Roman" panose="02020603050405020304" pitchFamily="18" charset="0"/>
+              </a:rPr>
+              <a:t>🖰</a:t>
+            </a:r>
+            <a:r>
+              <a:rPr lang="en-US" sz="1600" dirty="0">
+                <a:latin typeface="Times New Roman" panose="02020603050405020304" pitchFamily="18" charset="0"/>
+                <a:cs typeface="Times New Roman" panose="02020603050405020304" pitchFamily="18" charset="0"/>
+              </a:rPr>
+              <a:t> = mouse click to chose</a:t>
+            </a:r>
+          </a:p>
+        </p:txBody>
+      </p:sp>
+      <p:sp>
+        <p:nvSpPr>
+          <p:cNvPr id="41" name="Rectangle: Rounded Corners 40">
+            <a:extLst>
+              <a:ext uri="{FF2B5EF4-FFF2-40B4-BE49-F238E27FC236}">
+                <a16:creationId xmlns:a16="http://schemas.microsoft.com/office/drawing/2014/main" id="{D24FED49-4FFE-5627-6962-94495AFDB156}"/>
+              </a:ext>
+            </a:extLst>
+          </p:cNvPr>
+          <p:cNvSpPr/>
+          <p:nvPr/>
+        </p:nvSpPr>
+        <p:spPr>
+          <a:xfrm>
+            <a:off x="879475" y="3156732"/>
+            <a:ext cx="590550" cy="573419"/>
+          </a:xfrm>
+          <a:prstGeom prst="roundRect">
+            <a:avLst/>
+          </a:prstGeom>
+          <a:solidFill>
+            <a:schemeClr val="tx2"/>
+          </a:solidFill>
+          <a:ln>
+            <a:noFill/>
+          </a:ln>
+          <a:effectLst>
+            <a:outerShdw blurRad="50800" dist="38100" dir="2700000" algn="tl" rotWithShape="0">
+              <a:prstClr val="black">
+                <a:alpha val="40000"/>
+              </a:prstClr>
+            </a:outerShdw>
+          </a:effectLst>
+        </p:spPr>
+        <p:style>
+          <a:lnRef idx="2">
+            <a:schemeClr val="accent1">
+              <a:shade val="15000"/>
+            </a:schemeClr>
+          </a:lnRef>
+          <a:fillRef idx="1">
+            <a:schemeClr val="accent1"/>
+          </a:fillRef>
+          <a:effectRef idx="0">
+            <a:schemeClr val="accent1"/>
+          </a:effectRef>
+          <a:fontRef idx="minor">
+            <a:schemeClr val="lt1"/>
+          </a:fontRef>
+        </p:style>
+        <p:txBody>
+          <a:bodyPr rtlCol="0" anchor="ctr"/>
+          <a:lstStyle/>
+          <a:p>
+            <a:pPr algn="ctr"/>
+            <a:r>
+              <a:rPr lang="en-US" sz="3600" dirty="0">
+                <a:solidFill>
+                  <a:schemeClr val="bg2"/>
+                </a:solidFill>
+                <a:latin typeface="Times New Roman" panose="02020603050405020304" pitchFamily="18" charset="0"/>
+                <a:cs typeface="Times New Roman" panose="02020603050405020304" pitchFamily="18" charset="0"/>
+              </a:rPr>
+              <a:t>A</a:t>
+            </a:r>
+          </a:p>
+        </p:txBody>
+      </p:sp>
+      <p:sp>
+        <p:nvSpPr>
+          <p:cNvPr id="42" name="Rectangle: Rounded Corners 41">
+            <a:extLst>
+              <a:ext uri="{FF2B5EF4-FFF2-40B4-BE49-F238E27FC236}">
+                <a16:creationId xmlns:a16="http://schemas.microsoft.com/office/drawing/2014/main" id="{CACB7800-D77B-87D9-A8A8-10C6CA3AF9BF}"/>
+              </a:ext>
+            </a:extLst>
+          </p:cNvPr>
+          <p:cNvSpPr/>
+          <p:nvPr/>
+        </p:nvSpPr>
+        <p:spPr>
+          <a:xfrm>
+            <a:off x="1779397" y="3150755"/>
+            <a:ext cx="590550" cy="573419"/>
+          </a:xfrm>
+          <a:prstGeom prst="roundRect">
+            <a:avLst/>
+          </a:prstGeom>
+          <a:solidFill>
+            <a:schemeClr val="tx2"/>
+          </a:solidFill>
+          <a:ln>
+            <a:noFill/>
+          </a:ln>
+          <a:effectLst>
+            <a:outerShdw blurRad="50800" dist="38100" dir="2700000" algn="tl" rotWithShape="0">
+              <a:prstClr val="black">
+                <a:alpha val="40000"/>
+              </a:prstClr>
+            </a:outerShdw>
+          </a:effectLst>
+        </p:spPr>
+        <p:style>
+          <a:lnRef idx="2">
+            <a:schemeClr val="accent1">
+              <a:shade val="15000"/>
+            </a:schemeClr>
+          </a:lnRef>
+          <a:fillRef idx="1">
+            <a:schemeClr val="accent1"/>
+          </a:fillRef>
+          <a:effectRef idx="0">
+            <a:schemeClr val="accent1"/>
+          </a:effectRef>
+          <a:fontRef idx="minor">
+            <a:schemeClr val="lt1"/>
+          </a:fontRef>
+        </p:style>
+        <p:txBody>
+          <a:bodyPr rtlCol="0" anchor="ctr"/>
+          <a:lstStyle/>
+          <a:p>
+            <a:pPr algn="ctr"/>
+            <a:r>
+              <a:rPr lang="en-US" sz="3600" dirty="0">
+                <a:solidFill>
+                  <a:schemeClr val="bg2"/>
+                </a:solidFill>
+                <a:latin typeface="Times New Roman" panose="02020603050405020304" pitchFamily="18" charset="0"/>
+                <a:cs typeface="Times New Roman" panose="02020603050405020304" pitchFamily="18" charset="0"/>
+              </a:rPr>
+              <a:t>B</a:t>
+            </a:r>
+          </a:p>
+        </p:txBody>
+      </p:sp>
+      <p:sp>
+        <p:nvSpPr>
+          <p:cNvPr id="47" name="Rectangle: Rounded Corners 46">
+            <a:extLst>
+              <a:ext uri="{FF2B5EF4-FFF2-40B4-BE49-F238E27FC236}">
+                <a16:creationId xmlns:a16="http://schemas.microsoft.com/office/drawing/2014/main" id="{87B31EDF-EA39-21DB-4FC5-FDA7A82405CA}"/>
+              </a:ext>
+            </a:extLst>
+          </p:cNvPr>
+          <p:cNvSpPr/>
+          <p:nvPr/>
+        </p:nvSpPr>
+        <p:spPr>
+          <a:xfrm>
+            <a:off x="9878187" y="3157170"/>
+            <a:ext cx="590550" cy="573419"/>
+          </a:xfrm>
+          <a:prstGeom prst="roundRect">
+            <a:avLst/>
+          </a:prstGeom>
+          <a:solidFill>
+            <a:schemeClr val="tx2"/>
+          </a:solidFill>
+          <a:ln>
+            <a:noFill/>
+          </a:ln>
+          <a:effectLst>
+            <a:outerShdw blurRad="50800" dist="38100" dir="2700000" algn="tl" rotWithShape="0">
+              <a:prstClr val="black">
+                <a:alpha val="40000"/>
+              </a:prstClr>
+            </a:outerShdw>
+          </a:effectLst>
+        </p:spPr>
+        <p:style>
+          <a:lnRef idx="2">
+            <a:schemeClr val="accent1">
+              <a:shade val="15000"/>
+            </a:schemeClr>
+          </a:lnRef>
+          <a:fillRef idx="1">
+            <a:schemeClr val="accent1"/>
+          </a:fillRef>
+          <a:effectRef idx="0">
+            <a:schemeClr val="accent1"/>
+          </a:effectRef>
+          <a:fontRef idx="minor">
+            <a:schemeClr val="lt1"/>
+          </a:fontRef>
+        </p:style>
+        <p:txBody>
+          <a:bodyPr rtlCol="0" anchor="ctr"/>
+          <a:lstStyle/>
+          <a:p>
+            <a:pPr algn="ctr"/>
+            <a:r>
+              <a:rPr lang="en-US" sz="3600" dirty="0">
+                <a:solidFill>
+                  <a:schemeClr val="bg2"/>
+                </a:solidFill>
+                <a:latin typeface="Times New Roman" panose="02020603050405020304" pitchFamily="18" charset="0"/>
+                <a:cs typeface="Times New Roman" panose="02020603050405020304" pitchFamily="18" charset="0"/>
+              </a:rPr>
+              <a:t>A</a:t>
+            </a:r>
+          </a:p>
+        </p:txBody>
+      </p:sp>
+      <p:sp>
+        <p:nvSpPr>
+          <p:cNvPr id="48" name="Rectangle: Rounded Corners 47">
+            <a:extLst>
+              <a:ext uri="{FF2B5EF4-FFF2-40B4-BE49-F238E27FC236}">
+                <a16:creationId xmlns:a16="http://schemas.microsoft.com/office/drawing/2014/main" id="{CCD57B91-CEDE-3514-E86A-30F2BB2BBCD3}"/>
+              </a:ext>
+            </a:extLst>
+          </p:cNvPr>
+          <p:cNvSpPr/>
+          <p:nvPr/>
+        </p:nvSpPr>
+        <p:spPr>
+          <a:xfrm>
+            <a:off x="10778109" y="3151193"/>
+            <a:ext cx="590550" cy="573419"/>
+          </a:xfrm>
+          <a:prstGeom prst="roundRect">
+            <a:avLst/>
+          </a:prstGeom>
+          <a:solidFill>
+            <a:schemeClr val="tx2"/>
+          </a:solidFill>
+          <a:ln>
+            <a:noFill/>
+          </a:ln>
+          <a:effectLst>
+            <a:outerShdw blurRad="50800" dist="38100" dir="2700000" algn="tl" rotWithShape="0">
+              <a:prstClr val="black">
+                <a:alpha val="40000"/>
+              </a:prstClr>
+            </a:outerShdw>
+          </a:effectLst>
+        </p:spPr>
+        <p:style>
+          <a:lnRef idx="2">
+            <a:schemeClr val="accent1">
+              <a:shade val="15000"/>
+            </a:schemeClr>
+          </a:lnRef>
+          <a:fillRef idx="1">
+            <a:schemeClr val="accent1"/>
+          </a:fillRef>
+          <a:effectRef idx="0">
+            <a:schemeClr val="accent1"/>
+          </a:effectRef>
+          <a:fontRef idx="minor">
+            <a:schemeClr val="lt1"/>
+          </a:fontRef>
+        </p:style>
+        <p:txBody>
+          <a:bodyPr rtlCol="0" anchor="ctr"/>
+          <a:lstStyle/>
+          <a:p>
+            <a:pPr algn="ctr"/>
+            <a:r>
+              <a:rPr lang="en-US" sz="3600" dirty="0">
+                <a:solidFill>
+                  <a:schemeClr val="bg2"/>
+                </a:solidFill>
+                <a:latin typeface="Times New Roman" panose="02020603050405020304" pitchFamily="18" charset="0"/>
+                <a:cs typeface="Times New Roman" panose="02020603050405020304" pitchFamily="18" charset="0"/>
+              </a:rPr>
+              <a:t>B</a:t>
+            </a:r>
+          </a:p>
+        </p:txBody>
+      </p:sp>
+      <p:sp>
+        <p:nvSpPr>
+          <p:cNvPr id="49" name="TextBox 48">
+            <a:extLst>
+              <a:ext uri="{FF2B5EF4-FFF2-40B4-BE49-F238E27FC236}">
+                <a16:creationId xmlns:a16="http://schemas.microsoft.com/office/drawing/2014/main" id="{901F113D-1330-63DD-4552-262FE4D2C551}"/>
+              </a:ext>
+            </a:extLst>
+          </p:cNvPr>
+          <p:cNvSpPr txBox="1"/>
+          <p:nvPr/>
+        </p:nvSpPr>
+        <p:spPr>
+          <a:xfrm>
+            <a:off x="658368" y="1957133"/>
+            <a:ext cx="4450210" cy="584775"/>
+          </a:xfrm>
+          <a:prstGeom prst="rect">
+            <a:avLst/>
+          </a:prstGeom>
+          <a:noFill/>
+        </p:spPr>
+        <p:txBody>
+          <a:bodyPr wrap="square">
+            <a:spAutoFit/>
+          </a:bodyPr>
+          <a:lstStyle/>
+          <a:p>
+            <a:r>
+              <a:rPr lang="en-US" sz="1600" dirty="0">
+                <a:latin typeface="Times New Roman" panose="02020603050405020304" pitchFamily="18" charset="0"/>
+                <a:cs typeface="Times New Roman" panose="02020603050405020304" pitchFamily="18" charset="0"/>
+              </a:rPr>
+              <a:t>SPR = Self-Paced Reading</a:t>
+            </a:r>
+          </a:p>
+          <a:p>
+            <a:r>
+              <a:rPr lang="en-US" sz="1600" dirty="0">
+                <a:latin typeface="Times New Roman" panose="02020603050405020304" pitchFamily="18" charset="0"/>
+                <a:cs typeface="Times New Roman" panose="02020603050405020304" pitchFamily="18" charset="0"/>
+              </a:rPr>
+              <a:t>ET = Eye-Tracking</a:t>
+            </a:r>
+          </a:p>
+        </p:txBody>
+      </p:sp>
+      <p:sp>
+        <p:nvSpPr>
+          <p:cNvPr id="53" name="TextBox 52">
+            <a:extLst>
+              <a:ext uri="{FF2B5EF4-FFF2-40B4-BE49-F238E27FC236}">
+                <a16:creationId xmlns:a16="http://schemas.microsoft.com/office/drawing/2014/main" id="{814BB901-B8EC-71BA-C046-DEE81DD8C931}"/>
+              </a:ext>
+            </a:extLst>
+          </p:cNvPr>
+          <p:cNvSpPr txBox="1"/>
+          <p:nvPr/>
+        </p:nvSpPr>
+        <p:spPr>
+          <a:xfrm>
+            <a:off x="4593267" y="4152192"/>
+            <a:ext cx="817882" cy="307777"/>
+          </a:xfrm>
+          <a:prstGeom prst="rect">
+            <a:avLst/>
+          </a:prstGeom>
+          <a:noFill/>
+        </p:spPr>
+        <p:txBody>
+          <a:bodyPr wrap="square" anchor="b">
+            <a:spAutoFit/>
+          </a:bodyPr>
+          <a:lstStyle/>
+          <a:p>
+            <a:pPr algn="ctr"/>
+            <a:r>
+              <a:rPr lang="en-US" sz="1400" dirty="0">
+                <a:latin typeface="Times New Roman" panose="02020603050405020304" pitchFamily="18" charset="0"/>
+                <a:cs typeface="Times New Roman" panose="02020603050405020304" pitchFamily="18" charset="0"/>
+              </a:rPr>
+              <a:t>1000ms</a:t>
+            </a:r>
+          </a:p>
+        </p:txBody>
+      </p:sp>
+      <p:sp>
+        <p:nvSpPr>
+          <p:cNvPr id="54" name="TextBox 53">
+            <a:extLst>
+              <a:ext uri="{FF2B5EF4-FFF2-40B4-BE49-F238E27FC236}">
+                <a16:creationId xmlns:a16="http://schemas.microsoft.com/office/drawing/2014/main" id="{B8E004A6-51DC-035F-16D3-B45652BE1E5E}"/>
+              </a:ext>
+            </a:extLst>
+          </p:cNvPr>
+          <p:cNvSpPr txBox="1"/>
+          <p:nvPr/>
+        </p:nvSpPr>
+        <p:spPr>
+          <a:xfrm>
+            <a:off x="6848219" y="4152192"/>
+            <a:ext cx="817882" cy="307777"/>
+          </a:xfrm>
+          <a:prstGeom prst="rect">
+            <a:avLst/>
+          </a:prstGeom>
+          <a:noFill/>
+        </p:spPr>
+        <p:txBody>
+          <a:bodyPr wrap="square" anchor="b">
+            <a:spAutoFit/>
+          </a:bodyPr>
+          <a:lstStyle/>
+          <a:p>
+            <a:pPr algn="ctr"/>
+            <a:r>
+              <a:rPr lang="en-US" sz="1400" dirty="0">
+                <a:latin typeface="Times New Roman" panose="02020603050405020304" pitchFamily="18" charset="0"/>
+                <a:cs typeface="Times New Roman" panose="02020603050405020304" pitchFamily="18" charset="0"/>
+              </a:rPr>
+              <a:t>1000ms</a:t>
+            </a:r>
+          </a:p>
+        </p:txBody>
+      </p:sp>
+      <p:sp>
+        <p:nvSpPr>
+          <p:cNvPr id="56" name="TextBox 55">
+            <a:extLst>
+              <a:ext uri="{FF2B5EF4-FFF2-40B4-BE49-F238E27FC236}">
+                <a16:creationId xmlns:a16="http://schemas.microsoft.com/office/drawing/2014/main" id="{CF443F7A-4D2C-2D64-3D9B-99ECB6E4E27A}"/>
+              </a:ext>
+            </a:extLst>
+          </p:cNvPr>
+          <p:cNvSpPr txBox="1"/>
+          <p:nvPr/>
+        </p:nvSpPr>
+        <p:spPr>
+          <a:xfrm>
+            <a:off x="7782938" y="4083685"/>
+            <a:ext cx="1176788" cy="400110"/>
+          </a:xfrm>
+          <a:prstGeom prst="rect">
+            <a:avLst/>
+          </a:prstGeom>
+          <a:noFill/>
+        </p:spPr>
+        <p:txBody>
+          <a:bodyPr wrap="square" anchor="b">
+            <a:spAutoFit/>
+          </a:bodyPr>
+          <a:lstStyle/>
+          <a:p>
+            <a:pPr algn="ctr"/>
+            <a:r>
+              <a:rPr lang="en-US" sz="2000" dirty="0">
+                <a:latin typeface="Times New Roman" panose="02020603050405020304" pitchFamily="18" charset="0"/>
+                <a:cs typeface="Times New Roman" panose="02020603050405020304" pitchFamily="18" charset="0"/>
+              </a:rPr>
+              <a:t>1000ms</a:t>
+            </a:r>
+          </a:p>
+        </p:txBody>
+      </p:sp>
+      <p:sp>
+        <p:nvSpPr>
+          <p:cNvPr id="57" name="TextBox 56">
+            <a:extLst>
+              <a:ext uri="{FF2B5EF4-FFF2-40B4-BE49-F238E27FC236}">
+                <a16:creationId xmlns:a16="http://schemas.microsoft.com/office/drawing/2014/main" id="{20CE38C0-D1F5-366C-5214-BB319DF58D69}"/>
+              </a:ext>
+            </a:extLst>
+          </p:cNvPr>
+          <p:cNvSpPr txBox="1"/>
+          <p:nvPr/>
+        </p:nvSpPr>
+        <p:spPr>
+          <a:xfrm>
+            <a:off x="2342569" y="4152192"/>
+            <a:ext cx="817882" cy="307777"/>
+          </a:xfrm>
+          <a:prstGeom prst="rect">
+            <a:avLst/>
+          </a:prstGeom>
+          <a:noFill/>
+        </p:spPr>
+        <p:txBody>
+          <a:bodyPr wrap="square" anchor="b">
+            <a:spAutoFit/>
+          </a:bodyPr>
+          <a:lstStyle/>
+          <a:p>
+            <a:pPr algn="ctr"/>
+            <a:r>
+              <a:rPr lang="en-US" sz="1400" dirty="0">
+                <a:latin typeface="Times New Roman" panose="02020603050405020304" pitchFamily="18" charset="0"/>
+                <a:cs typeface="Times New Roman" panose="02020603050405020304" pitchFamily="18" charset="0"/>
+              </a:rPr>
+              <a:t>1000ms</a:t>
+            </a:r>
+          </a:p>
+        </p:txBody>
+      </p:sp>
+      <p:sp>
+        <p:nvSpPr>
+          <p:cNvPr id="58" name="TextBox 57">
+            <a:extLst>
+              <a:ext uri="{FF2B5EF4-FFF2-40B4-BE49-F238E27FC236}">
+                <a16:creationId xmlns:a16="http://schemas.microsoft.com/office/drawing/2014/main" id="{F56A8E0A-6FD7-670A-5A63-3316365C2391}"/>
+              </a:ext>
+            </a:extLst>
+          </p:cNvPr>
+          <p:cNvSpPr txBox="1"/>
+          <p:nvPr/>
+        </p:nvSpPr>
+        <p:spPr>
+          <a:xfrm>
+            <a:off x="3288465" y="4083685"/>
+            <a:ext cx="1176788" cy="400110"/>
+          </a:xfrm>
+          <a:prstGeom prst="rect">
+            <a:avLst/>
+          </a:prstGeom>
+          <a:noFill/>
+        </p:spPr>
+        <p:txBody>
+          <a:bodyPr wrap="square" anchor="b">
+            <a:spAutoFit/>
+          </a:bodyPr>
+          <a:lstStyle/>
+          <a:p>
+            <a:pPr algn="ctr"/>
+            <a:r>
+              <a:rPr lang="en-US" sz="2000" dirty="0">
+                <a:latin typeface="Times New Roman" panose="02020603050405020304" pitchFamily="18" charset="0"/>
+                <a:cs typeface="Times New Roman" panose="02020603050405020304" pitchFamily="18" charset="0"/>
+              </a:rPr>
+              <a:t>1000ms</a:t>
+            </a:r>
+          </a:p>
+        </p:txBody>
+      </p:sp>
+      <p:sp>
+        <p:nvSpPr>
+          <p:cNvPr id="59" name="TextBox 58">
+            <a:extLst>
+              <a:ext uri="{FF2B5EF4-FFF2-40B4-BE49-F238E27FC236}">
+                <a16:creationId xmlns:a16="http://schemas.microsoft.com/office/drawing/2014/main" id="{7E8573BF-65D7-3B56-BFA4-47DC6F9BC7CD}"/>
+              </a:ext>
+            </a:extLst>
+          </p:cNvPr>
+          <p:cNvSpPr txBox="1"/>
+          <p:nvPr/>
+        </p:nvSpPr>
+        <p:spPr>
+          <a:xfrm>
+            <a:off x="9135873" y="4157643"/>
+            <a:ext cx="817882" cy="307777"/>
+          </a:xfrm>
+          <a:prstGeom prst="rect">
+            <a:avLst/>
+          </a:prstGeom>
+          <a:noFill/>
+        </p:spPr>
+        <p:txBody>
+          <a:bodyPr wrap="square" anchor="b">
+            <a:spAutoFit/>
+          </a:bodyPr>
+          <a:lstStyle/>
+          <a:p>
+            <a:pPr algn="ctr"/>
+            <a:r>
+              <a:rPr lang="en-US" sz="1400" dirty="0">
+                <a:latin typeface="Times New Roman" panose="02020603050405020304" pitchFamily="18" charset="0"/>
+                <a:cs typeface="Times New Roman" panose="02020603050405020304" pitchFamily="18" charset="0"/>
+              </a:rPr>
+              <a:t>1000ms</a:t>
+            </a:r>
+          </a:p>
+        </p:txBody>
+      </p:sp>
+      <p:sp>
+        <p:nvSpPr>
+          <p:cNvPr id="60" name="TextBox 59">
+            <a:extLst>
+              <a:ext uri="{FF2B5EF4-FFF2-40B4-BE49-F238E27FC236}">
+                <a16:creationId xmlns:a16="http://schemas.microsoft.com/office/drawing/2014/main" id="{61E263DB-1762-45B6-5FE1-6C12AC1DBAA5}"/>
+              </a:ext>
+            </a:extLst>
+          </p:cNvPr>
+          <p:cNvSpPr txBox="1"/>
+          <p:nvPr/>
+        </p:nvSpPr>
+        <p:spPr>
+          <a:xfrm>
+            <a:off x="11031218" y="4160614"/>
+            <a:ext cx="817882" cy="307777"/>
+          </a:xfrm>
+          <a:prstGeom prst="rect">
+            <a:avLst/>
+          </a:prstGeom>
+          <a:noFill/>
+        </p:spPr>
+        <p:txBody>
+          <a:bodyPr wrap="square" anchor="b">
+            <a:spAutoFit/>
+          </a:bodyPr>
+          <a:lstStyle/>
+          <a:p>
+            <a:pPr algn="r"/>
+            <a:r>
+              <a:rPr lang="en-US" sz="1400" dirty="0">
+                <a:latin typeface="Times New Roman" panose="02020603050405020304" pitchFamily="18" charset="0"/>
+                <a:cs typeface="Times New Roman" panose="02020603050405020304" pitchFamily="18" charset="0"/>
+              </a:rPr>
+              <a:t>1000ms</a:t>
+            </a:r>
+          </a:p>
+        </p:txBody>
+      </p:sp>
+      <p:sp>
+        <p:nvSpPr>
+          <p:cNvPr id="66" name="TextBox 65">
+            <a:extLst>
+              <a:ext uri="{FF2B5EF4-FFF2-40B4-BE49-F238E27FC236}">
+                <a16:creationId xmlns:a16="http://schemas.microsoft.com/office/drawing/2014/main" id="{BBD5419B-31FC-73D7-F855-B90166422A21}"/>
+              </a:ext>
+            </a:extLst>
+          </p:cNvPr>
+          <p:cNvSpPr txBox="1"/>
+          <p:nvPr/>
+        </p:nvSpPr>
+        <p:spPr>
+          <a:xfrm>
+            <a:off x="4735959" y="3161801"/>
+            <a:ext cx="532513" cy="492443"/>
+          </a:xfrm>
+          <a:prstGeom prst="rect">
+            <a:avLst/>
+          </a:prstGeom>
+          <a:noFill/>
+          <a:ln>
+            <a:noFill/>
+          </a:ln>
+        </p:spPr>
+        <p:txBody>
+          <a:bodyPr wrap="square">
+            <a:spAutoFit/>
+          </a:bodyPr>
+          <a:lstStyle/>
+          <a:p>
+            <a:pPr algn="ctr"/>
+            <a:r>
+              <a:rPr lang="en-US" sz="2600" dirty="0">
+                <a:solidFill>
+                  <a:schemeClr val="tx2"/>
+                </a:solidFill>
+                <a:latin typeface="Times New Roman" panose="02020603050405020304" pitchFamily="18" charset="0"/>
+                <a:cs typeface="Times New Roman" panose="02020603050405020304" pitchFamily="18" charset="0"/>
+              </a:rPr>
+              <a:t>→</a:t>
+            </a:r>
+          </a:p>
+        </p:txBody>
+      </p:sp>
+      <p:sp>
+        <p:nvSpPr>
+          <p:cNvPr id="67" name="TextBox 66">
+            <a:extLst>
+              <a:ext uri="{FF2B5EF4-FFF2-40B4-BE49-F238E27FC236}">
+                <a16:creationId xmlns:a16="http://schemas.microsoft.com/office/drawing/2014/main" id="{5E50319B-6FE6-6C60-69EF-C0460D2DB08C}"/>
+              </a:ext>
+            </a:extLst>
+          </p:cNvPr>
+          <p:cNvSpPr txBox="1"/>
+          <p:nvPr/>
+        </p:nvSpPr>
+        <p:spPr>
+          <a:xfrm>
+            <a:off x="6980687" y="3161801"/>
+            <a:ext cx="532513" cy="492443"/>
+          </a:xfrm>
+          <a:prstGeom prst="rect">
+            <a:avLst/>
+          </a:prstGeom>
+          <a:noFill/>
+          <a:ln>
+            <a:noFill/>
+          </a:ln>
+        </p:spPr>
+        <p:txBody>
+          <a:bodyPr wrap="square">
+            <a:spAutoFit/>
+          </a:bodyPr>
+          <a:lstStyle/>
+          <a:p>
+            <a:pPr algn="ctr"/>
+            <a:r>
+              <a:rPr lang="en-US" sz="2600" dirty="0">
+                <a:solidFill>
+                  <a:schemeClr val="tx2"/>
+                </a:solidFill>
+                <a:latin typeface="Times New Roman" panose="02020603050405020304" pitchFamily="18" charset="0"/>
+                <a:cs typeface="Times New Roman" panose="02020603050405020304" pitchFamily="18" charset="0"/>
+              </a:rPr>
+              <a:t>→</a:t>
+            </a:r>
+          </a:p>
+        </p:txBody>
+      </p:sp>
+      <p:sp>
+        <p:nvSpPr>
+          <p:cNvPr id="68" name="TextBox 67">
+            <a:extLst>
+              <a:ext uri="{FF2B5EF4-FFF2-40B4-BE49-F238E27FC236}">
+                <a16:creationId xmlns:a16="http://schemas.microsoft.com/office/drawing/2014/main" id="{8728C1E9-341B-8614-44BA-B325EEC5B83A}"/>
+              </a:ext>
+            </a:extLst>
+          </p:cNvPr>
+          <p:cNvSpPr txBox="1"/>
+          <p:nvPr/>
+        </p:nvSpPr>
+        <p:spPr>
+          <a:xfrm>
+            <a:off x="9235884" y="3157170"/>
+            <a:ext cx="532513" cy="492443"/>
+          </a:xfrm>
+          <a:prstGeom prst="rect">
+            <a:avLst/>
+          </a:prstGeom>
+          <a:noFill/>
+          <a:ln>
+            <a:noFill/>
+          </a:ln>
+        </p:spPr>
+        <p:txBody>
+          <a:bodyPr wrap="square">
+            <a:spAutoFit/>
+          </a:bodyPr>
+          <a:lstStyle/>
+          <a:p>
+            <a:pPr algn="ctr"/>
+            <a:r>
+              <a:rPr lang="en-US" sz="2600" dirty="0">
+                <a:solidFill>
+                  <a:schemeClr val="tx2"/>
+                </a:solidFill>
+                <a:latin typeface="Times New Roman" panose="02020603050405020304" pitchFamily="18" charset="0"/>
+                <a:cs typeface="Times New Roman" panose="02020603050405020304" pitchFamily="18" charset="0"/>
+              </a:rPr>
+              <a:t>→</a:t>
+            </a:r>
+          </a:p>
+        </p:txBody>
+      </p:sp>
+      <p:sp>
+        <p:nvSpPr>
+          <p:cNvPr id="70" name="TextBox 69">
+            <a:extLst>
+              <a:ext uri="{FF2B5EF4-FFF2-40B4-BE49-F238E27FC236}">
+                <a16:creationId xmlns:a16="http://schemas.microsoft.com/office/drawing/2014/main" id="{9BB79F7B-F91F-03DB-BEA8-68451C4C48C7}"/>
+              </a:ext>
+            </a:extLst>
+          </p:cNvPr>
+          <p:cNvSpPr txBox="1"/>
+          <p:nvPr/>
+        </p:nvSpPr>
+        <p:spPr>
+          <a:xfrm>
+            <a:off x="9344408" y="1848901"/>
+            <a:ext cx="383792" cy="369332"/>
+          </a:xfrm>
+          <a:prstGeom prst="rect">
+            <a:avLst/>
+          </a:prstGeom>
+          <a:noFill/>
+        </p:spPr>
+        <p:txBody>
+          <a:bodyPr wrap="square">
+            <a:spAutoFit/>
+          </a:bodyPr>
+          <a:lstStyle/>
+          <a:p>
+            <a:r>
+              <a:rPr lang="hu-HU" sz="1800" dirty="0">
+                <a:latin typeface="Times New Roman" panose="02020603050405020304" pitchFamily="18" charset="0"/>
+                <a:cs typeface="Times New Roman" panose="02020603050405020304" pitchFamily="18" charset="0"/>
+              </a:rPr>
+              <a:t>␣</a:t>
             </a:r>
             <a:endParaRPr lang="en-US" dirty="0"/>
           </a:p>
@@ -17697,7 +19858,7 @@
     </p:spTree>
     <p:extLst>
       <p:ext uri="{BB962C8B-B14F-4D97-AF65-F5344CB8AC3E}">
-        <p14:creationId xmlns:p14="http://schemas.microsoft.com/office/powerpoint/2010/main" val="231169372"/>
+        <p14:creationId xmlns:p14="http://schemas.microsoft.com/office/powerpoint/2010/main" val="2767761366"/>
       </p:ext>
     </p:extLst>
   </p:cSld>
@@ -17724,6 +19885,438 @@
           <a:chExt cx="0" cy="0"/>
         </a:xfrm>
       </p:grpSpPr>
+      <p:sp>
+        <p:nvSpPr>
+          <p:cNvPr id="2" name="Slide Number Placeholder 1">
+            <a:extLst>
+              <a:ext uri="{FF2B5EF4-FFF2-40B4-BE49-F238E27FC236}">
+                <a16:creationId xmlns:a16="http://schemas.microsoft.com/office/drawing/2014/main" id="{F18E0336-BD63-1957-5B03-03C82956C1BD}"/>
+              </a:ext>
+            </a:extLst>
+          </p:cNvPr>
+          <p:cNvSpPr>
+            <a:spLocks noGrp="1"/>
+          </p:cNvSpPr>
+          <p:nvPr>
+            <p:ph type="sldNum" sz="quarter" idx="12"/>
+          </p:nvPr>
+        </p:nvSpPr>
+        <p:spPr/>
+        <p:txBody>
+          <a:bodyPr>
+            <a:normAutofit fontScale="92500" lnSpcReduction="10000"/>
+          </a:bodyPr>
+          <a:lstStyle/>
+          <a:p>
+            <a:fld id="{D57F1E4F-1CFF-5643-939E-217C01CDF565}" type="slidenum">
+              <a:rPr lang="en-US" smtClean="0"/>
+              <a:pPr/>
+              <a:t>29</a:t>
+            </a:fld>
+            <a:endParaRPr lang="en-US" dirty="0"/>
+          </a:p>
+        </p:txBody>
+      </p:sp>
+      <p:sp>
+        <p:nvSpPr>
+          <p:cNvPr id="3" name="Title 2">
+            <a:extLst>
+              <a:ext uri="{FF2B5EF4-FFF2-40B4-BE49-F238E27FC236}">
+                <a16:creationId xmlns:a16="http://schemas.microsoft.com/office/drawing/2014/main" id="{A498CB36-9F19-C46B-4257-A3F39B8C0E60}"/>
+              </a:ext>
+            </a:extLst>
+          </p:cNvPr>
+          <p:cNvSpPr>
+            <a:spLocks noGrp="1"/>
+          </p:cNvSpPr>
+          <p:nvPr>
+            <p:ph type="title"/>
+          </p:nvPr>
+        </p:nvSpPr>
+        <p:spPr/>
+        <p:txBody>
+          <a:bodyPr>
+            <a:normAutofit fontScale="90000"/>
+          </a:bodyPr>
+          <a:lstStyle/>
+          <a:p>
+            <a:r>
+              <a:rPr lang="en-US" dirty="0"/>
+              <a:t>Participants</a:t>
+            </a:r>
+          </a:p>
+        </p:txBody>
+      </p:sp>
+      <p:sp>
+        <p:nvSpPr>
+          <p:cNvPr id="4" name="Content Placeholder 3">
+            <a:extLst>
+              <a:ext uri="{FF2B5EF4-FFF2-40B4-BE49-F238E27FC236}">
+                <a16:creationId xmlns:a16="http://schemas.microsoft.com/office/drawing/2014/main" id="{5CC6FB7D-8385-6F5E-836E-AAF57B6FD8A9}"/>
+              </a:ext>
+            </a:extLst>
+          </p:cNvPr>
+          <p:cNvSpPr>
+            <a:spLocks noGrp="1"/>
+          </p:cNvSpPr>
+          <p:nvPr>
+            <p:ph idx="1"/>
+          </p:nvPr>
+        </p:nvSpPr>
+        <p:spPr/>
+        <p:txBody>
+          <a:bodyPr/>
+          <a:lstStyle/>
+          <a:p>
+            <a:r>
+              <a:rPr lang="en-US" dirty="0"/>
+              <a:t>Via Prolific</a:t>
+            </a:r>
+          </a:p>
+          <a:p>
+            <a:pPr lvl="1"/>
+            <a:r>
+              <a:rPr lang="en-US" dirty="0"/>
+              <a:t>Screener: First language: Hungarian</a:t>
+            </a:r>
+          </a:p>
+          <a:p>
+            <a:r>
+              <a:rPr lang="en-US" dirty="0"/>
+              <a:t>35 participants recruited</a:t>
+            </a:r>
+          </a:p>
+          <a:p>
+            <a:pPr lvl="1"/>
+            <a:r>
+              <a:rPr lang="en-US" dirty="0"/>
+              <a:t>Cleaning: 1 did not submit, 1 gave no ET data, 1 took too long, 1 failed AC, etc.</a:t>
+            </a:r>
+          </a:p>
+          <a:p>
+            <a:r>
+              <a:rPr lang="en-US" dirty="0"/>
+              <a:t>Took them around 25-30 minutes</a:t>
+            </a:r>
+          </a:p>
+          <a:p>
+            <a:r>
+              <a:rPr lang="en-US" dirty="0"/>
+              <a:t>30 valid answers/3 groups </a:t>
+            </a:r>
+            <a:r>
+              <a:rPr lang="en-US" dirty="0">
+                <a:latin typeface="Brill" panose="020F0602050406030203" pitchFamily="34" charset="0"/>
+              </a:rPr>
+              <a:t>→ every stimuli has </a:t>
+            </a:r>
+            <a:r>
+              <a:rPr lang="en-US" b="1" dirty="0">
+                <a:latin typeface="Brill" panose="020F0602050406030203" pitchFamily="34" charset="0"/>
+              </a:rPr>
+              <a:t>10</a:t>
+            </a:r>
+            <a:r>
+              <a:rPr lang="en-US" dirty="0">
+                <a:latin typeface="Brill" panose="020F0602050406030203" pitchFamily="34" charset="0"/>
+              </a:rPr>
+              <a:t> responses = </a:t>
+            </a:r>
+          </a:p>
+          <a:p>
+            <a:r>
+              <a:rPr lang="en-US" dirty="0">
+                <a:latin typeface="Brill" panose="020F0602050406030203" pitchFamily="34" charset="0"/>
+              </a:rPr>
+              <a:t>540 inputs.</a:t>
+            </a:r>
+          </a:p>
+          <a:p>
+            <a:r>
+              <a:rPr lang="en-US" dirty="0">
+                <a:latin typeface="Brill" panose="020F0602050406030203" pitchFamily="34" charset="0"/>
+              </a:rPr>
+              <a:t>Many people (40~45%) had technical problems.</a:t>
+            </a:r>
+            <a:endParaRPr lang="en-US" dirty="0"/>
+          </a:p>
+        </p:txBody>
+      </p:sp>
+    </p:spTree>
+    <p:extLst>
+      <p:ext uri="{BB962C8B-B14F-4D97-AF65-F5344CB8AC3E}">
+        <p14:creationId xmlns:p14="http://schemas.microsoft.com/office/powerpoint/2010/main" val="231169372"/>
+      </p:ext>
+    </p:extLst>
+  </p:cSld>
+  <p:clrMapOvr>
+    <a:masterClrMapping/>
+  </p:clrMapOvr>
+</p:sld>
+</file>
+
+<file path=ppt/slides/slide3.xml><?xml version="1.0" encoding="utf-8"?>
+<p:sld xmlns:a="http://schemas.openxmlformats.org/drawingml/2006/main" xmlns:r="http://schemas.openxmlformats.org/officeDocument/2006/relationships" xmlns:p="http://schemas.openxmlformats.org/presentationml/2006/main">
+  <p:cSld>
+    <p:spTree>
+      <p:nvGrpSpPr>
+        <p:cNvPr id="1" name="">
+          <a:extLst>
+            <a:ext uri="{FF2B5EF4-FFF2-40B4-BE49-F238E27FC236}">
+              <a16:creationId xmlns:a16="http://schemas.microsoft.com/office/drawing/2014/main" id="{8D608A7D-20AE-FA7F-79A8-137EC8417D6D}"/>
+            </a:ext>
+          </a:extLst>
+        </p:cNvPr>
+        <p:cNvGrpSpPr/>
+        <p:nvPr/>
+      </p:nvGrpSpPr>
+      <p:grpSpPr>
+        <a:xfrm>
+          <a:off x="0" y="0"/>
+          <a:ext cx="0" cy="0"/>
+          <a:chOff x="0" y="0"/>
+          <a:chExt cx="0" cy="0"/>
+        </a:xfrm>
+      </p:grpSpPr>
+      <p:sp>
+        <p:nvSpPr>
+          <p:cNvPr id="2" name="Title 1">
+            <a:extLst>
+              <a:ext uri="{FF2B5EF4-FFF2-40B4-BE49-F238E27FC236}">
+                <a16:creationId xmlns:a16="http://schemas.microsoft.com/office/drawing/2014/main" id="{A37D8B8D-13EB-9DEC-58DC-0A91EC5A0420}"/>
+              </a:ext>
+            </a:extLst>
+          </p:cNvPr>
+          <p:cNvSpPr>
+            <a:spLocks noGrp="1"/>
+          </p:cNvSpPr>
+          <p:nvPr>
+            <p:ph type="title"/>
+          </p:nvPr>
+        </p:nvSpPr>
+        <p:spPr>
+          <a:xfrm>
+            <a:off x="1261872" y="365760"/>
+            <a:ext cx="9692640" cy="658707"/>
+          </a:xfrm>
+        </p:spPr>
+        <p:txBody>
+          <a:bodyPr>
+            <a:normAutofit fontScale="90000"/>
+          </a:bodyPr>
+          <a:lstStyle/>
+          <a:p>
+            <a:r>
+              <a:rPr lang="en-US" dirty="0"/>
+              <a:t>Background</a:t>
+            </a:r>
+          </a:p>
+        </p:txBody>
+      </p:sp>
+      <p:sp>
+        <p:nvSpPr>
+          <p:cNvPr id="3" name="Content Placeholder 2">
+            <a:extLst>
+              <a:ext uri="{FF2B5EF4-FFF2-40B4-BE49-F238E27FC236}">
+                <a16:creationId xmlns:a16="http://schemas.microsoft.com/office/drawing/2014/main" id="{63FB0C02-80CC-753C-8B98-8A235EE4A898}"/>
+              </a:ext>
+            </a:extLst>
+          </p:cNvPr>
+          <p:cNvSpPr>
+            <a:spLocks noGrp="1"/>
+          </p:cNvSpPr>
+          <p:nvPr>
+            <p:ph idx="4294967295"/>
+          </p:nvPr>
+        </p:nvSpPr>
+        <p:spPr>
+          <a:xfrm>
+            <a:off x="1261872" y="1261872"/>
+            <a:ext cx="10360152" cy="5504053"/>
+          </a:xfrm>
+        </p:spPr>
+        <p:txBody>
+          <a:bodyPr>
+            <a:normAutofit/>
+          </a:bodyPr>
+          <a:lstStyle/>
+          <a:p>
+            <a:pPr>
+              <a:spcBef>
+                <a:spcPts val="0"/>
+              </a:spcBef>
+            </a:pPr>
+            <a:r>
+              <a:rPr lang="en-US" dirty="0"/>
+              <a:t>Hungarian is an </a:t>
+            </a:r>
+            <a:r>
+              <a:rPr lang="en-US" b="1" dirty="0"/>
+              <a:t>agglutinative</a:t>
+            </a:r>
+            <a:r>
+              <a:rPr lang="en-US" dirty="0"/>
+              <a:t> language with a relatively </a:t>
+            </a:r>
+            <a:r>
+              <a:rPr lang="en-US" b="1" dirty="0"/>
+              <a:t>free</a:t>
+            </a:r>
+            <a:r>
+              <a:rPr lang="en-US" dirty="0"/>
+              <a:t> word order</a:t>
+            </a:r>
+          </a:p>
+          <a:p>
+            <a:pPr>
+              <a:spcBef>
+                <a:spcPts val="0"/>
+              </a:spcBef>
+            </a:pPr>
+            <a:r>
+              <a:rPr lang="en-US" dirty="0"/>
+              <a:t>There is one important place in a sentence: </a:t>
+            </a:r>
+            <a:r>
+              <a:rPr lang="en-US" b="1" dirty="0"/>
+              <a:t>the focus position</a:t>
+            </a:r>
+          </a:p>
+          <a:p>
+            <a:pPr>
+              <a:spcBef>
+                <a:spcPts val="0"/>
+              </a:spcBef>
+            </a:pPr>
+            <a:r>
+              <a:rPr lang="en-US" dirty="0"/>
+              <a:t>Focus comes before the verb; they are always together: </a:t>
+            </a:r>
+            <a:r>
+              <a:rPr lang="en-US" b="1" dirty="0"/>
+              <a:t>focus + verb</a:t>
+            </a:r>
+            <a:br>
+              <a:rPr lang="en-US" dirty="0"/>
+            </a:br>
+            <a:endParaRPr lang="en-US" dirty="0"/>
+          </a:p>
+          <a:p>
+            <a:pPr marL="0" indent="0">
+              <a:spcBef>
+                <a:spcPts val="0"/>
+              </a:spcBef>
+              <a:buNone/>
+            </a:pPr>
+            <a:r>
+              <a:rPr lang="en-US" dirty="0"/>
+              <a:t>	A </a:t>
+            </a:r>
+            <a:r>
+              <a:rPr lang="hu-HU" dirty="0"/>
+              <a:t>barátom kínaiul tanul Hongkongban.</a:t>
+            </a:r>
+          </a:p>
+          <a:p>
+            <a:pPr marL="0" indent="0">
+              <a:spcBef>
+                <a:spcPts val="0"/>
+              </a:spcBef>
+              <a:buNone/>
+            </a:pPr>
+            <a:r>
+              <a:rPr lang="en-US" dirty="0"/>
+              <a:t>	</a:t>
+            </a:r>
+            <a:r>
+              <a:rPr lang="hu-HU" dirty="0"/>
+              <a:t>A barátom Hongkongban tanul kínaiul.</a:t>
+            </a:r>
+          </a:p>
+          <a:p>
+            <a:pPr marL="0" indent="0">
+              <a:spcBef>
+                <a:spcPts val="0"/>
+              </a:spcBef>
+              <a:buNone/>
+            </a:pPr>
+            <a:r>
+              <a:rPr lang="en-US" dirty="0"/>
+              <a:t>	</a:t>
+            </a:r>
+            <a:r>
+              <a:rPr lang="hu-HU" dirty="0"/>
+              <a:t>A barátom tanul kínaiul Hongkongban</a:t>
+            </a:r>
+            <a:r>
+              <a:rPr lang="en-US" dirty="0"/>
+              <a:t>.</a:t>
+            </a:r>
+          </a:p>
+        </p:txBody>
+      </p:sp>
+      <p:sp>
+        <p:nvSpPr>
+          <p:cNvPr id="4" name="Slide Number Placeholder 3">
+            <a:extLst>
+              <a:ext uri="{FF2B5EF4-FFF2-40B4-BE49-F238E27FC236}">
+                <a16:creationId xmlns:a16="http://schemas.microsoft.com/office/drawing/2014/main" id="{F71971B4-A851-5B5D-1698-EB8818BF9DFF}"/>
+              </a:ext>
+            </a:extLst>
+          </p:cNvPr>
+          <p:cNvSpPr>
+            <a:spLocks noGrp="1"/>
+          </p:cNvSpPr>
+          <p:nvPr>
+            <p:ph type="sldNum" sz="quarter" idx="12"/>
+          </p:nvPr>
+        </p:nvSpPr>
+        <p:spPr/>
+        <p:txBody>
+          <a:bodyPr>
+            <a:normAutofit fontScale="92500" lnSpcReduction="10000"/>
+          </a:bodyPr>
+          <a:lstStyle/>
+          <a:p>
+            <a:fld id="{D57F1E4F-1CFF-5643-939E-217C01CDF565}" type="slidenum">
+              <a:rPr lang="en-US" smtClean="0"/>
+              <a:pPr/>
+              <a:t>3</a:t>
+            </a:fld>
+            <a:endParaRPr lang="en-US" dirty="0"/>
+          </a:p>
+        </p:txBody>
+      </p:sp>
+    </p:spTree>
+    <p:extLst>
+      <p:ext uri="{BB962C8B-B14F-4D97-AF65-F5344CB8AC3E}">
+        <p14:creationId xmlns:p14="http://schemas.microsoft.com/office/powerpoint/2010/main" val="1905564846"/>
+      </p:ext>
+    </p:extLst>
+  </p:cSld>
+  <p:clrMapOvr>
+    <a:masterClrMapping/>
+  </p:clrMapOvr>
+</p:sld>
+</file>
+
+<file path=ppt/slides/slide30.xml><?xml version="1.0" encoding="utf-8"?>
+<p:sld xmlns:a="http://schemas.openxmlformats.org/drawingml/2006/main" xmlns:r="http://schemas.openxmlformats.org/officeDocument/2006/relationships" xmlns:p="http://schemas.openxmlformats.org/presentationml/2006/main">
+  <p:cSld>
+    <p:spTree>
+      <p:nvGrpSpPr>
+        <p:cNvPr id="1" name=""/>
+        <p:cNvGrpSpPr/>
+        <p:nvPr/>
+      </p:nvGrpSpPr>
+      <p:grpSpPr>
+        <a:xfrm>
+          <a:off x="0" y="0"/>
+          <a:ext cx="0" cy="0"/>
+          <a:chOff x="0" y="0"/>
+          <a:chExt cx="0" cy="0"/>
+        </a:xfrm>
+      </p:grpSpPr>
       <p:pic>
         <p:nvPicPr>
           <p:cNvPr id="6" name="Picture 5" descr="A screenshot of a computer&#10;&#10;AI-generated content may be incorrect.">
@@ -17781,7 +20374,7 @@
             <a:fld id="{D57F1E4F-1CFF-5643-939E-217C01CDF565}" type="slidenum">
               <a:rPr lang="en-US" smtClean="0"/>
               <a:pPr/>
-              <a:t>29</a:t>
+              <a:t>30</a:t>
             </a:fld>
             <a:endParaRPr lang="en-US" dirty="0"/>
           </a:p>
@@ -18048,252 +20641,7 @@
 </p:sld>
 </file>
 
-<file path=ppt/slides/slide3.xml><?xml version="1.0" encoding="utf-8"?>
-<p:sld xmlns:a="http://schemas.openxmlformats.org/drawingml/2006/main" xmlns:r="http://schemas.openxmlformats.org/officeDocument/2006/relationships" xmlns:p="http://schemas.openxmlformats.org/presentationml/2006/main">
-  <p:cSld>
-    <p:spTree>
-      <p:nvGrpSpPr>
-        <p:cNvPr id="1" name="">
-          <a:extLst>
-            <a:ext uri="{FF2B5EF4-FFF2-40B4-BE49-F238E27FC236}">
-              <a16:creationId xmlns:a16="http://schemas.microsoft.com/office/drawing/2014/main" id="{8D608A7D-20AE-FA7F-79A8-137EC8417D6D}"/>
-            </a:ext>
-          </a:extLst>
-        </p:cNvPr>
-        <p:cNvGrpSpPr/>
-        <p:nvPr/>
-      </p:nvGrpSpPr>
-      <p:grpSpPr>
-        <a:xfrm>
-          <a:off x="0" y="0"/>
-          <a:ext cx="0" cy="0"/>
-          <a:chOff x="0" y="0"/>
-          <a:chExt cx="0" cy="0"/>
-        </a:xfrm>
-      </p:grpSpPr>
-      <p:sp>
-        <p:nvSpPr>
-          <p:cNvPr id="2" name="Title 1">
-            <a:extLst>
-              <a:ext uri="{FF2B5EF4-FFF2-40B4-BE49-F238E27FC236}">
-                <a16:creationId xmlns:a16="http://schemas.microsoft.com/office/drawing/2014/main" id="{A37D8B8D-13EB-9DEC-58DC-0A91EC5A0420}"/>
-              </a:ext>
-            </a:extLst>
-          </p:cNvPr>
-          <p:cNvSpPr>
-            <a:spLocks noGrp="1"/>
-          </p:cNvSpPr>
-          <p:nvPr>
-            <p:ph type="title"/>
-          </p:nvPr>
-        </p:nvSpPr>
-        <p:spPr>
-          <a:xfrm>
-            <a:off x="1261872" y="365760"/>
-            <a:ext cx="9692640" cy="658707"/>
-          </a:xfrm>
-        </p:spPr>
-        <p:txBody>
-          <a:bodyPr>
-            <a:normAutofit fontScale="90000"/>
-          </a:bodyPr>
-          <a:lstStyle/>
-          <a:p>
-            <a:r>
-              <a:rPr lang="en-US" dirty="0"/>
-              <a:t>Background</a:t>
-            </a:r>
-          </a:p>
-        </p:txBody>
-      </p:sp>
-      <p:sp>
-        <p:nvSpPr>
-          <p:cNvPr id="3" name="Content Placeholder 2">
-            <a:extLst>
-              <a:ext uri="{FF2B5EF4-FFF2-40B4-BE49-F238E27FC236}">
-                <a16:creationId xmlns:a16="http://schemas.microsoft.com/office/drawing/2014/main" id="{63FB0C02-80CC-753C-8B98-8A235EE4A898}"/>
-              </a:ext>
-            </a:extLst>
-          </p:cNvPr>
-          <p:cNvSpPr>
-            <a:spLocks noGrp="1"/>
-          </p:cNvSpPr>
-          <p:nvPr>
-            <p:ph idx="4294967295"/>
-          </p:nvPr>
-        </p:nvSpPr>
-        <p:spPr>
-          <a:xfrm>
-            <a:off x="1261872" y="1261872"/>
-            <a:ext cx="10360152" cy="5504053"/>
-          </a:xfrm>
-        </p:spPr>
-        <p:txBody>
-          <a:bodyPr>
-            <a:normAutofit/>
-          </a:bodyPr>
-          <a:lstStyle/>
-          <a:p>
-            <a:pPr>
-              <a:spcBef>
-                <a:spcPts val="0"/>
-              </a:spcBef>
-            </a:pPr>
-            <a:r>
-              <a:rPr lang="en-US" dirty="0"/>
-              <a:t>Hungarian is an </a:t>
-            </a:r>
-            <a:r>
-              <a:rPr lang="en-US" b="1" dirty="0"/>
-              <a:t>agglutinative</a:t>
-            </a:r>
-            <a:r>
-              <a:rPr lang="en-US" dirty="0"/>
-              <a:t> language with a relatively </a:t>
-            </a:r>
-            <a:r>
-              <a:rPr lang="en-US" b="1" dirty="0"/>
-              <a:t>free</a:t>
-            </a:r>
-            <a:r>
-              <a:rPr lang="en-US" dirty="0"/>
-              <a:t> word order</a:t>
-            </a:r>
-          </a:p>
-          <a:p>
-            <a:pPr>
-              <a:spcBef>
-                <a:spcPts val="0"/>
-              </a:spcBef>
-            </a:pPr>
-            <a:r>
-              <a:rPr lang="en-US" dirty="0"/>
-              <a:t>There is one important place in a sentence: </a:t>
-            </a:r>
-            <a:r>
-              <a:rPr lang="en-US" b="1" dirty="0"/>
-              <a:t>the focus position</a:t>
-            </a:r>
-          </a:p>
-          <a:p>
-            <a:pPr>
-              <a:spcBef>
-                <a:spcPts val="0"/>
-              </a:spcBef>
-            </a:pPr>
-            <a:r>
-              <a:rPr lang="en-US" dirty="0"/>
-              <a:t>Focus comes before the verb; they are always together: </a:t>
-            </a:r>
-            <a:r>
-              <a:rPr lang="en-US" b="1" dirty="0"/>
-              <a:t>focus + verb</a:t>
-            </a:r>
-            <a:br>
-              <a:rPr lang="en-US" dirty="0"/>
-            </a:br>
-            <a:endParaRPr lang="en-US" dirty="0"/>
-          </a:p>
-          <a:p>
-            <a:pPr marL="0" indent="0">
-              <a:spcBef>
-                <a:spcPts val="0"/>
-              </a:spcBef>
-              <a:buNone/>
-            </a:pPr>
-            <a:r>
-              <a:rPr lang="en-US" dirty="0"/>
-              <a:t>	A </a:t>
-            </a:r>
-            <a:r>
-              <a:rPr lang="hu-HU" dirty="0"/>
-              <a:t>barátom kínaiul tanul Hongkongban.</a:t>
-            </a:r>
-          </a:p>
-          <a:p>
-            <a:pPr marL="0" indent="0">
-              <a:spcBef>
-                <a:spcPts val="0"/>
-              </a:spcBef>
-              <a:buNone/>
-            </a:pPr>
-            <a:r>
-              <a:rPr lang="en-US" dirty="0"/>
-              <a:t>	</a:t>
-            </a:r>
-            <a:r>
-              <a:rPr lang="hu-HU" dirty="0"/>
-              <a:t>A barátom Hongkongban tanul kínaiul.</a:t>
-            </a:r>
-          </a:p>
-          <a:p>
-            <a:pPr marL="0" indent="0">
-              <a:spcBef>
-                <a:spcPts val="0"/>
-              </a:spcBef>
-              <a:buNone/>
-            </a:pPr>
-            <a:r>
-              <a:rPr lang="en-US" dirty="0"/>
-              <a:t>	</a:t>
-            </a:r>
-            <a:r>
-              <a:rPr lang="hu-HU" dirty="0"/>
-              <a:t>A barátom tanul kínaiul Hongkongban</a:t>
-            </a:r>
-            <a:r>
-              <a:rPr lang="en-US" dirty="0"/>
-              <a:t>.</a:t>
-            </a:r>
-          </a:p>
-        </p:txBody>
-      </p:sp>
-      <p:sp>
-        <p:nvSpPr>
-          <p:cNvPr id="4" name="Slide Number Placeholder 3">
-            <a:extLst>
-              <a:ext uri="{FF2B5EF4-FFF2-40B4-BE49-F238E27FC236}">
-                <a16:creationId xmlns:a16="http://schemas.microsoft.com/office/drawing/2014/main" id="{F71971B4-A851-5B5D-1698-EB8818BF9DFF}"/>
-              </a:ext>
-            </a:extLst>
-          </p:cNvPr>
-          <p:cNvSpPr>
-            <a:spLocks noGrp="1"/>
-          </p:cNvSpPr>
-          <p:nvPr>
-            <p:ph type="sldNum" sz="quarter" idx="12"/>
-          </p:nvPr>
-        </p:nvSpPr>
-        <p:spPr/>
-        <p:txBody>
-          <a:bodyPr>
-            <a:normAutofit fontScale="92500" lnSpcReduction="10000"/>
-          </a:bodyPr>
-          <a:lstStyle/>
-          <a:p>
-            <a:fld id="{D57F1E4F-1CFF-5643-939E-217C01CDF565}" type="slidenum">
-              <a:rPr lang="en-US" smtClean="0"/>
-              <a:pPr/>
-              <a:t>3</a:t>
-            </a:fld>
-            <a:endParaRPr lang="en-US" dirty="0"/>
-          </a:p>
-        </p:txBody>
-      </p:sp>
-    </p:spTree>
-    <p:extLst>
-      <p:ext uri="{BB962C8B-B14F-4D97-AF65-F5344CB8AC3E}">
-        <p14:creationId xmlns:p14="http://schemas.microsoft.com/office/powerpoint/2010/main" val="1905564846"/>
-      </p:ext>
-    </p:extLst>
-  </p:cSld>
-  <p:clrMapOvr>
-    <a:masterClrMapping/>
-  </p:clrMapOvr>
-</p:sld>
-</file>
-
-<file path=ppt/slides/slide30.xml><?xml version="1.0" encoding="utf-8"?>
+<file path=ppt/slides/slide31.xml><?xml version="1.0" encoding="utf-8"?>
 <p:sld xmlns:a="http://schemas.openxmlformats.org/drawingml/2006/main" xmlns:r="http://schemas.openxmlformats.org/officeDocument/2006/relationships" xmlns:p="http://schemas.openxmlformats.org/presentationml/2006/main">
   <p:cSld>
     <p:spTree>
@@ -18336,7 +20684,7 @@
             <a:fld id="{D57F1E4F-1CFF-5643-939E-217C01CDF565}" type="slidenum">
               <a:rPr lang="en-US" smtClean="0"/>
               <a:pPr/>
-              <a:t>30</a:t>
+              <a:t>31</a:t>
             </a:fld>
             <a:endParaRPr lang="en-US" dirty="0"/>
           </a:p>
@@ -18416,7 +20764,7 @@
 </p:sld>
 </file>
 
-<file path=ppt/slides/slide31.xml><?xml version="1.0" encoding="utf-8"?>
+<file path=ppt/slides/slide32.xml><?xml version="1.0" encoding="utf-8"?>
 <p:sld xmlns:a="http://schemas.openxmlformats.org/drawingml/2006/main" xmlns:r="http://schemas.openxmlformats.org/officeDocument/2006/relationships" xmlns:p="http://schemas.openxmlformats.org/presentationml/2006/main">
   <p:cSld>
     <p:spTree>
@@ -18465,7 +20813,7 @@
             <a:fld id="{D57F1E4F-1CFF-5643-939E-217C01CDF565}" type="slidenum">
               <a:rPr lang="en-US" smtClean="0"/>
               <a:pPr/>
-              <a:t>31</a:t>
+              <a:t>32</a:t>
             </a:fld>
             <a:endParaRPr lang="en-US" dirty="0"/>
           </a:p>
@@ -18545,7 +20893,7 @@
 </p:sld>
 </file>
 
-<file path=ppt/slides/slide32.xml><?xml version="1.0" encoding="utf-8"?>
+<file path=ppt/slides/slide33.xml><?xml version="1.0" encoding="utf-8"?>
 <p:sld xmlns:a="http://schemas.openxmlformats.org/drawingml/2006/main" xmlns:r="http://schemas.openxmlformats.org/officeDocument/2006/relationships" xmlns:p="http://schemas.openxmlformats.org/presentationml/2006/main">
   <p:cSld>
     <p:spTree>
@@ -18619,7 +20967,7 @@
             <a:fld id="{D57F1E4F-1CFF-5643-939E-217C01CDF565}" type="slidenum">
               <a:rPr lang="en-US" smtClean="0"/>
               <a:pPr/>
-              <a:t>32</a:t>
+              <a:t>33</a:t>
             </a:fld>
             <a:endParaRPr lang="en-US" dirty="0"/>
           </a:p>
@@ -18720,281 +21068,6 @@
     <p:extLst>
       <p:ext uri="{BB962C8B-B14F-4D97-AF65-F5344CB8AC3E}">
         <p14:creationId xmlns:p14="http://schemas.microsoft.com/office/powerpoint/2010/main" val="1183545236"/>
-      </p:ext>
-    </p:extLst>
-  </p:cSld>
-  <p:clrMapOvr>
-    <a:masterClrMapping/>
-  </p:clrMapOvr>
-</p:sld>
-</file>
-
-<file path=ppt/slides/slide33.xml><?xml version="1.0" encoding="utf-8"?>
-<p:sld xmlns:a="http://schemas.openxmlformats.org/drawingml/2006/main" xmlns:r="http://schemas.openxmlformats.org/officeDocument/2006/relationships" xmlns:p="http://schemas.openxmlformats.org/presentationml/2006/main">
-  <p:cSld>
-    <p:spTree>
-      <p:nvGrpSpPr>
-        <p:cNvPr id="1" name=""/>
-        <p:cNvGrpSpPr/>
-        <p:nvPr/>
-      </p:nvGrpSpPr>
-      <p:grpSpPr>
-        <a:xfrm>
-          <a:off x="0" y="0"/>
-          <a:ext cx="0" cy="0"/>
-          <a:chOff x="0" y="0"/>
-          <a:chExt cx="0" cy="0"/>
-        </a:xfrm>
-      </p:grpSpPr>
-      <p:pic>
-        <p:nvPicPr>
-          <p:cNvPr id="6" name="Picture 5" descr="A screen shot of a computer&#10;&#10;AI-generated content may be incorrect.">
-            <a:extLst>
-              <a:ext uri="{FF2B5EF4-FFF2-40B4-BE49-F238E27FC236}">
-                <a16:creationId xmlns:a16="http://schemas.microsoft.com/office/drawing/2014/main" id="{4C933072-4577-3875-32FA-52F570AF9B0C}"/>
-              </a:ext>
-            </a:extLst>
-          </p:cNvPr>
-          <p:cNvPicPr>
-            <a:picLocks noChangeAspect="1"/>
-          </p:cNvPicPr>
-          <p:nvPr/>
-        </p:nvPicPr>
-        <p:blipFill>
-          <a:blip r:embed="rId2"/>
-          <a:srcRect t="1289" b="66667"/>
-          <a:stretch>
-            <a:fillRect/>
-          </a:stretch>
-        </p:blipFill>
-        <p:spPr>
-          <a:xfrm>
-            <a:off x="4164969" y="37396"/>
-            <a:ext cx="2849466" cy="6695871"/>
-          </a:xfrm>
-          <a:prstGeom prst="rect">
-            <a:avLst/>
-          </a:prstGeom>
-        </p:spPr>
-      </p:pic>
-      <p:pic>
-        <p:nvPicPr>
-          <p:cNvPr id="9" name="Picture 8" descr="A screen shot of a computer&#10;&#10;AI-generated content may be incorrect.">
-            <a:extLst>
-              <a:ext uri="{FF2B5EF4-FFF2-40B4-BE49-F238E27FC236}">
-                <a16:creationId xmlns:a16="http://schemas.microsoft.com/office/drawing/2014/main" id="{AA40DE6C-16E1-8B4A-E29D-E89BDF7CCA7C}"/>
-              </a:ext>
-            </a:extLst>
-          </p:cNvPr>
-          <p:cNvPicPr>
-            <a:picLocks noChangeAspect="1"/>
-          </p:cNvPicPr>
-          <p:nvPr/>
-        </p:nvPicPr>
-        <p:blipFill>
-          <a:blip r:embed="rId2"/>
-          <a:srcRect t="33651" b="33492"/>
-          <a:stretch>
-            <a:fillRect/>
-          </a:stretch>
-        </p:blipFill>
-        <p:spPr>
-          <a:xfrm>
-            <a:off x="6842430" y="-7857"/>
-            <a:ext cx="2849466" cy="6865857"/>
-          </a:xfrm>
-          <a:prstGeom prst="rect">
-            <a:avLst/>
-          </a:prstGeom>
-        </p:spPr>
-      </p:pic>
-      <p:pic>
-        <p:nvPicPr>
-          <p:cNvPr id="10" name="Picture 9" descr="A screen shot of a computer&#10;&#10;AI-generated content may be incorrect.">
-            <a:extLst>
-              <a:ext uri="{FF2B5EF4-FFF2-40B4-BE49-F238E27FC236}">
-                <a16:creationId xmlns:a16="http://schemas.microsoft.com/office/drawing/2014/main" id="{955D21C4-AC6B-B7FB-05C8-3015F995BF38}"/>
-              </a:ext>
-            </a:extLst>
-          </p:cNvPr>
-          <p:cNvPicPr>
-            <a:picLocks noChangeAspect="1"/>
-          </p:cNvPicPr>
-          <p:nvPr/>
-        </p:nvPicPr>
-        <p:blipFill>
-          <a:blip r:embed="rId2"/>
-          <a:srcRect t="66246"/>
-          <a:stretch>
-            <a:fillRect/>
-          </a:stretch>
-        </p:blipFill>
-        <p:spPr>
-          <a:xfrm>
-            <a:off x="9436691" y="-7857"/>
-            <a:ext cx="2770549" cy="6858000"/>
-          </a:xfrm>
-          <a:prstGeom prst="rect">
-            <a:avLst/>
-          </a:prstGeom>
-        </p:spPr>
-      </p:pic>
-      <p:sp>
-        <p:nvSpPr>
-          <p:cNvPr id="2" name="Slide Number Placeholder 1">
-            <a:extLst>
-              <a:ext uri="{FF2B5EF4-FFF2-40B4-BE49-F238E27FC236}">
-                <a16:creationId xmlns:a16="http://schemas.microsoft.com/office/drawing/2014/main" id="{A09C6E72-85B6-874C-EF63-2C82F49D5A29}"/>
-              </a:ext>
-            </a:extLst>
-          </p:cNvPr>
-          <p:cNvSpPr>
-            <a:spLocks noGrp="1"/>
-          </p:cNvSpPr>
-          <p:nvPr>
-            <p:ph type="sldNum" sz="quarter" idx="12"/>
-          </p:nvPr>
-        </p:nvSpPr>
-        <p:spPr/>
-        <p:txBody>
-          <a:bodyPr>
-            <a:normAutofit fontScale="92500" lnSpcReduction="10000"/>
-          </a:bodyPr>
-          <a:lstStyle/>
-          <a:p>
-            <a:fld id="{D57F1E4F-1CFF-5643-939E-217C01CDF565}" type="slidenum">
-              <a:rPr lang="en-US" smtClean="0"/>
-              <a:pPr/>
-              <a:t>33</a:t>
-            </a:fld>
-            <a:endParaRPr lang="en-US" dirty="0"/>
-          </a:p>
-        </p:txBody>
-      </p:sp>
-      <p:sp>
-        <p:nvSpPr>
-          <p:cNvPr id="3" name="Title 2">
-            <a:extLst>
-              <a:ext uri="{FF2B5EF4-FFF2-40B4-BE49-F238E27FC236}">
-                <a16:creationId xmlns:a16="http://schemas.microsoft.com/office/drawing/2014/main" id="{B8E5BBBE-9539-A109-324A-98F98BCD5FCE}"/>
-              </a:ext>
-            </a:extLst>
-          </p:cNvPr>
-          <p:cNvSpPr>
-            <a:spLocks noGrp="1"/>
-          </p:cNvSpPr>
-          <p:nvPr>
-            <p:ph type="title"/>
-          </p:nvPr>
-        </p:nvSpPr>
-        <p:spPr>
-          <a:xfrm>
-            <a:off x="1261872" y="384049"/>
-            <a:ext cx="9692640" cy="1207676"/>
-          </a:xfrm>
-        </p:spPr>
-        <p:txBody>
-          <a:bodyPr>
-            <a:normAutofit/>
-          </a:bodyPr>
-          <a:lstStyle/>
-          <a:p>
-            <a:r>
-              <a:rPr lang="en-US" sz="4000" dirty="0"/>
-              <a:t>Eye-Tracking</a:t>
-            </a:r>
-            <a:br>
-              <a:rPr lang="en-US" sz="4000" dirty="0"/>
-            </a:br>
-            <a:endParaRPr lang="en-US" sz="4000" dirty="0"/>
-          </a:p>
-        </p:txBody>
-      </p:sp>
-      <p:sp>
-        <p:nvSpPr>
-          <p:cNvPr id="4" name="Content Placeholder 3">
-            <a:extLst>
-              <a:ext uri="{FF2B5EF4-FFF2-40B4-BE49-F238E27FC236}">
-                <a16:creationId xmlns:a16="http://schemas.microsoft.com/office/drawing/2014/main" id="{B397352C-30E6-BDE5-B0CF-AD56744B5FEC}"/>
-              </a:ext>
-            </a:extLst>
-          </p:cNvPr>
-          <p:cNvSpPr>
-            <a:spLocks noGrp="1"/>
-          </p:cNvSpPr>
-          <p:nvPr>
-            <p:ph idx="1"/>
-          </p:nvPr>
-        </p:nvSpPr>
-        <p:spPr>
-          <a:xfrm>
-            <a:off x="1261871" y="1698170"/>
-            <a:ext cx="2903098" cy="4794069"/>
-          </a:xfrm>
-        </p:spPr>
-        <p:txBody>
-          <a:bodyPr/>
-          <a:lstStyle/>
-          <a:p>
-            <a:r>
-              <a:rPr lang="en-US" dirty="0"/>
-              <a:t>Data as </a:t>
-            </a:r>
-            <a:br>
-              <a:rPr lang="en-US" dirty="0"/>
-            </a:br>
-            <a:r>
-              <a:rPr lang="en-US" dirty="0"/>
-              <a:t>stacked dwell time segments</a:t>
-            </a:r>
-            <a:br>
-              <a:rPr lang="en-US" dirty="0"/>
-            </a:br>
-            <a:r>
-              <a:rPr lang="en-US" dirty="0"/>
-              <a:t>…</a:t>
-            </a:r>
-          </a:p>
-          <a:p>
-            <a:endParaRPr lang="en-US" dirty="0"/>
-          </a:p>
-          <a:p>
-            <a:endParaRPr lang="en-US" dirty="0"/>
-          </a:p>
-          <a:p>
-            <a:r>
-              <a:rPr lang="en-US" dirty="0">
-                <a:solidFill>
-                  <a:schemeClr val="accent6"/>
-                </a:solidFill>
-              </a:rPr>
-              <a:t>Blue</a:t>
-            </a:r>
-            <a:r>
-              <a:rPr lang="en-US" dirty="0"/>
-              <a:t> = Left AOI</a:t>
-            </a:r>
-          </a:p>
-          <a:p>
-            <a:r>
-              <a:rPr lang="en-US" dirty="0">
-                <a:solidFill>
-                  <a:schemeClr val="accent1"/>
-                </a:solidFill>
-              </a:rPr>
-              <a:t>Green</a:t>
-            </a:r>
-            <a:r>
-              <a:rPr lang="en-US" dirty="0"/>
-              <a:t> = Right AOI</a:t>
-            </a:r>
-          </a:p>
-        </p:txBody>
-      </p:sp>
-    </p:spTree>
-    <p:extLst>
-      <p:ext uri="{BB962C8B-B14F-4D97-AF65-F5344CB8AC3E}">
-        <p14:creationId xmlns:p14="http://schemas.microsoft.com/office/powerpoint/2010/main" val="2556047610"/>
       </p:ext>
     </p:extLst>
   </p:cSld>
@@ -19021,12 +21094,105 @@
           <a:chExt cx="0" cy="0"/>
         </a:xfrm>
       </p:grpSpPr>
+      <p:pic>
+        <p:nvPicPr>
+          <p:cNvPr id="6" name="Picture 5" descr="A screen shot of a computer&#10;&#10;AI-generated content may be incorrect.">
+            <a:extLst>
+              <a:ext uri="{FF2B5EF4-FFF2-40B4-BE49-F238E27FC236}">
+                <a16:creationId xmlns:a16="http://schemas.microsoft.com/office/drawing/2014/main" id="{4C933072-4577-3875-32FA-52F570AF9B0C}"/>
+              </a:ext>
+            </a:extLst>
+          </p:cNvPr>
+          <p:cNvPicPr>
+            <a:picLocks noChangeAspect="1"/>
+          </p:cNvPicPr>
+          <p:nvPr/>
+        </p:nvPicPr>
+        <p:blipFill>
+          <a:blip r:embed="rId2"/>
+          <a:srcRect t="1289" b="66667"/>
+          <a:stretch>
+            <a:fillRect/>
+          </a:stretch>
+        </p:blipFill>
+        <p:spPr>
+          <a:xfrm>
+            <a:off x="4164969" y="37396"/>
+            <a:ext cx="2849466" cy="6695871"/>
+          </a:xfrm>
+          <a:prstGeom prst="rect">
+            <a:avLst/>
+          </a:prstGeom>
+        </p:spPr>
+      </p:pic>
+      <p:pic>
+        <p:nvPicPr>
+          <p:cNvPr id="9" name="Picture 8" descr="A screen shot of a computer&#10;&#10;AI-generated content may be incorrect.">
+            <a:extLst>
+              <a:ext uri="{FF2B5EF4-FFF2-40B4-BE49-F238E27FC236}">
+                <a16:creationId xmlns:a16="http://schemas.microsoft.com/office/drawing/2014/main" id="{AA40DE6C-16E1-8B4A-E29D-E89BDF7CCA7C}"/>
+              </a:ext>
+            </a:extLst>
+          </p:cNvPr>
+          <p:cNvPicPr>
+            <a:picLocks noChangeAspect="1"/>
+          </p:cNvPicPr>
+          <p:nvPr/>
+        </p:nvPicPr>
+        <p:blipFill>
+          <a:blip r:embed="rId2"/>
+          <a:srcRect t="33651" b="33492"/>
+          <a:stretch>
+            <a:fillRect/>
+          </a:stretch>
+        </p:blipFill>
+        <p:spPr>
+          <a:xfrm>
+            <a:off x="6842430" y="-7857"/>
+            <a:ext cx="2849466" cy="6865857"/>
+          </a:xfrm>
+          <a:prstGeom prst="rect">
+            <a:avLst/>
+          </a:prstGeom>
+        </p:spPr>
+      </p:pic>
+      <p:pic>
+        <p:nvPicPr>
+          <p:cNvPr id="10" name="Picture 9" descr="A screen shot of a computer&#10;&#10;AI-generated content may be incorrect.">
+            <a:extLst>
+              <a:ext uri="{FF2B5EF4-FFF2-40B4-BE49-F238E27FC236}">
+                <a16:creationId xmlns:a16="http://schemas.microsoft.com/office/drawing/2014/main" id="{955D21C4-AC6B-B7FB-05C8-3015F995BF38}"/>
+              </a:ext>
+            </a:extLst>
+          </p:cNvPr>
+          <p:cNvPicPr>
+            <a:picLocks noChangeAspect="1"/>
+          </p:cNvPicPr>
+          <p:nvPr/>
+        </p:nvPicPr>
+        <p:blipFill>
+          <a:blip r:embed="rId2"/>
+          <a:srcRect t="66246"/>
+          <a:stretch>
+            <a:fillRect/>
+          </a:stretch>
+        </p:blipFill>
+        <p:spPr>
+          <a:xfrm>
+            <a:off x="9436691" y="-7857"/>
+            <a:ext cx="2770549" cy="6858000"/>
+          </a:xfrm>
+          <a:prstGeom prst="rect">
+            <a:avLst/>
+          </a:prstGeom>
+        </p:spPr>
+      </p:pic>
       <p:sp>
         <p:nvSpPr>
           <p:cNvPr id="2" name="Slide Number Placeholder 1">
             <a:extLst>
               <a:ext uri="{FF2B5EF4-FFF2-40B4-BE49-F238E27FC236}">
-                <a16:creationId xmlns:a16="http://schemas.microsoft.com/office/drawing/2014/main" id="{0AA755A8-22FD-3C6D-DDCD-939AFCF84309}"/>
+                <a16:creationId xmlns:a16="http://schemas.microsoft.com/office/drawing/2014/main" id="{A09C6E72-85B6-874C-EF63-2C82F49D5A29}"/>
               </a:ext>
             </a:extLst>
           </p:cNvPr>
@@ -19058,7 +21224,7 @@
           <p:cNvPr id="3" name="Title 2">
             <a:extLst>
               <a:ext uri="{FF2B5EF4-FFF2-40B4-BE49-F238E27FC236}">
-                <a16:creationId xmlns:a16="http://schemas.microsoft.com/office/drawing/2014/main" id="{4EE945DB-995E-3F0B-9973-7942D33078F6}"/>
+                <a16:creationId xmlns:a16="http://schemas.microsoft.com/office/drawing/2014/main" id="{B8E5BBBE-9539-A109-324A-98F98BCD5FCE}"/>
               </a:ext>
             </a:extLst>
           </p:cNvPr>
@@ -19069,17 +21235,26 @@
             <p:ph type="title"/>
           </p:nvPr>
         </p:nvSpPr>
-        <p:spPr/>
+        <p:spPr>
+          <a:xfrm>
+            <a:off x="1261872" y="384049"/>
+            <a:ext cx="9692640" cy="1207676"/>
+          </a:xfrm>
+        </p:spPr>
         <p:txBody>
           <a:bodyPr>
-            <a:normAutofit fontScale="90000"/>
+            <a:normAutofit/>
           </a:bodyPr>
           <a:lstStyle/>
           <a:p>
             <a:r>
-              <a:rPr lang="en-US" dirty="0"/>
-              <a:t>Eye-Tracking: Cleaning &amp; Classification</a:t>
-            </a:r>
+              <a:rPr lang="en-US" sz="4000" dirty="0"/>
+              <a:t>Eye-Tracking</a:t>
+            </a:r>
+            <a:br>
+              <a:rPr lang="en-US" sz="4000" dirty="0"/>
+            </a:br>
+            <a:endParaRPr lang="en-US" sz="4000" dirty="0"/>
           </a:p>
         </p:txBody>
       </p:sp>
@@ -19088,7 +21263,7 @@
           <p:cNvPr id="4" name="Content Placeholder 3">
             <a:extLst>
               <a:ext uri="{FF2B5EF4-FFF2-40B4-BE49-F238E27FC236}">
-                <a16:creationId xmlns:a16="http://schemas.microsoft.com/office/drawing/2014/main" id="{3D0266F2-DF35-D7E3-9EF9-D6286D56D9E9}"/>
+                <a16:creationId xmlns:a16="http://schemas.microsoft.com/office/drawing/2014/main" id="{B397352C-30E6-BDE5-B0CF-AD56744B5FEC}"/>
               </a:ext>
             </a:extLst>
           </p:cNvPr>
@@ -19101,8 +21276,8 @@
         </p:nvSpPr>
         <p:spPr>
           <a:xfrm>
-            <a:off x="1261871" y="1473200"/>
-            <a:ext cx="9893809" cy="5019040"/>
+            <a:off x="1261871" y="1698170"/>
+            <a:ext cx="2903098" cy="4794069"/>
           </a:xfrm>
         </p:spPr>
         <p:txBody>
@@ -19111,106 +21286,63 @@
           <a:p>
             <a:r>
               <a:rPr lang="en-US" dirty="0"/>
-              <a:t>We have simple, static AOIs; relatively clean gaze data</a:t>
-            </a:r>
-          </a:p>
-          <a:p>
-            <a:r>
-              <a:rPr lang="hu-HU" b="1" dirty="0" err="1"/>
-              <a:t>Identification</a:t>
-            </a:r>
-            <a:r>
-              <a:rPr lang="hu-HU" b="1" dirty="0"/>
-              <a:t> </a:t>
-            </a:r>
-            <a:r>
-              <a:rPr lang="hu-HU" b="1" dirty="0" err="1"/>
-              <a:t>by</a:t>
-            </a:r>
-            <a:r>
-              <a:rPr lang="hu-HU" b="1" dirty="0"/>
-              <a:t> </a:t>
-            </a:r>
-            <a:r>
-              <a:rPr lang="hu-HU" b="1" dirty="0" err="1"/>
-              <a:t>Dispersion-Threshold</a:t>
-            </a:r>
-            <a:r>
-              <a:rPr lang="hu-HU" b="1" dirty="0"/>
-              <a:t> (I</a:t>
-            </a:r>
-            <a:r>
-              <a:rPr lang="en-US" b="1" dirty="0"/>
-              <a:t>-</a:t>
-            </a:r>
-            <a:r>
-              <a:rPr lang="hu-HU" b="1" dirty="0"/>
-              <a:t>DT)</a:t>
-            </a:r>
-            <a:r>
-              <a:rPr lang="en-US" b="1" dirty="0"/>
-              <a:t> </a:t>
-            </a:r>
-            <a:r>
+              <a:t>Data as </a:t>
+            </a:r>
+            <a:br>
               <a:rPr lang="en-US" dirty="0"/>
-              <a:t>algorithm</a:t>
-            </a:r>
-          </a:p>
-          <a:p>
-            <a:pPr lvl="1"/>
+            </a:br>
             <a:r>
               <a:rPr lang="en-US" dirty="0"/>
-              <a:t>Good for low- to mid-frequency eye trackers; static stimuli; simple</a:t>
-            </a:r>
-          </a:p>
-          <a:p>
-            <a:pPr lvl="1"/>
-            <a:r>
-              <a:rPr lang="en-US"/>
-              <a:t>Cleans noise/jitter </a:t>
-            </a:r>
+              <a:t>stacked dwell time segments</a:t>
+            </a:r>
+            <a:br>
+              <a:rPr lang="en-US" dirty="0"/>
+            </a:br>
+            <a:r>
+              <a:rPr lang="en-US" dirty="0"/>
+              <a:t>…</a:t>
+            </a:r>
+          </a:p>
+          <a:p>
             <a:endParaRPr lang="en-US" dirty="0"/>
           </a:p>
           <a:p>
+            <a:endParaRPr lang="en-US" dirty="0"/>
+          </a:p>
+          <a:p>
+            <a:r>
+              <a:rPr lang="en-US" dirty="0">
+                <a:solidFill>
+                  <a:schemeClr val="accent6"/>
+                </a:solidFill>
+              </a:rPr>
+              <a:t>Blue</a:t>
+            </a:r>
             <a:r>
               <a:rPr lang="en-US" dirty="0"/>
-              <a:t>Merge/remove very short fixations and rapid saccades that arise from tracker inaccuracies and are not real gazes</a:t>
-            </a:r>
-          </a:p>
-          <a:p>
-            <a:pPr lvl="1"/>
+              <a:t> = Left AOI</a:t>
+            </a:r>
+          </a:p>
+          <a:p>
+            <a:r>
+              <a:rPr lang="en-US" dirty="0">
+                <a:solidFill>
+                  <a:schemeClr val="accent1"/>
+                </a:solidFill>
+              </a:rPr>
+              <a:t>Green</a:t>
+            </a:r>
             <a:r>
               <a:rPr lang="en-US" dirty="0"/>
-              <a:t>Threshold: </a:t>
-            </a:r>
-            <a:r>
-              <a:rPr lang="en-US" dirty="0">
-                <a:solidFill>
-                  <a:schemeClr val="accent2"/>
-                </a:solidFill>
-              </a:rPr>
-              <a:t>100ms</a:t>
-            </a:r>
-            <a:r>
-              <a:rPr lang="en-US" dirty="0"/>
-              <a:t> or less (can be adjusted)</a:t>
-            </a:r>
-          </a:p>
-          <a:p>
-            <a:endParaRPr lang="en-US" dirty="0"/>
-          </a:p>
-          <a:p>
-            <a:endParaRPr lang="en-US" dirty="0"/>
-          </a:p>
-          <a:p>
-            <a:endParaRPr lang="en-US" dirty="0"/>
+              <a:t> = Right AOI</a:t>
+            </a:r>
           </a:p>
         </p:txBody>
       </p:sp>
     </p:spTree>
     <p:extLst>
       <p:ext uri="{BB962C8B-B14F-4D97-AF65-F5344CB8AC3E}">
-        <p14:creationId xmlns:p14="http://schemas.microsoft.com/office/powerpoint/2010/main" val="276533380"/>
+        <p14:creationId xmlns:p14="http://schemas.microsoft.com/office/powerpoint/2010/main" val="2556047610"/>
       </p:ext>
     </p:extLst>
   </p:cSld>
@@ -19237,6 +21369,221 @@
           <a:chExt cx="0" cy="0"/>
         </a:xfrm>
       </p:grpSpPr>
+      <p:sp>
+        <p:nvSpPr>
+          <p:cNvPr id="2" name="Slide Number Placeholder 1">
+            <a:extLst>
+              <a:ext uri="{FF2B5EF4-FFF2-40B4-BE49-F238E27FC236}">
+                <a16:creationId xmlns:a16="http://schemas.microsoft.com/office/drawing/2014/main" id="{0AA755A8-22FD-3C6D-DDCD-939AFCF84309}"/>
+              </a:ext>
+            </a:extLst>
+          </p:cNvPr>
+          <p:cNvSpPr>
+            <a:spLocks noGrp="1"/>
+          </p:cNvSpPr>
+          <p:nvPr>
+            <p:ph type="sldNum" sz="quarter" idx="12"/>
+          </p:nvPr>
+        </p:nvSpPr>
+        <p:spPr/>
+        <p:txBody>
+          <a:bodyPr>
+            <a:normAutofit fontScale="92500" lnSpcReduction="10000"/>
+          </a:bodyPr>
+          <a:lstStyle/>
+          <a:p>
+            <a:fld id="{D57F1E4F-1CFF-5643-939E-217C01CDF565}" type="slidenum">
+              <a:rPr lang="en-US" smtClean="0"/>
+              <a:pPr/>
+              <a:t>35</a:t>
+            </a:fld>
+            <a:endParaRPr lang="en-US" dirty="0"/>
+          </a:p>
+        </p:txBody>
+      </p:sp>
+      <p:sp>
+        <p:nvSpPr>
+          <p:cNvPr id="3" name="Title 2">
+            <a:extLst>
+              <a:ext uri="{FF2B5EF4-FFF2-40B4-BE49-F238E27FC236}">
+                <a16:creationId xmlns:a16="http://schemas.microsoft.com/office/drawing/2014/main" id="{4EE945DB-995E-3F0B-9973-7942D33078F6}"/>
+              </a:ext>
+            </a:extLst>
+          </p:cNvPr>
+          <p:cNvSpPr>
+            <a:spLocks noGrp="1"/>
+          </p:cNvSpPr>
+          <p:nvPr>
+            <p:ph type="title"/>
+          </p:nvPr>
+        </p:nvSpPr>
+        <p:spPr/>
+        <p:txBody>
+          <a:bodyPr>
+            <a:normAutofit fontScale="90000"/>
+          </a:bodyPr>
+          <a:lstStyle/>
+          <a:p>
+            <a:r>
+              <a:rPr lang="en-US" dirty="0"/>
+              <a:t>Eye-Tracking: Cleaning &amp; Classification</a:t>
+            </a:r>
+          </a:p>
+        </p:txBody>
+      </p:sp>
+      <p:sp>
+        <p:nvSpPr>
+          <p:cNvPr id="4" name="Content Placeholder 3">
+            <a:extLst>
+              <a:ext uri="{FF2B5EF4-FFF2-40B4-BE49-F238E27FC236}">
+                <a16:creationId xmlns:a16="http://schemas.microsoft.com/office/drawing/2014/main" id="{3D0266F2-DF35-D7E3-9EF9-D6286D56D9E9}"/>
+              </a:ext>
+            </a:extLst>
+          </p:cNvPr>
+          <p:cNvSpPr>
+            <a:spLocks noGrp="1"/>
+          </p:cNvSpPr>
+          <p:nvPr>
+            <p:ph idx="1"/>
+          </p:nvPr>
+        </p:nvSpPr>
+        <p:spPr>
+          <a:xfrm>
+            <a:off x="1261871" y="1473200"/>
+            <a:ext cx="9893809" cy="5019040"/>
+          </a:xfrm>
+        </p:spPr>
+        <p:txBody>
+          <a:bodyPr/>
+          <a:lstStyle/>
+          <a:p>
+            <a:r>
+              <a:rPr lang="en-US" dirty="0"/>
+              <a:t>We have simple, static AOIs; relatively clean gaze data</a:t>
+            </a:r>
+          </a:p>
+          <a:p>
+            <a:r>
+              <a:rPr lang="hu-HU" b="1" dirty="0" err="1"/>
+              <a:t>Identification</a:t>
+            </a:r>
+            <a:r>
+              <a:rPr lang="hu-HU" b="1" dirty="0"/>
+              <a:t> </a:t>
+            </a:r>
+            <a:r>
+              <a:rPr lang="hu-HU" b="1" dirty="0" err="1"/>
+              <a:t>by</a:t>
+            </a:r>
+            <a:r>
+              <a:rPr lang="hu-HU" b="1" dirty="0"/>
+              <a:t> </a:t>
+            </a:r>
+            <a:r>
+              <a:rPr lang="hu-HU" b="1" dirty="0" err="1"/>
+              <a:t>Dispersion-Threshold</a:t>
+            </a:r>
+            <a:r>
+              <a:rPr lang="hu-HU" b="1" dirty="0"/>
+              <a:t> (I</a:t>
+            </a:r>
+            <a:r>
+              <a:rPr lang="en-US" b="1" dirty="0"/>
+              <a:t>-</a:t>
+            </a:r>
+            <a:r>
+              <a:rPr lang="hu-HU" b="1" dirty="0"/>
+              <a:t>DT)</a:t>
+            </a:r>
+            <a:r>
+              <a:rPr lang="en-US" b="1" dirty="0"/>
+              <a:t> </a:t>
+            </a:r>
+            <a:r>
+              <a:rPr lang="en-US" dirty="0"/>
+              <a:t>algorithm</a:t>
+            </a:r>
+          </a:p>
+          <a:p>
+            <a:pPr lvl="1"/>
+            <a:r>
+              <a:rPr lang="en-US" dirty="0"/>
+              <a:t>Good for low- to mid-frequency eye trackers; static stimuli; simple</a:t>
+            </a:r>
+          </a:p>
+          <a:p>
+            <a:pPr lvl="1"/>
+            <a:r>
+              <a:rPr lang="en-US" dirty="0"/>
+              <a:t>Cleans noise/jitter </a:t>
+            </a:r>
+          </a:p>
+          <a:p>
+            <a:r>
+              <a:rPr lang="en-US" dirty="0"/>
+              <a:t>Merge/remove very short fixations and rapid saccades that arise from tracker inaccuracies and are not real gazes</a:t>
+            </a:r>
+          </a:p>
+          <a:p>
+            <a:pPr lvl="1"/>
+            <a:r>
+              <a:rPr lang="en-US" dirty="0"/>
+              <a:t>Threshold: </a:t>
+            </a:r>
+            <a:r>
+              <a:rPr lang="en-US" dirty="0">
+                <a:solidFill>
+                  <a:schemeClr val="accent2"/>
+                </a:solidFill>
+              </a:rPr>
+              <a:t>60ms</a:t>
+            </a:r>
+            <a:r>
+              <a:rPr lang="en-US" dirty="0"/>
+              <a:t> or less (can be adjusted)</a:t>
+            </a:r>
+          </a:p>
+          <a:p>
+            <a:endParaRPr lang="en-US" dirty="0"/>
+          </a:p>
+          <a:p>
+            <a:endParaRPr lang="en-US" dirty="0"/>
+          </a:p>
+          <a:p>
+            <a:endParaRPr lang="en-US" dirty="0"/>
+          </a:p>
+        </p:txBody>
+      </p:sp>
+    </p:spTree>
+    <p:extLst>
+      <p:ext uri="{BB962C8B-B14F-4D97-AF65-F5344CB8AC3E}">
+        <p14:creationId xmlns:p14="http://schemas.microsoft.com/office/powerpoint/2010/main" val="276533380"/>
+      </p:ext>
+    </p:extLst>
+  </p:cSld>
+  <p:clrMapOvr>
+    <a:masterClrMapping/>
+  </p:clrMapOvr>
+</p:sld>
+</file>
+
+<file path=ppt/slides/slide36.xml><?xml version="1.0" encoding="utf-8"?>
+<p:sld xmlns:a="http://schemas.openxmlformats.org/drawingml/2006/main" xmlns:r="http://schemas.openxmlformats.org/officeDocument/2006/relationships" xmlns:p="http://schemas.openxmlformats.org/presentationml/2006/main">
+  <p:cSld>
+    <p:spTree>
+      <p:nvGrpSpPr>
+        <p:cNvPr id="1" name=""/>
+        <p:cNvGrpSpPr/>
+        <p:nvPr/>
+      </p:nvGrpSpPr>
+      <p:grpSpPr>
+        <a:xfrm>
+          <a:off x="0" y="0"/>
+          <a:ext cx="0" cy="0"/>
+          <a:chOff x="0" y="0"/>
+          <a:chExt cx="0" cy="0"/>
+        </a:xfrm>
+      </p:grpSpPr>
       <p:pic>
         <p:nvPicPr>
           <p:cNvPr id="10" name="Picture 9" descr="A screenshot of a computer&#10;&#10;AI-generated content may be incorrect.">
@@ -19325,7 +21672,7 @@
             <a:fld id="{D57F1E4F-1CFF-5643-939E-217C01CDF565}" type="slidenum">
               <a:rPr lang="en-US" smtClean="0"/>
               <a:pPr/>
-              <a:t>35</a:t>
+              <a:t>36</a:t>
             </a:fld>
             <a:endParaRPr lang="en-US" dirty="0"/>
           </a:p>
@@ -19379,7 +21726,7 @@
 </p:sld>
 </file>
 
-<file path=ppt/slides/slide36.xml><?xml version="1.0" encoding="utf-8"?>
+<file path=ppt/slides/slide37.xml><?xml version="1.0" encoding="utf-8"?>
 <p:sld xmlns:a="http://schemas.openxmlformats.org/drawingml/2006/main" xmlns:r="http://schemas.openxmlformats.org/officeDocument/2006/relationships" xmlns:p="http://schemas.openxmlformats.org/presentationml/2006/main">
   <p:cSld>
     <p:spTree>
@@ -19490,7 +21837,7 @@
             <a:fld id="{D57F1E4F-1CFF-5643-939E-217C01CDF565}" type="slidenum">
               <a:rPr lang="en-US" smtClean="0"/>
               <a:pPr/>
-              <a:t>36</a:t>
+              <a:t>37</a:t>
             </a:fld>
             <a:endParaRPr lang="en-US" dirty="0"/>
           </a:p>
@@ -19661,7 +22008,7 @@
 </p:sld>
 </file>
 
-<file path=ppt/slides/slide37.xml><?xml version="1.0" encoding="utf-8"?>
+<file path=ppt/slides/slide38.xml><?xml version="1.0" encoding="utf-8"?>
 <p:sld xmlns:a="http://schemas.openxmlformats.org/drawingml/2006/main" xmlns:r="http://schemas.openxmlformats.org/officeDocument/2006/relationships" xmlns:p="http://schemas.openxmlformats.org/presentationml/2006/main">
   <p:cSld>
     <p:spTree>
@@ -19741,7 +22088,7 @@
             <a:fld id="{D57F1E4F-1CFF-5643-939E-217C01CDF565}" type="slidenum">
               <a:rPr lang="en-US" smtClean="0"/>
               <a:pPr/>
-              <a:t>37</a:t>
+              <a:t>38</a:t>
             </a:fld>
             <a:endParaRPr lang="en-US" dirty="0"/>
           </a:p>
@@ -19887,7 +22234,7 @@
         </p:spPr>
         <p:txBody>
           <a:bodyPr vert="horz" lIns="91440" tIns="45720" rIns="91440" bIns="45720" rtlCol="0" anchor="b">
-            <a:normAutofit fontScale="97500" lnSpcReduction="10000"/>
+            <a:normAutofit fontScale="97500"/>
           </a:bodyPr>
           <a:lstStyle>
             <a:lvl1pPr algn="l" defTabSz="914400" rtl="0" eaLnBrk="1" latinLnBrk="0" hangingPunct="1">
@@ -19920,193 +22267,6 @@
     <p:extLst>
       <p:ext uri="{BB962C8B-B14F-4D97-AF65-F5344CB8AC3E}">
         <p14:creationId xmlns:p14="http://schemas.microsoft.com/office/powerpoint/2010/main" val="1616219076"/>
-      </p:ext>
-    </p:extLst>
-  </p:cSld>
-  <p:clrMapOvr>
-    <a:masterClrMapping/>
-  </p:clrMapOvr>
-</p:sld>
-</file>
-
-<file path=ppt/slides/slide38.xml><?xml version="1.0" encoding="utf-8"?>
-<p:sld xmlns:a="http://schemas.openxmlformats.org/drawingml/2006/main" xmlns:r="http://schemas.openxmlformats.org/officeDocument/2006/relationships" xmlns:p="http://schemas.openxmlformats.org/presentationml/2006/main">
-  <p:cSld>
-    <p:spTree>
-      <p:nvGrpSpPr>
-        <p:cNvPr id="1" name=""/>
-        <p:cNvGrpSpPr/>
-        <p:nvPr/>
-      </p:nvGrpSpPr>
-      <p:grpSpPr>
-        <a:xfrm>
-          <a:off x="0" y="0"/>
-          <a:ext cx="0" cy="0"/>
-          <a:chOff x="0" y="0"/>
-          <a:chExt cx="0" cy="0"/>
-        </a:xfrm>
-      </p:grpSpPr>
-      <p:pic>
-        <p:nvPicPr>
-          <p:cNvPr id="6" name="Picture 5" descr="A screenshot of a computer&#10;&#10;AI-generated content may be incorrect.">
-            <a:extLst>
-              <a:ext uri="{FF2B5EF4-FFF2-40B4-BE49-F238E27FC236}">
-                <a16:creationId xmlns:a16="http://schemas.microsoft.com/office/drawing/2014/main" id="{C93F0BE2-C735-5A2C-8E17-B5789ABF7AE0}"/>
-              </a:ext>
-            </a:extLst>
-          </p:cNvPr>
-          <p:cNvPicPr>
-            <a:picLocks noChangeAspect="1"/>
-          </p:cNvPicPr>
-          <p:nvPr/>
-        </p:nvPicPr>
-        <p:blipFill>
-          <a:blip r:embed="rId2"/>
-          <a:srcRect l="3174" r="13111"/>
-          <a:stretch>
-            <a:fillRect/>
-          </a:stretch>
-        </p:blipFill>
-        <p:spPr>
-          <a:xfrm>
-            <a:off x="6368142" y="0"/>
-            <a:ext cx="5741126" cy="6858000"/>
-          </a:xfrm>
-          <a:prstGeom prst="rect">
-            <a:avLst/>
-          </a:prstGeom>
-        </p:spPr>
-      </p:pic>
-      <p:sp>
-        <p:nvSpPr>
-          <p:cNvPr id="2" name="Slide Number Placeholder 1">
-            <a:extLst>
-              <a:ext uri="{FF2B5EF4-FFF2-40B4-BE49-F238E27FC236}">
-                <a16:creationId xmlns:a16="http://schemas.microsoft.com/office/drawing/2014/main" id="{18A7D5C4-5D9E-3A38-17A8-90ADD4531275}"/>
-              </a:ext>
-            </a:extLst>
-          </p:cNvPr>
-          <p:cNvSpPr>
-            <a:spLocks noGrp="1"/>
-          </p:cNvSpPr>
-          <p:nvPr>
-            <p:ph type="sldNum" sz="quarter" idx="12"/>
-          </p:nvPr>
-        </p:nvSpPr>
-        <p:spPr/>
-        <p:txBody>
-          <a:bodyPr>
-            <a:normAutofit fontScale="92500" lnSpcReduction="10000"/>
-          </a:bodyPr>
-          <a:lstStyle/>
-          <a:p>
-            <a:fld id="{D57F1E4F-1CFF-5643-939E-217C01CDF565}" type="slidenum">
-              <a:rPr lang="en-US" smtClean="0"/>
-              <a:pPr/>
-              <a:t>38</a:t>
-            </a:fld>
-            <a:endParaRPr lang="en-US" dirty="0"/>
-          </a:p>
-        </p:txBody>
-      </p:sp>
-      <p:sp>
-        <p:nvSpPr>
-          <p:cNvPr id="3" name="Title 2">
-            <a:extLst>
-              <a:ext uri="{FF2B5EF4-FFF2-40B4-BE49-F238E27FC236}">
-                <a16:creationId xmlns:a16="http://schemas.microsoft.com/office/drawing/2014/main" id="{562AC902-B8DF-00C0-B1F7-A33EA07349B2}"/>
-              </a:ext>
-            </a:extLst>
-          </p:cNvPr>
-          <p:cNvSpPr>
-            <a:spLocks noGrp="1"/>
-          </p:cNvSpPr>
-          <p:nvPr>
-            <p:ph type="title"/>
-          </p:nvPr>
-        </p:nvSpPr>
-        <p:spPr/>
-        <p:txBody>
-          <a:bodyPr>
-            <a:normAutofit fontScale="90000"/>
-          </a:bodyPr>
-          <a:lstStyle/>
-          <a:p>
-            <a:r>
-              <a:rPr lang="en-US" dirty="0"/>
-              <a:t>Analyzing ET data</a:t>
-            </a:r>
-          </a:p>
-        </p:txBody>
-      </p:sp>
-      <p:sp>
-        <p:nvSpPr>
-          <p:cNvPr id="4" name="Content Placeholder 3">
-            <a:extLst>
-              <a:ext uri="{FF2B5EF4-FFF2-40B4-BE49-F238E27FC236}">
-                <a16:creationId xmlns:a16="http://schemas.microsoft.com/office/drawing/2014/main" id="{4A203931-D9DD-BCB6-376D-96956F8D26C7}"/>
-              </a:ext>
-            </a:extLst>
-          </p:cNvPr>
-          <p:cNvSpPr>
-            <a:spLocks noGrp="1"/>
-          </p:cNvSpPr>
-          <p:nvPr>
-            <p:ph idx="1"/>
-          </p:nvPr>
-        </p:nvSpPr>
-        <p:spPr/>
-        <p:txBody>
-          <a:bodyPr/>
-          <a:lstStyle/>
-          <a:p>
-            <a:r>
-              <a:rPr lang="en-US" dirty="0"/>
-              <a:t>Dominant side (left – right)</a:t>
-            </a:r>
-          </a:p>
-          <a:p>
-            <a:r>
-              <a:rPr lang="en-US" b="1" dirty="0"/>
-              <a:t>Total dwell time</a:t>
-            </a:r>
-          </a:p>
-          <a:p>
-            <a:r>
-              <a:rPr lang="en-US" dirty="0"/>
-              <a:t>Proportion of dwell times (left – right)</a:t>
-            </a:r>
-          </a:p>
-          <a:p>
-            <a:r>
-              <a:rPr lang="en-US" dirty="0"/>
-              <a:t>No. of fixations (total; left – right)</a:t>
-            </a:r>
-          </a:p>
-          <a:p>
-            <a:r>
-              <a:rPr lang="en-US" dirty="0"/>
-              <a:t>No. of revisits (left – right)</a:t>
-            </a:r>
-          </a:p>
-          <a:p>
-            <a:r>
-              <a:rPr lang="en-US" b="1" dirty="0"/>
-              <a:t>No. of transitions (total)</a:t>
-            </a:r>
-          </a:p>
-          <a:p>
-            <a:endParaRPr lang="en-US" dirty="0"/>
-          </a:p>
-          <a:p>
-            <a:endParaRPr lang="en-US" dirty="0"/>
-          </a:p>
-        </p:txBody>
-      </p:sp>
-    </p:spTree>
-    <p:extLst>
-      <p:ext uri="{BB962C8B-B14F-4D97-AF65-F5344CB8AC3E}">
-        <p14:creationId xmlns:p14="http://schemas.microsoft.com/office/powerpoint/2010/main" val="340121173"/>
       </p:ext>
     </p:extLst>
   </p:cSld>
@@ -20133,12 +22293,43 @@
           <a:chExt cx="0" cy="0"/>
         </a:xfrm>
       </p:grpSpPr>
+      <p:pic>
+        <p:nvPicPr>
+          <p:cNvPr id="6" name="Picture 5" descr="A screenshot of a computer&#10;&#10;AI-generated content may be incorrect.">
+            <a:extLst>
+              <a:ext uri="{FF2B5EF4-FFF2-40B4-BE49-F238E27FC236}">
+                <a16:creationId xmlns:a16="http://schemas.microsoft.com/office/drawing/2014/main" id="{C93F0BE2-C735-5A2C-8E17-B5789ABF7AE0}"/>
+              </a:ext>
+            </a:extLst>
+          </p:cNvPr>
+          <p:cNvPicPr>
+            <a:picLocks noChangeAspect="1"/>
+          </p:cNvPicPr>
+          <p:nvPr/>
+        </p:nvPicPr>
+        <p:blipFill>
+          <a:blip r:embed="rId2"/>
+          <a:srcRect l="3174" r="13111"/>
+          <a:stretch>
+            <a:fillRect/>
+          </a:stretch>
+        </p:blipFill>
+        <p:spPr>
+          <a:xfrm>
+            <a:off x="6368142" y="0"/>
+            <a:ext cx="5741126" cy="6858000"/>
+          </a:xfrm>
+          <a:prstGeom prst="rect">
+            <a:avLst/>
+          </a:prstGeom>
+        </p:spPr>
+      </p:pic>
       <p:sp>
         <p:nvSpPr>
           <p:cNvPr id="2" name="Slide Number Placeholder 1">
             <a:extLst>
               <a:ext uri="{FF2B5EF4-FFF2-40B4-BE49-F238E27FC236}">
-                <a16:creationId xmlns:a16="http://schemas.microsoft.com/office/drawing/2014/main" id="{25C8FF56-1F16-B8D9-D193-3DB3C70A4144}"/>
+                <a16:creationId xmlns:a16="http://schemas.microsoft.com/office/drawing/2014/main" id="{18A7D5C4-5D9E-3A38-17A8-90ADD4531275}"/>
               </a:ext>
             </a:extLst>
           </p:cNvPr>
@@ -20160,6 +22351,481 @@
               <a:rPr lang="en-US" smtClean="0"/>
               <a:pPr/>
               <a:t>39</a:t>
+            </a:fld>
+            <a:endParaRPr lang="en-US" dirty="0"/>
+          </a:p>
+        </p:txBody>
+      </p:sp>
+      <p:sp>
+        <p:nvSpPr>
+          <p:cNvPr id="3" name="Title 2">
+            <a:extLst>
+              <a:ext uri="{FF2B5EF4-FFF2-40B4-BE49-F238E27FC236}">
+                <a16:creationId xmlns:a16="http://schemas.microsoft.com/office/drawing/2014/main" id="{562AC902-B8DF-00C0-B1F7-A33EA07349B2}"/>
+              </a:ext>
+            </a:extLst>
+          </p:cNvPr>
+          <p:cNvSpPr>
+            <a:spLocks noGrp="1"/>
+          </p:cNvSpPr>
+          <p:nvPr>
+            <p:ph type="title"/>
+          </p:nvPr>
+        </p:nvSpPr>
+        <p:spPr/>
+        <p:txBody>
+          <a:bodyPr>
+            <a:normAutofit fontScale="90000"/>
+          </a:bodyPr>
+          <a:lstStyle/>
+          <a:p>
+            <a:r>
+              <a:rPr lang="en-US" dirty="0"/>
+              <a:t>Analyzing ET data</a:t>
+            </a:r>
+          </a:p>
+        </p:txBody>
+      </p:sp>
+      <p:sp>
+        <p:nvSpPr>
+          <p:cNvPr id="4" name="Content Placeholder 3">
+            <a:extLst>
+              <a:ext uri="{FF2B5EF4-FFF2-40B4-BE49-F238E27FC236}">
+                <a16:creationId xmlns:a16="http://schemas.microsoft.com/office/drawing/2014/main" id="{4A203931-D9DD-BCB6-376D-96956F8D26C7}"/>
+              </a:ext>
+            </a:extLst>
+          </p:cNvPr>
+          <p:cNvSpPr>
+            <a:spLocks noGrp="1"/>
+          </p:cNvSpPr>
+          <p:nvPr>
+            <p:ph idx="1"/>
+          </p:nvPr>
+        </p:nvSpPr>
+        <p:spPr/>
+        <p:txBody>
+          <a:bodyPr/>
+          <a:lstStyle/>
+          <a:p>
+            <a:r>
+              <a:rPr lang="en-US" dirty="0"/>
+              <a:t>Dominant side (left – right)</a:t>
+            </a:r>
+          </a:p>
+          <a:p>
+            <a:r>
+              <a:rPr lang="en-US" b="1" dirty="0"/>
+              <a:t>Total dwell time</a:t>
+            </a:r>
+          </a:p>
+          <a:p>
+            <a:r>
+              <a:rPr lang="en-US" dirty="0"/>
+              <a:t>Proportion of dwell times (left – right)</a:t>
+            </a:r>
+          </a:p>
+          <a:p>
+            <a:r>
+              <a:rPr lang="en-US" dirty="0"/>
+              <a:t>No. of fixations (total; left – right)</a:t>
+            </a:r>
+          </a:p>
+          <a:p>
+            <a:r>
+              <a:rPr lang="en-US" dirty="0"/>
+              <a:t>No. of revisits (left – right)</a:t>
+            </a:r>
+          </a:p>
+          <a:p>
+            <a:r>
+              <a:rPr lang="en-US" b="1" dirty="0"/>
+              <a:t>No. of transitions (total)</a:t>
+            </a:r>
+          </a:p>
+          <a:p>
+            <a:endParaRPr lang="en-US" dirty="0"/>
+          </a:p>
+          <a:p>
+            <a:endParaRPr lang="en-US" dirty="0"/>
+          </a:p>
+        </p:txBody>
+      </p:sp>
+    </p:spTree>
+    <p:extLst>
+      <p:ext uri="{BB962C8B-B14F-4D97-AF65-F5344CB8AC3E}">
+        <p14:creationId xmlns:p14="http://schemas.microsoft.com/office/powerpoint/2010/main" val="340121173"/>
+      </p:ext>
+    </p:extLst>
+  </p:cSld>
+  <p:clrMapOvr>
+    <a:masterClrMapping/>
+  </p:clrMapOvr>
+</p:sld>
+</file>
+
+<file path=ppt/slides/slide4.xml><?xml version="1.0" encoding="utf-8"?>
+<p:sld xmlns:a="http://schemas.openxmlformats.org/drawingml/2006/main" xmlns:r="http://schemas.openxmlformats.org/officeDocument/2006/relationships" xmlns:p="http://schemas.openxmlformats.org/presentationml/2006/main">
+  <p:cSld>
+    <p:spTree>
+      <p:nvGrpSpPr>
+        <p:cNvPr id="1" name="">
+          <a:extLst>
+            <a:ext uri="{FF2B5EF4-FFF2-40B4-BE49-F238E27FC236}">
+              <a16:creationId xmlns:a16="http://schemas.microsoft.com/office/drawing/2014/main" id="{7CCF5033-F581-5D6A-9D90-FE572A7BDB15}"/>
+            </a:ext>
+          </a:extLst>
+        </p:cNvPr>
+        <p:cNvGrpSpPr/>
+        <p:nvPr/>
+      </p:nvGrpSpPr>
+      <p:grpSpPr>
+        <a:xfrm>
+          <a:off x="0" y="0"/>
+          <a:ext cx="0" cy="0"/>
+          <a:chOff x="0" y="0"/>
+          <a:chExt cx="0" cy="0"/>
+        </a:xfrm>
+      </p:grpSpPr>
+      <p:sp>
+        <p:nvSpPr>
+          <p:cNvPr id="2" name="Title 1">
+            <a:extLst>
+              <a:ext uri="{FF2B5EF4-FFF2-40B4-BE49-F238E27FC236}">
+                <a16:creationId xmlns:a16="http://schemas.microsoft.com/office/drawing/2014/main" id="{AB1B87EE-DA53-5519-C64C-9D7FDED526F7}"/>
+              </a:ext>
+            </a:extLst>
+          </p:cNvPr>
+          <p:cNvSpPr>
+            <a:spLocks noGrp="1"/>
+          </p:cNvSpPr>
+          <p:nvPr>
+            <p:ph type="title"/>
+          </p:nvPr>
+        </p:nvSpPr>
+        <p:spPr>
+          <a:xfrm>
+            <a:off x="1261872" y="365760"/>
+            <a:ext cx="9692640" cy="658707"/>
+          </a:xfrm>
+        </p:spPr>
+        <p:txBody>
+          <a:bodyPr>
+            <a:normAutofit fontScale="90000"/>
+          </a:bodyPr>
+          <a:lstStyle/>
+          <a:p>
+            <a:r>
+              <a:rPr lang="en-US" dirty="0"/>
+              <a:t>Background</a:t>
+            </a:r>
+          </a:p>
+        </p:txBody>
+      </p:sp>
+      <p:sp>
+        <p:nvSpPr>
+          <p:cNvPr id="3" name="Content Placeholder 2">
+            <a:extLst>
+              <a:ext uri="{FF2B5EF4-FFF2-40B4-BE49-F238E27FC236}">
+                <a16:creationId xmlns:a16="http://schemas.microsoft.com/office/drawing/2014/main" id="{A280B563-7B63-769D-B628-CE4AC0ABFA7D}"/>
+              </a:ext>
+            </a:extLst>
+          </p:cNvPr>
+          <p:cNvSpPr>
+            <a:spLocks noGrp="1"/>
+          </p:cNvSpPr>
+          <p:nvPr>
+            <p:ph idx="4294967295"/>
+          </p:nvPr>
+        </p:nvSpPr>
+        <p:spPr>
+          <a:xfrm>
+            <a:off x="1261872" y="1261872"/>
+            <a:ext cx="10360152" cy="5504053"/>
+          </a:xfrm>
+        </p:spPr>
+        <p:txBody>
+          <a:bodyPr>
+            <a:normAutofit/>
+          </a:bodyPr>
+          <a:lstStyle/>
+          <a:p>
+            <a:pPr>
+              <a:spcBef>
+                <a:spcPts val="0"/>
+              </a:spcBef>
+            </a:pPr>
+            <a:r>
+              <a:rPr lang="en-US" dirty="0"/>
+              <a:t>Hungarian is an </a:t>
+            </a:r>
+            <a:r>
+              <a:rPr lang="en-US" b="1" dirty="0"/>
+              <a:t>agglutinative</a:t>
+            </a:r>
+            <a:r>
+              <a:rPr lang="en-US" dirty="0"/>
+              <a:t> language with a relatively </a:t>
+            </a:r>
+            <a:r>
+              <a:rPr lang="en-US" b="1" dirty="0"/>
+              <a:t>free</a:t>
+            </a:r>
+            <a:r>
+              <a:rPr lang="en-US" dirty="0"/>
+              <a:t> word order</a:t>
+            </a:r>
+          </a:p>
+          <a:p>
+            <a:pPr>
+              <a:spcBef>
+                <a:spcPts val="0"/>
+              </a:spcBef>
+            </a:pPr>
+            <a:r>
+              <a:rPr lang="en-US" dirty="0"/>
+              <a:t>There is one important place in a sentence: </a:t>
+            </a:r>
+            <a:r>
+              <a:rPr lang="en-US" b="1" dirty="0"/>
+              <a:t>the focus position</a:t>
+            </a:r>
+          </a:p>
+          <a:p>
+            <a:pPr>
+              <a:spcBef>
+                <a:spcPts val="0"/>
+              </a:spcBef>
+            </a:pPr>
+            <a:r>
+              <a:rPr lang="en-US" dirty="0"/>
+              <a:t>Focus comes before the verb; they are always together: </a:t>
+            </a:r>
+            <a:r>
+              <a:rPr lang="en-US" b="1" dirty="0"/>
+              <a:t>focus + verb</a:t>
+            </a:r>
+            <a:br>
+              <a:rPr lang="en-US" dirty="0"/>
+            </a:br>
+            <a:endParaRPr lang="en-US" dirty="0"/>
+          </a:p>
+          <a:p>
+            <a:pPr marL="0" indent="0">
+              <a:spcBef>
+                <a:spcPts val="0"/>
+              </a:spcBef>
+              <a:buNone/>
+            </a:pPr>
+            <a:r>
+              <a:rPr lang="en-US" dirty="0"/>
+              <a:t>	A </a:t>
+            </a:r>
+            <a:r>
+              <a:rPr lang="hu-HU" dirty="0"/>
+              <a:t>barátom kínaiul tanul Hongkongban.</a:t>
+            </a:r>
+          </a:p>
+          <a:p>
+            <a:pPr marL="0" indent="0">
+              <a:spcBef>
+                <a:spcPts val="0"/>
+              </a:spcBef>
+              <a:buNone/>
+            </a:pPr>
+            <a:r>
+              <a:rPr lang="en-US" dirty="0"/>
+              <a:t>	</a:t>
+            </a:r>
+            <a:r>
+              <a:rPr lang="hu-HU" dirty="0"/>
+              <a:t>A barátom Hongkongban tanul kínaiul.</a:t>
+            </a:r>
+          </a:p>
+          <a:p>
+            <a:pPr marL="0" indent="0">
+              <a:spcBef>
+                <a:spcPts val="0"/>
+              </a:spcBef>
+              <a:buNone/>
+            </a:pPr>
+            <a:r>
+              <a:rPr lang="en-US" dirty="0"/>
+              <a:t>	</a:t>
+            </a:r>
+            <a:r>
+              <a:rPr lang="hu-HU" dirty="0"/>
+              <a:t>A barátom tanul kínaiul Hongkongban</a:t>
+            </a:r>
+            <a:r>
+              <a:rPr lang="en-US" dirty="0"/>
+              <a:t>.</a:t>
+            </a:r>
+          </a:p>
+          <a:p>
+            <a:pPr marL="0" indent="0" algn="ctr">
+              <a:spcBef>
+                <a:spcPts val="0"/>
+              </a:spcBef>
+              <a:buNone/>
+            </a:pPr>
+            <a:endParaRPr lang="en-US" dirty="0"/>
+          </a:p>
+          <a:p>
+            <a:pPr marL="0" indent="0">
+              <a:spcBef>
+                <a:spcPts val="0"/>
+              </a:spcBef>
+              <a:buNone/>
+            </a:pPr>
+            <a:r>
+              <a:rPr lang="en-US" sz="2400" dirty="0"/>
+              <a:t>A </a:t>
+            </a:r>
+            <a:r>
+              <a:rPr lang="hu-HU" sz="2400" dirty="0"/>
+              <a:t>barátom	</a:t>
+            </a:r>
+            <a:r>
+              <a:rPr lang="en-US" sz="2400" dirty="0"/>
+              <a:t>	</a:t>
+            </a:r>
+            <a:r>
+              <a:rPr lang="hu-HU" sz="2400" dirty="0"/>
+              <a:t>kínaiul		</a:t>
+            </a:r>
+            <a:r>
+              <a:rPr lang="en-US" sz="2400" dirty="0"/>
+              <a:t>	</a:t>
+            </a:r>
+            <a:r>
+              <a:rPr lang="hu-HU" sz="2400" dirty="0"/>
+              <a:t>tanul	</a:t>
+            </a:r>
+            <a:r>
+              <a:rPr lang="en-US" sz="2400" dirty="0"/>
+              <a:t>	</a:t>
+            </a:r>
+            <a:r>
+              <a:rPr lang="hu-HU" sz="2400" dirty="0"/>
+              <a:t>Hongkongban.</a:t>
+            </a:r>
+          </a:p>
+          <a:p>
+            <a:pPr marL="0" indent="0">
+              <a:spcBef>
+                <a:spcPts val="0"/>
+              </a:spcBef>
+              <a:buNone/>
+            </a:pPr>
+            <a:r>
+              <a:rPr lang="en-US" sz="2400" dirty="0"/>
+              <a:t>the friend-1SG.POSS	Chinese-ESSIVE	studies		Hong Kong-INESS</a:t>
+            </a:r>
+          </a:p>
+          <a:p>
+            <a:pPr marL="0" indent="0">
+              <a:spcBef>
+                <a:spcPts val="0"/>
+              </a:spcBef>
+              <a:buNone/>
+            </a:pPr>
+            <a:r>
+              <a:rPr lang="en-US" sz="2400" i="1" dirty="0"/>
+              <a:t>My friend studies Chinese in Hong Kong.</a:t>
+            </a:r>
+            <a:endParaRPr lang="hu-HU" sz="2400" i="1" dirty="0"/>
+          </a:p>
+        </p:txBody>
+      </p:sp>
+      <p:sp>
+        <p:nvSpPr>
+          <p:cNvPr id="4" name="Slide Number Placeholder 3">
+            <a:extLst>
+              <a:ext uri="{FF2B5EF4-FFF2-40B4-BE49-F238E27FC236}">
+                <a16:creationId xmlns:a16="http://schemas.microsoft.com/office/drawing/2014/main" id="{E607994A-BBB0-35B8-1CF5-1C8D2B98BA22}"/>
+              </a:ext>
+            </a:extLst>
+          </p:cNvPr>
+          <p:cNvSpPr>
+            <a:spLocks noGrp="1"/>
+          </p:cNvSpPr>
+          <p:nvPr>
+            <p:ph type="sldNum" sz="quarter" idx="12"/>
+          </p:nvPr>
+        </p:nvSpPr>
+        <p:spPr/>
+        <p:txBody>
+          <a:bodyPr>
+            <a:normAutofit fontScale="92500" lnSpcReduction="10000"/>
+          </a:bodyPr>
+          <a:lstStyle/>
+          <a:p>
+            <a:fld id="{D57F1E4F-1CFF-5643-939E-217C01CDF565}" type="slidenum">
+              <a:rPr lang="en-US" smtClean="0"/>
+              <a:pPr/>
+              <a:t>4</a:t>
+            </a:fld>
+            <a:endParaRPr lang="en-US" dirty="0"/>
+          </a:p>
+        </p:txBody>
+      </p:sp>
+    </p:spTree>
+    <p:extLst>
+      <p:ext uri="{BB962C8B-B14F-4D97-AF65-F5344CB8AC3E}">
+        <p14:creationId xmlns:p14="http://schemas.microsoft.com/office/powerpoint/2010/main" val="24324269"/>
+      </p:ext>
+    </p:extLst>
+  </p:cSld>
+  <p:clrMapOvr>
+    <a:masterClrMapping/>
+  </p:clrMapOvr>
+</p:sld>
+</file>
+
+<file path=ppt/slides/slide40.xml><?xml version="1.0" encoding="utf-8"?>
+<p:sld xmlns:a="http://schemas.openxmlformats.org/drawingml/2006/main" xmlns:r="http://schemas.openxmlformats.org/officeDocument/2006/relationships" xmlns:p="http://schemas.openxmlformats.org/presentationml/2006/main">
+  <p:cSld>
+    <p:spTree>
+      <p:nvGrpSpPr>
+        <p:cNvPr id="1" name=""/>
+        <p:cNvGrpSpPr/>
+        <p:nvPr/>
+      </p:nvGrpSpPr>
+      <p:grpSpPr>
+        <a:xfrm>
+          <a:off x="0" y="0"/>
+          <a:ext cx="0" cy="0"/>
+          <a:chOff x="0" y="0"/>
+          <a:chExt cx="0" cy="0"/>
+        </a:xfrm>
+      </p:grpSpPr>
+      <p:sp>
+        <p:nvSpPr>
+          <p:cNvPr id="2" name="Slide Number Placeholder 1">
+            <a:extLst>
+              <a:ext uri="{FF2B5EF4-FFF2-40B4-BE49-F238E27FC236}">
+                <a16:creationId xmlns:a16="http://schemas.microsoft.com/office/drawing/2014/main" id="{25C8FF56-1F16-B8D9-D193-3DB3C70A4144}"/>
+              </a:ext>
+            </a:extLst>
+          </p:cNvPr>
+          <p:cNvSpPr>
+            <a:spLocks noGrp="1"/>
+          </p:cNvSpPr>
+          <p:nvPr>
+            <p:ph type="sldNum" sz="quarter" idx="12"/>
+          </p:nvPr>
+        </p:nvSpPr>
+        <p:spPr/>
+        <p:txBody>
+          <a:bodyPr>
+            <a:normAutofit fontScale="92500" lnSpcReduction="10000"/>
+          </a:bodyPr>
+          <a:lstStyle/>
+          <a:p>
+            <a:fld id="{D57F1E4F-1CFF-5643-939E-217C01CDF565}" type="slidenum">
+              <a:rPr lang="en-US" smtClean="0"/>
+              <a:pPr/>
+              <a:t>40</a:t>
             </a:fld>
             <a:endParaRPr lang="en-US" dirty="0"/>
           </a:p>
@@ -20978,447 +23644,6 @@
 </p:sld>
 </file>
 
-<file path=ppt/slides/slide4.xml><?xml version="1.0" encoding="utf-8"?>
-<p:sld xmlns:a="http://schemas.openxmlformats.org/drawingml/2006/main" xmlns:r="http://schemas.openxmlformats.org/officeDocument/2006/relationships" xmlns:p="http://schemas.openxmlformats.org/presentationml/2006/main">
-  <p:cSld>
-    <p:spTree>
-      <p:nvGrpSpPr>
-        <p:cNvPr id="1" name="">
-          <a:extLst>
-            <a:ext uri="{FF2B5EF4-FFF2-40B4-BE49-F238E27FC236}">
-              <a16:creationId xmlns:a16="http://schemas.microsoft.com/office/drawing/2014/main" id="{7CCF5033-F581-5D6A-9D90-FE572A7BDB15}"/>
-            </a:ext>
-          </a:extLst>
-        </p:cNvPr>
-        <p:cNvGrpSpPr/>
-        <p:nvPr/>
-      </p:nvGrpSpPr>
-      <p:grpSpPr>
-        <a:xfrm>
-          <a:off x="0" y="0"/>
-          <a:ext cx="0" cy="0"/>
-          <a:chOff x="0" y="0"/>
-          <a:chExt cx="0" cy="0"/>
-        </a:xfrm>
-      </p:grpSpPr>
-      <p:sp>
-        <p:nvSpPr>
-          <p:cNvPr id="2" name="Title 1">
-            <a:extLst>
-              <a:ext uri="{FF2B5EF4-FFF2-40B4-BE49-F238E27FC236}">
-                <a16:creationId xmlns:a16="http://schemas.microsoft.com/office/drawing/2014/main" id="{AB1B87EE-DA53-5519-C64C-9D7FDED526F7}"/>
-              </a:ext>
-            </a:extLst>
-          </p:cNvPr>
-          <p:cNvSpPr>
-            <a:spLocks noGrp="1"/>
-          </p:cNvSpPr>
-          <p:nvPr>
-            <p:ph type="title"/>
-          </p:nvPr>
-        </p:nvSpPr>
-        <p:spPr>
-          <a:xfrm>
-            <a:off x="1261872" y="365760"/>
-            <a:ext cx="9692640" cy="658707"/>
-          </a:xfrm>
-        </p:spPr>
-        <p:txBody>
-          <a:bodyPr>
-            <a:normAutofit fontScale="90000"/>
-          </a:bodyPr>
-          <a:lstStyle/>
-          <a:p>
-            <a:r>
-              <a:rPr lang="en-US" dirty="0"/>
-              <a:t>Background</a:t>
-            </a:r>
-          </a:p>
-        </p:txBody>
-      </p:sp>
-      <p:sp>
-        <p:nvSpPr>
-          <p:cNvPr id="3" name="Content Placeholder 2">
-            <a:extLst>
-              <a:ext uri="{FF2B5EF4-FFF2-40B4-BE49-F238E27FC236}">
-                <a16:creationId xmlns:a16="http://schemas.microsoft.com/office/drawing/2014/main" id="{A280B563-7B63-769D-B628-CE4AC0ABFA7D}"/>
-              </a:ext>
-            </a:extLst>
-          </p:cNvPr>
-          <p:cNvSpPr>
-            <a:spLocks noGrp="1"/>
-          </p:cNvSpPr>
-          <p:nvPr>
-            <p:ph idx="4294967295"/>
-          </p:nvPr>
-        </p:nvSpPr>
-        <p:spPr>
-          <a:xfrm>
-            <a:off x="1261872" y="1261872"/>
-            <a:ext cx="10360152" cy="5504053"/>
-          </a:xfrm>
-        </p:spPr>
-        <p:txBody>
-          <a:bodyPr>
-            <a:normAutofit/>
-          </a:bodyPr>
-          <a:lstStyle/>
-          <a:p>
-            <a:pPr>
-              <a:spcBef>
-                <a:spcPts val="0"/>
-              </a:spcBef>
-            </a:pPr>
-            <a:r>
-              <a:rPr lang="en-US" dirty="0"/>
-              <a:t>Hungarian is an </a:t>
-            </a:r>
-            <a:r>
-              <a:rPr lang="en-US" b="1" dirty="0"/>
-              <a:t>agglutinative</a:t>
-            </a:r>
-            <a:r>
-              <a:rPr lang="en-US" dirty="0"/>
-              <a:t> language with a relatively </a:t>
-            </a:r>
-            <a:r>
-              <a:rPr lang="en-US" b="1" dirty="0"/>
-              <a:t>free</a:t>
-            </a:r>
-            <a:r>
-              <a:rPr lang="en-US" dirty="0"/>
-              <a:t> word order</a:t>
-            </a:r>
-          </a:p>
-          <a:p>
-            <a:pPr>
-              <a:spcBef>
-                <a:spcPts val="0"/>
-              </a:spcBef>
-            </a:pPr>
-            <a:r>
-              <a:rPr lang="en-US" dirty="0"/>
-              <a:t>There is one important place in a sentence: </a:t>
-            </a:r>
-            <a:r>
-              <a:rPr lang="en-US" b="1" dirty="0"/>
-              <a:t>the focus position</a:t>
-            </a:r>
-          </a:p>
-          <a:p>
-            <a:pPr>
-              <a:spcBef>
-                <a:spcPts val="0"/>
-              </a:spcBef>
-            </a:pPr>
-            <a:r>
-              <a:rPr lang="en-US" dirty="0"/>
-              <a:t>Focus comes before the verb; they are always together: </a:t>
-            </a:r>
-            <a:r>
-              <a:rPr lang="en-US" b="1" dirty="0"/>
-              <a:t>focus + verb</a:t>
-            </a:r>
-            <a:br>
-              <a:rPr lang="en-US" dirty="0"/>
-            </a:br>
-            <a:endParaRPr lang="en-US" dirty="0"/>
-          </a:p>
-          <a:p>
-            <a:pPr marL="0" indent="0">
-              <a:spcBef>
-                <a:spcPts val="0"/>
-              </a:spcBef>
-              <a:buNone/>
-            </a:pPr>
-            <a:r>
-              <a:rPr lang="en-US" dirty="0"/>
-              <a:t>	A </a:t>
-            </a:r>
-            <a:r>
-              <a:rPr lang="hu-HU" dirty="0"/>
-              <a:t>barátom kínaiul tanul Hongkongban.</a:t>
-            </a:r>
-          </a:p>
-          <a:p>
-            <a:pPr marL="0" indent="0">
-              <a:spcBef>
-                <a:spcPts val="0"/>
-              </a:spcBef>
-              <a:buNone/>
-            </a:pPr>
-            <a:r>
-              <a:rPr lang="en-US" dirty="0"/>
-              <a:t>	</a:t>
-            </a:r>
-            <a:r>
-              <a:rPr lang="hu-HU" dirty="0"/>
-              <a:t>A barátom Hongkongban tanul kínaiul.</a:t>
-            </a:r>
-          </a:p>
-          <a:p>
-            <a:pPr marL="0" indent="0">
-              <a:spcBef>
-                <a:spcPts val="0"/>
-              </a:spcBef>
-              <a:buNone/>
-            </a:pPr>
-            <a:r>
-              <a:rPr lang="en-US" dirty="0"/>
-              <a:t>	</a:t>
-            </a:r>
-            <a:r>
-              <a:rPr lang="hu-HU" dirty="0"/>
-              <a:t>A barátom tanul kínaiul Hongkongban</a:t>
-            </a:r>
-            <a:r>
-              <a:rPr lang="en-US" dirty="0"/>
-              <a:t>.</a:t>
-            </a:r>
-          </a:p>
-          <a:p>
-            <a:pPr marL="0" indent="0" algn="ctr">
-              <a:spcBef>
-                <a:spcPts val="0"/>
-              </a:spcBef>
-              <a:buNone/>
-            </a:pPr>
-            <a:endParaRPr lang="en-US" dirty="0"/>
-          </a:p>
-          <a:p>
-            <a:pPr marL="0" indent="0">
-              <a:spcBef>
-                <a:spcPts val="0"/>
-              </a:spcBef>
-              <a:buNone/>
-            </a:pPr>
-            <a:r>
-              <a:rPr lang="en-US" sz="2400" dirty="0"/>
-              <a:t>A </a:t>
-            </a:r>
-            <a:r>
-              <a:rPr lang="hu-HU" sz="2400" dirty="0"/>
-              <a:t>barátom	</a:t>
-            </a:r>
-            <a:r>
-              <a:rPr lang="en-US" sz="2400" dirty="0"/>
-              <a:t>	</a:t>
-            </a:r>
-            <a:r>
-              <a:rPr lang="hu-HU" sz="2400" dirty="0"/>
-              <a:t>kínaiul		</a:t>
-            </a:r>
-            <a:r>
-              <a:rPr lang="en-US" sz="2400" dirty="0"/>
-              <a:t>	</a:t>
-            </a:r>
-            <a:r>
-              <a:rPr lang="hu-HU" sz="2400" dirty="0"/>
-              <a:t>tanul	</a:t>
-            </a:r>
-            <a:r>
-              <a:rPr lang="en-US" sz="2400" dirty="0"/>
-              <a:t>	</a:t>
-            </a:r>
-            <a:r>
-              <a:rPr lang="hu-HU" sz="2400" dirty="0"/>
-              <a:t>Hongkongban.</a:t>
-            </a:r>
-          </a:p>
-          <a:p>
-            <a:pPr marL="0" indent="0">
-              <a:spcBef>
-                <a:spcPts val="0"/>
-              </a:spcBef>
-              <a:buNone/>
-            </a:pPr>
-            <a:r>
-              <a:rPr lang="en-US" sz="2400" dirty="0"/>
-              <a:t>the friend-1SG.POSS	Chinese-ESSIVE	studies		Hong Kong-INESS</a:t>
-            </a:r>
-          </a:p>
-          <a:p>
-            <a:pPr marL="0" indent="0">
-              <a:spcBef>
-                <a:spcPts val="0"/>
-              </a:spcBef>
-              <a:buNone/>
-            </a:pPr>
-            <a:r>
-              <a:rPr lang="en-US" sz="2400" i="1" dirty="0"/>
-              <a:t>My friend studies Chinese in Hong Kong.</a:t>
-            </a:r>
-            <a:endParaRPr lang="hu-HU" sz="2400" i="1" dirty="0"/>
-          </a:p>
-        </p:txBody>
-      </p:sp>
-      <p:sp>
-        <p:nvSpPr>
-          <p:cNvPr id="4" name="Slide Number Placeholder 3">
-            <a:extLst>
-              <a:ext uri="{FF2B5EF4-FFF2-40B4-BE49-F238E27FC236}">
-                <a16:creationId xmlns:a16="http://schemas.microsoft.com/office/drawing/2014/main" id="{E607994A-BBB0-35B8-1CF5-1C8D2B98BA22}"/>
-              </a:ext>
-            </a:extLst>
-          </p:cNvPr>
-          <p:cNvSpPr>
-            <a:spLocks noGrp="1"/>
-          </p:cNvSpPr>
-          <p:nvPr>
-            <p:ph type="sldNum" sz="quarter" idx="12"/>
-          </p:nvPr>
-        </p:nvSpPr>
-        <p:spPr/>
-        <p:txBody>
-          <a:bodyPr>
-            <a:normAutofit fontScale="92500" lnSpcReduction="10000"/>
-          </a:bodyPr>
-          <a:lstStyle/>
-          <a:p>
-            <a:fld id="{D57F1E4F-1CFF-5643-939E-217C01CDF565}" type="slidenum">
-              <a:rPr lang="en-US" smtClean="0"/>
-              <a:pPr/>
-              <a:t>4</a:t>
-            </a:fld>
-            <a:endParaRPr lang="en-US" dirty="0"/>
-          </a:p>
-        </p:txBody>
-      </p:sp>
-    </p:spTree>
-    <p:extLst>
-      <p:ext uri="{BB962C8B-B14F-4D97-AF65-F5344CB8AC3E}">
-        <p14:creationId xmlns:p14="http://schemas.microsoft.com/office/powerpoint/2010/main" val="24324269"/>
-      </p:ext>
-    </p:extLst>
-  </p:cSld>
-  <p:clrMapOvr>
-    <a:masterClrMapping/>
-  </p:clrMapOvr>
-</p:sld>
-</file>
-
-<file path=ppt/slides/slide40.xml><?xml version="1.0" encoding="utf-8"?>
-<p:sld xmlns:a="http://schemas.openxmlformats.org/drawingml/2006/main" xmlns:r="http://schemas.openxmlformats.org/officeDocument/2006/relationships" xmlns:p="http://schemas.openxmlformats.org/presentationml/2006/main">
-  <p:cSld>
-    <p:spTree>
-      <p:nvGrpSpPr>
-        <p:cNvPr id="1" name=""/>
-        <p:cNvGrpSpPr/>
-        <p:nvPr/>
-      </p:nvGrpSpPr>
-      <p:grpSpPr>
-        <a:xfrm>
-          <a:off x="0" y="0"/>
-          <a:ext cx="0" cy="0"/>
-          <a:chOff x="0" y="0"/>
-          <a:chExt cx="0" cy="0"/>
-        </a:xfrm>
-      </p:grpSpPr>
-      <p:sp>
-        <p:nvSpPr>
-          <p:cNvPr id="2" name="Title 1">
-            <a:extLst>
-              <a:ext uri="{FF2B5EF4-FFF2-40B4-BE49-F238E27FC236}">
-                <a16:creationId xmlns:a16="http://schemas.microsoft.com/office/drawing/2014/main" id="{4153462C-F8B0-623B-6502-C77F6A612CDD}"/>
-              </a:ext>
-            </a:extLst>
-          </p:cNvPr>
-          <p:cNvSpPr>
-            <a:spLocks noGrp="1"/>
-          </p:cNvSpPr>
-          <p:nvPr>
-            <p:ph type="title"/>
-          </p:nvPr>
-        </p:nvSpPr>
-        <p:spPr/>
-        <p:txBody>
-          <a:bodyPr>
-            <a:normAutofit/>
-          </a:bodyPr>
-          <a:lstStyle/>
-          <a:p>
-            <a:r>
-              <a:rPr lang="en-US" sz="7200" dirty="0"/>
-              <a:t>Thank you, </a:t>
-            </a:r>
-          </a:p>
-        </p:txBody>
-      </p:sp>
-      <p:sp>
-        <p:nvSpPr>
-          <p:cNvPr id="3" name="Text Placeholder 2">
-            <a:extLst>
-              <a:ext uri="{FF2B5EF4-FFF2-40B4-BE49-F238E27FC236}">
-                <a16:creationId xmlns:a16="http://schemas.microsoft.com/office/drawing/2014/main" id="{854514E0-4024-FAE7-BF84-6A66CF05A389}"/>
-              </a:ext>
-            </a:extLst>
-          </p:cNvPr>
-          <p:cNvSpPr>
-            <a:spLocks noGrp="1"/>
-          </p:cNvSpPr>
-          <p:nvPr>
-            <p:ph type="body" idx="1"/>
-          </p:nvPr>
-        </p:nvSpPr>
-        <p:spPr/>
-        <p:txBody>
-          <a:bodyPr>
-            <a:normAutofit/>
-          </a:bodyPr>
-          <a:lstStyle/>
-          <a:p>
-            <a:r>
-              <a:rPr lang="en-US" sz="3600" dirty="0"/>
-              <a:t>Now help me discuss :)</a:t>
-            </a:r>
-          </a:p>
-        </p:txBody>
-      </p:sp>
-      <p:sp>
-        <p:nvSpPr>
-          <p:cNvPr id="4" name="Slide Number Placeholder 3">
-            <a:extLst>
-              <a:ext uri="{FF2B5EF4-FFF2-40B4-BE49-F238E27FC236}">
-                <a16:creationId xmlns:a16="http://schemas.microsoft.com/office/drawing/2014/main" id="{8FFCA26F-809A-36A8-E955-52CF8D4192C0}"/>
-              </a:ext>
-            </a:extLst>
-          </p:cNvPr>
-          <p:cNvSpPr>
-            <a:spLocks noGrp="1"/>
-          </p:cNvSpPr>
-          <p:nvPr>
-            <p:ph type="sldNum" sz="quarter" idx="12"/>
-          </p:nvPr>
-        </p:nvSpPr>
-        <p:spPr/>
-        <p:txBody>
-          <a:bodyPr>
-            <a:normAutofit fontScale="92500" lnSpcReduction="10000"/>
-          </a:bodyPr>
-          <a:lstStyle/>
-          <a:p>
-            <a:fld id="{D57F1E4F-1CFF-5643-939E-217C01CDF565}" type="slidenum">
-              <a:rPr lang="en-US" smtClean="0"/>
-              <a:pPr/>
-              <a:t>40</a:t>
-            </a:fld>
-            <a:endParaRPr lang="en-US" dirty="0"/>
-          </a:p>
-        </p:txBody>
-      </p:sp>
-    </p:spTree>
-    <p:extLst>
-      <p:ext uri="{BB962C8B-B14F-4D97-AF65-F5344CB8AC3E}">
-        <p14:creationId xmlns:p14="http://schemas.microsoft.com/office/powerpoint/2010/main" val="2645237462"/>
-      </p:ext>
-    </p:extLst>
-  </p:cSld>
-  <p:clrMapOvr>
-    <a:masterClrMapping/>
-  </p:clrMapOvr>
-</p:sld>
-</file>
-
 <file path=ppt/slides/slide41.xml><?xml version="1.0" encoding="utf-8"?>
 <p:sld xmlns:a="http://schemas.openxmlformats.org/drawingml/2006/main" xmlns:r="http://schemas.openxmlformats.org/officeDocument/2006/relationships" xmlns:p="http://schemas.openxmlformats.org/presentationml/2006/main">
   <p:cSld>
@@ -21438,10 +23663,70 @@
       </p:grpSpPr>
       <p:sp>
         <p:nvSpPr>
-          <p:cNvPr id="2" name="Slide Number Placeholder 1">
-            <a:extLst>
-              <a:ext uri="{FF2B5EF4-FFF2-40B4-BE49-F238E27FC236}">
-                <a16:creationId xmlns:a16="http://schemas.microsoft.com/office/drawing/2014/main" id="{1448AABF-008B-0705-8549-BC326A39B7EF}"/>
+          <p:cNvPr id="2" name="Title 1">
+            <a:extLst>
+              <a:ext uri="{FF2B5EF4-FFF2-40B4-BE49-F238E27FC236}">
+                <a16:creationId xmlns:a16="http://schemas.microsoft.com/office/drawing/2014/main" id="{4153462C-F8B0-623B-6502-C77F6A612CDD}"/>
+              </a:ext>
+            </a:extLst>
+          </p:cNvPr>
+          <p:cNvSpPr>
+            <a:spLocks noGrp="1"/>
+          </p:cNvSpPr>
+          <p:nvPr>
+            <p:ph type="title"/>
+          </p:nvPr>
+        </p:nvSpPr>
+        <p:spPr/>
+        <p:txBody>
+          <a:bodyPr>
+            <a:normAutofit/>
+          </a:bodyPr>
+          <a:lstStyle/>
+          <a:p>
+            <a:r>
+              <a:rPr lang="en-US" sz="7200" dirty="0"/>
+              <a:t>Thank you, </a:t>
+            </a:r>
+          </a:p>
+        </p:txBody>
+      </p:sp>
+      <p:sp>
+        <p:nvSpPr>
+          <p:cNvPr id="3" name="Text Placeholder 2">
+            <a:extLst>
+              <a:ext uri="{FF2B5EF4-FFF2-40B4-BE49-F238E27FC236}">
+                <a16:creationId xmlns:a16="http://schemas.microsoft.com/office/drawing/2014/main" id="{854514E0-4024-FAE7-BF84-6A66CF05A389}"/>
+              </a:ext>
+            </a:extLst>
+          </p:cNvPr>
+          <p:cNvSpPr>
+            <a:spLocks noGrp="1"/>
+          </p:cNvSpPr>
+          <p:nvPr>
+            <p:ph type="body" idx="1"/>
+          </p:nvPr>
+        </p:nvSpPr>
+        <p:spPr/>
+        <p:txBody>
+          <a:bodyPr>
+            <a:normAutofit/>
+          </a:bodyPr>
+          <a:lstStyle/>
+          <a:p>
+            <a:r>
+              <a:rPr lang="en-US" sz="3600" dirty="0"/>
+              <a:t>Now help me discuss :)</a:t>
+            </a:r>
+          </a:p>
+        </p:txBody>
+      </p:sp>
+      <p:sp>
+        <p:nvSpPr>
+          <p:cNvPr id="4" name="Slide Number Placeholder 3">
+            <a:extLst>
+              <a:ext uri="{FF2B5EF4-FFF2-40B4-BE49-F238E27FC236}">
+                <a16:creationId xmlns:a16="http://schemas.microsoft.com/office/drawing/2014/main" id="{8FFCA26F-809A-36A8-E955-52CF8D4192C0}"/>
               </a:ext>
             </a:extLst>
           </p:cNvPr>
@@ -21463,6 +23748,68 @@
               <a:rPr lang="en-US" smtClean="0"/>
               <a:pPr/>
               <a:t>41</a:t>
+            </a:fld>
+            <a:endParaRPr lang="en-US" dirty="0"/>
+          </a:p>
+        </p:txBody>
+      </p:sp>
+    </p:spTree>
+    <p:extLst>
+      <p:ext uri="{BB962C8B-B14F-4D97-AF65-F5344CB8AC3E}">
+        <p14:creationId xmlns:p14="http://schemas.microsoft.com/office/powerpoint/2010/main" val="2645237462"/>
+      </p:ext>
+    </p:extLst>
+  </p:cSld>
+  <p:clrMapOvr>
+    <a:masterClrMapping/>
+  </p:clrMapOvr>
+</p:sld>
+</file>
+
+<file path=ppt/slides/slide42.xml><?xml version="1.0" encoding="utf-8"?>
+<p:sld xmlns:a="http://schemas.openxmlformats.org/drawingml/2006/main" xmlns:r="http://schemas.openxmlformats.org/officeDocument/2006/relationships" xmlns:p="http://schemas.openxmlformats.org/presentationml/2006/main">
+  <p:cSld>
+    <p:spTree>
+      <p:nvGrpSpPr>
+        <p:cNvPr id="1" name=""/>
+        <p:cNvGrpSpPr/>
+        <p:nvPr/>
+      </p:nvGrpSpPr>
+      <p:grpSpPr>
+        <a:xfrm>
+          <a:off x="0" y="0"/>
+          <a:ext cx="0" cy="0"/>
+          <a:chOff x="0" y="0"/>
+          <a:chExt cx="0" cy="0"/>
+        </a:xfrm>
+      </p:grpSpPr>
+      <p:sp>
+        <p:nvSpPr>
+          <p:cNvPr id="2" name="Slide Number Placeholder 1">
+            <a:extLst>
+              <a:ext uri="{FF2B5EF4-FFF2-40B4-BE49-F238E27FC236}">
+                <a16:creationId xmlns:a16="http://schemas.microsoft.com/office/drawing/2014/main" id="{1448AABF-008B-0705-8549-BC326A39B7EF}"/>
+              </a:ext>
+            </a:extLst>
+          </p:cNvPr>
+          <p:cNvSpPr>
+            <a:spLocks noGrp="1"/>
+          </p:cNvSpPr>
+          <p:nvPr>
+            <p:ph type="sldNum" sz="quarter" idx="12"/>
+          </p:nvPr>
+        </p:nvSpPr>
+        <p:spPr/>
+        <p:txBody>
+          <a:bodyPr>
+            <a:normAutofit fontScale="92500" lnSpcReduction="10000"/>
+          </a:bodyPr>
+          <a:lstStyle/>
+          <a:p>
+            <a:fld id="{D57F1E4F-1CFF-5643-939E-217C01CDF565}" type="slidenum">
+              <a:rPr lang="en-US" smtClean="0"/>
+              <a:pPr/>
+              <a:t>42</a:t>
             </a:fld>
             <a:endParaRPr lang="en-US" dirty="0"/>
           </a:p>
@@ -21533,7 +23880,7 @@
 </p:sld>
 </file>
 
-<file path=ppt/slides/slide42.xml><?xml version="1.0" encoding="utf-8"?>
+<file path=ppt/slides/slide43.xml><?xml version="1.0" encoding="utf-8"?>
 <p:sld xmlns:a="http://schemas.openxmlformats.org/drawingml/2006/main" xmlns:r="http://schemas.openxmlformats.org/officeDocument/2006/relationships" xmlns:p="http://schemas.openxmlformats.org/presentationml/2006/main" show="0">
   <p:cSld>
     <p:spTree>
@@ -21661,7 +24008,7 @@
             <a:fld id="{D57F1E4F-1CFF-5643-939E-217C01CDF565}" type="slidenum">
               <a:rPr lang="en-US" smtClean="0"/>
               <a:pPr/>
-              <a:t>42</a:t>
+              <a:t>43</a:t>
             </a:fld>
             <a:endParaRPr lang="en-US" dirty="0"/>
           </a:p>
@@ -21680,7 +24027,7 @@
 </p:sld>
 </file>
 
-<file path=ppt/slides/slide43.xml><?xml version="1.0" encoding="utf-8"?>
+<file path=ppt/slides/slide44.xml><?xml version="1.0" encoding="utf-8"?>
 <p:sld xmlns:a="http://schemas.openxmlformats.org/drawingml/2006/main" xmlns:r="http://schemas.openxmlformats.org/officeDocument/2006/relationships" xmlns:p="http://schemas.openxmlformats.org/presentationml/2006/main" show="0">
   <p:cSld>
     <p:spTree>
@@ -21827,7 +24174,7 @@
             <a:fld id="{D57F1E4F-1CFF-5643-939E-217C01CDF565}" type="slidenum">
               <a:rPr lang="en-US" smtClean="0"/>
               <a:pPr/>
-              <a:t>43</a:t>
+              <a:t>44</a:t>
             </a:fld>
             <a:endParaRPr lang="en-US" dirty="0"/>
           </a:p>
@@ -21846,7 +24193,7 @@
 </p:sld>
 </file>
 
-<file path=ppt/slides/slide44.xml><?xml version="1.0" encoding="utf-8"?>
+<file path=ppt/slides/slide45.xml><?xml version="1.0" encoding="utf-8"?>
 <p:sld xmlns:a="http://schemas.openxmlformats.org/drawingml/2006/main" xmlns:r="http://schemas.openxmlformats.org/officeDocument/2006/relationships" xmlns:p="http://schemas.openxmlformats.org/presentationml/2006/main" show="0">
   <p:cSld>
     <p:spTree>
@@ -22835,7 +25182,7 @@
             <a:fld id="{D57F1E4F-1CFF-5643-939E-217C01CDF565}" type="slidenum">
               <a:rPr lang="en-US" smtClean="0"/>
               <a:pPr/>
-              <a:t>44</a:t>
+              <a:t>45</a:t>
             </a:fld>
             <a:endParaRPr lang="en-US" dirty="0"/>
           </a:p>
@@ -22854,7 +25201,7 @@
 </p:sld>
 </file>
 
-<file path=ppt/slides/slide45.xml><?xml version="1.0" encoding="utf-8"?>
+<file path=ppt/slides/slide46.xml><?xml version="1.0" encoding="utf-8"?>
 <p:sld xmlns:a="http://schemas.openxmlformats.org/drawingml/2006/main" xmlns:r="http://schemas.openxmlformats.org/officeDocument/2006/relationships" xmlns:p="http://schemas.openxmlformats.org/presentationml/2006/main" show="0">
   <p:cSld>
     <p:spTree>
@@ -23959,7 +26306,7 @@
             <a:fld id="{D57F1E4F-1CFF-5643-939E-217C01CDF565}" type="slidenum">
               <a:rPr lang="en-US" smtClean="0"/>
               <a:pPr/>
-              <a:t>45</a:t>
+              <a:t>46</a:t>
             </a:fld>
             <a:endParaRPr lang="en-US" dirty="0"/>
           </a:p>
@@ -23978,7 +26325,7 @@
 </p:sld>
 </file>
 
-<file path=ppt/slides/slide46.xml><?xml version="1.0" encoding="utf-8"?>
+<file path=ppt/slides/slide47.xml><?xml version="1.0" encoding="utf-8"?>
 <p:sld xmlns:a="http://schemas.openxmlformats.org/drawingml/2006/main" xmlns:r="http://schemas.openxmlformats.org/officeDocument/2006/relationships" xmlns:p="http://schemas.openxmlformats.org/presentationml/2006/main" show="0">
   <p:cSld>
     <p:spTree>
@@ -25107,7 +27454,7 @@
             <a:fld id="{D57F1E4F-1CFF-5643-939E-217C01CDF565}" type="slidenum">
               <a:rPr lang="en-US" smtClean="0"/>
               <a:pPr/>
-              <a:t>46</a:t>
+              <a:t>47</a:t>
             </a:fld>
             <a:endParaRPr lang="en-US" dirty="0"/>
           </a:p>
@@ -25126,7 +27473,7 @@
 </p:sld>
 </file>
 
-<file path=ppt/slides/slide47.xml><?xml version="1.0" encoding="utf-8"?>
+<file path=ppt/slides/slide48.xml><?xml version="1.0" encoding="utf-8"?>
 <p:sld xmlns:a="http://schemas.openxmlformats.org/drawingml/2006/main" xmlns:r="http://schemas.openxmlformats.org/officeDocument/2006/relationships" xmlns:p="http://schemas.openxmlformats.org/presentationml/2006/main" show="0">
   <p:cSld>
     <p:spTree>
@@ -25311,7 +27658,7 @@
             <a:fld id="{D57F1E4F-1CFF-5643-939E-217C01CDF565}" type="slidenum">
               <a:rPr lang="en-US" smtClean="0"/>
               <a:pPr/>
-              <a:t>47</a:t>
+              <a:t>48</a:t>
             </a:fld>
             <a:endParaRPr lang="en-US" dirty="0"/>
           </a:p>
@@ -25330,7 +27677,7 @@
 </p:sld>
 </file>
 
-<file path=ppt/slides/slide48.xml><?xml version="1.0" encoding="utf-8"?>
+<file path=ppt/slides/slide49.xml><?xml version="1.0" encoding="utf-8"?>
 <p:sld xmlns:a="http://schemas.openxmlformats.org/drawingml/2006/main" xmlns:r="http://schemas.openxmlformats.org/officeDocument/2006/relationships" xmlns:p="http://schemas.openxmlformats.org/presentationml/2006/main" show="0">
   <p:cSld>
     <p:spTree>
@@ -25522,7 +27869,7 @@
             <a:fld id="{D57F1E4F-1CFF-5643-939E-217C01CDF565}" type="slidenum">
               <a:rPr lang="en-US" smtClean="0"/>
               <a:pPr/>
-              <a:t>48</a:t>
+              <a:t>49</a:t>
             </a:fld>
             <a:endParaRPr lang="en-US" dirty="0"/>
           </a:p>
@@ -25532,758 +27879,6 @@
     <p:extLst>
       <p:ext uri="{BB962C8B-B14F-4D97-AF65-F5344CB8AC3E}">
         <p14:creationId xmlns:p14="http://schemas.microsoft.com/office/powerpoint/2010/main" val="4071999724"/>
-      </p:ext>
-    </p:extLst>
-  </p:cSld>
-  <p:clrMapOvr>
-    <a:masterClrMapping/>
-  </p:clrMapOvr>
-</p:sld>
-</file>
-
-<file path=ppt/slides/slide49.xml><?xml version="1.0" encoding="utf-8"?>
-<p:sld xmlns:a="http://schemas.openxmlformats.org/drawingml/2006/main" xmlns:r="http://schemas.openxmlformats.org/officeDocument/2006/relationships" xmlns:p="http://schemas.openxmlformats.org/presentationml/2006/main" show="0">
-  <p:cSld>
-    <p:spTree>
-      <p:nvGrpSpPr>
-        <p:cNvPr id="1" name="">
-          <a:extLst>
-            <a:ext uri="{FF2B5EF4-FFF2-40B4-BE49-F238E27FC236}">
-              <a16:creationId xmlns:a16="http://schemas.microsoft.com/office/drawing/2014/main" id="{8EDB8975-590F-42D4-FC00-54C0DCD56463}"/>
-            </a:ext>
-          </a:extLst>
-        </p:cNvPr>
-        <p:cNvGrpSpPr/>
-        <p:nvPr/>
-      </p:nvGrpSpPr>
-      <p:grpSpPr>
-        <a:xfrm>
-          <a:off x="0" y="0"/>
-          <a:ext cx="0" cy="0"/>
-          <a:chOff x="0" y="0"/>
-          <a:chExt cx="0" cy="0"/>
-        </a:xfrm>
-      </p:grpSpPr>
-      <p:sp>
-        <p:nvSpPr>
-          <p:cNvPr id="2" name="Title 1">
-            <a:extLst>
-              <a:ext uri="{FF2B5EF4-FFF2-40B4-BE49-F238E27FC236}">
-                <a16:creationId xmlns:a16="http://schemas.microsoft.com/office/drawing/2014/main" id="{76F3C308-F2EC-07E5-35C3-D78E39128849}"/>
-              </a:ext>
-            </a:extLst>
-          </p:cNvPr>
-          <p:cNvSpPr>
-            <a:spLocks noGrp="1"/>
-          </p:cNvSpPr>
-          <p:nvPr>
-            <p:ph type="title"/>
-          </p:nvPr>
-        </p:nvSpPr>
-        <p:spPr>
-          <a:xfrm>
-            <a:off x="1261872" y="365760"/>
-            <a:ext cx="9692640" cy="658707"/>
-          </a:xfrm>
-        </p:spPr>
-        <p:txBody>
-          <a:bodyPr>
-            <a:normAutofit fontScale="90000"/>
-          </a:bodyPr>
-          <a:lstStyle/>
-          <a:p>
-            <a:r>
-              <a:rPr lang="en-US" dirty="0"/>
-              <a:t>Two experiments: 2</a:t>
-            </a:r>
-            <a:endParaRPr lang="hu-HU" dirty="0"/>
-          </a:p>
-        </p:txBody>
-      </p:sp>
-      <p:sp>
-        <p:nvSpPr>
-          <p:cNvPr id="3" name="Content Placeholder 2">
-            <a:extLst>
-              <a:ext uri="{FF2B5EF4-FFF2-40B4-BE49-F238E27FC236}">
-                <a16:creationId xmlns:a16="http://schemas.microsoft.com/office/drawing/2014/main" id="{30310A9F-B466-54AE-B946-A529094D3C5A}"/>
-              </a:ext>
-            </a:extLst>
-          </p:cNvPr>
-          <p:cNvSpPr>
-            <a:spLocks noGrp="1"/>
-          </p:cNvSpPr>
-          <p:nvPr>
-            <p:ph idx="4294967295"/>
-          </p:nvPr>
-        </p:nvSpPr>
-        <p:spPr>
-          <a:xfrm>
-            <a:off x="1104293" y="2286000"/>
-            <a:ext cx="8946541" cy="4238154"/>
-          </a:xfrm>
-        </p:spPr>
-        <p:txBody>
-          <a:bodyPr>
-            <a:normAutofit fontScale="77500" lnSpcReduction="20000"/>
-          </a:bodyPr>
-          <a:lstStyle/>
-          <a:p>
-            <a:pPr marL="457200" indent="-457200"/>
-            <a:endParaRPr lang="en-US" dirty="0"/>
-          </a:p>
-          <a:p>
-            <a:pPr marL="457200" indent="-457200"/>
-            <a:endParaRPr lang="en-US" dirty="0"/>
-          </a:p>
-          <a:p>
-            <a:pPr marL="457200" indent="-457200"/>
-            <a:endParaRPr lang="en-US" dirty="0"/>
-          </a:p>
-          <a:p>
-            <a:pPr marL="857250" lvl="1" indent="-457200"/>
-            <a:endParaRPr lang="en-US" dirty="0"/>
-          </a:p>
-          <a:p>
-            <a:pPr marL="857250" lvl="1" indent="-457200"/>
-            <a:endParaRPr lang="en-US" dirty="0"/>
-          </a:p>
-          <a:p>
-            <a:pPr marL="857250" lvl="1" indent="-457200"/>
-            <a:endParaRPr lang="en-US" dirty="0"/>
-          </a:p>
-          <a:p>
-            <a:pPr marL="857250" lvl="1" indent="-457200"/>
-            <a:endParaRPr lang="en-US" dirty="0"/>
-          </a:p>
-          <a:p>
-            <a:pPr marL="457200" indent="-457200">
-              <a:buFont typeface="+mj-lt"/>
-              <a:buAutoNum type="arabicPeriod" startAt="2"/>
-            </a:pPr>
-            <a:r>
-              <a:rPr lang="en-US" dirty="0">
-                <a:solidFill>
-                  <a:schemeClr val="tx1">
-                    <a:lumMod val="75000"/>
-                  </a:schemeClr>
-                </a:solidFill>
-              </a:rPr>
-              <a:t>Verbal directionality and social bias</a:t>
-            </a:r>
-          </a:p>
-          <a:p>
-            <a:pPr marL="685800" lvl="1"/>
-            <a:r>
-              <a:rPr lang="en-US" dirty="0">
-                <a:solidFill>
-                  <a:schemeClr val="tx1">
-                    <a:lumMod val="75000"/>
-                  </a:schemeClr>
-                </a:solidFill>
-              </a:rPr>
-              <a:t>Testing if gender/status/societal bias can change verb directionality </a:t>
-            </a:r>
-          </a:p>
-          <a:p>
-            <a:pPr marL="685800" lvl="1"/>
-            <a:r>
-              <a:rPr lang="en-US" dirty="0">
-                <a:solidFill>
-                  <a:schemeClr val="tx1">
-                    <a:lumMod val="75000"/>
-                  </a:schemeClr>
-                </a:solidFill>
-              </a:rPr>
-              <a:t>2 halves, 3 conditions, 18 items</a:t>
-            </a:r>
-          </a:p>
-          <a:p>
-            <a:pPr marL="400050" lvl="1" indent="0">
-              <a:buNone/>
-            </a:pPr>
-            <a:endParaRPr lang="en-US" dirty="0"/>
-          </a:p>
-          <a:p>
-            <a:pPr marL="400050" lvl="1" indent="0">
-              <a:buNone/>
-            </a:pPr>
-            <a:endParaRPr lang="en-US" dirty="0"/>
-          </a:p>
-        </p:txBody>
-      </p:sp>
-      <p:sp>
-        <p:nvSpPr>
-          <p:cNvPr id="10" name="TextBox 9">
-            <a:extLst>
-              <a:ext uri="{FF2B5EF4-FFF2-40B4-BE49-F238E27FC236}">
-                <a16:creationId xmlns:a16="http://schemas.microsoft.com/office/drawing/2014/main" id="{169BE7F1-71DA-A390-E953-14BACEA0F235}"/>
-              </a:ext>
-            </a:extLst>
-          </p:cNvPr>
-          <p:cNvSpPr txBox="1"/>
-          <p:nvPr/>
-        </p:nvSpPr>
-        <p:spPr>
-          <a:xfrm>
-            <a:off x="1764792" y="1853248"/>
-            <a:ext cx="10011188" cy="3416320"/>
-          </a:xfrm>
-          <a:prstGeom prst="rect">
-            <a:avLst/>
-          </a:prstGeom>
-          <a:noFill/>
-        </p:spPr>
-        <p:txBody>
-          <a:bodyPr wrap="square">
-            <a:spAutoFit/>
-          </a:bodyPr>
-          <a:lstStyle/>
-          <a:p>
-            <a:r>
-              <a:rPr lang="hu-HU" b="1" dirty="0"/>
-              <a:t>A szakács	említette	hogy	a dolgozó	kérkedett		a főzőtudásával.</a:t>
-            </a:r>
-          </a:p>
-          <a:p>
-            <a:r>
-              <a:rPr lang="hu-HU" dirty="0" err="1"/>
-              <a:t>the</a:t>
-            </a:r>
-            <a:r>
-              <a:rPr lang="hu-HU" dirty="0"/>
-              <a:t> chef	</a:t>
-            </a:r>
-            <a:r>
-              <a:rPr lang="hu-HU" dirty="0" err="1"/>
-              <a:t>mentioned</a:t>
-            </a:r>
-            <a:r>
-              <a:rPr lang="hu-HU" dirty="0"/>
-              <a:t>	</a:t>
-            </a:r>
-            <a:r>
-              <a:rPr lang="hu-HU" dirty="0" err="1"/>
-              <a:t>that</a:t>
-            </a:r>
-            <a:r>
-              <a:rPr lang="hu-HU" dirty="0"/>
-              <a:t>	</a:t>
-            </a:r>
-            <a:r>
-              <a:rPr lang="en-US" dirty="0"/>
-              <a:t>	</a:t>
-            </a:r>
-            <a:r>
-              <a:rPr lang="hu-HU" dirty="0" err="1"/>
-              <a:t>the</a:t>
-            </a:r>
-            <a:r>
-              <a:rPr lang="hu-HU" dirty="0"/>
-              <a:t> </a:t>
-            </a:r>
-            <a:r>
-              <a:rPr lang="hu-HU" dirty="0" err="1"/>
-              <a:t>worker</a:t>
-            </a:r>
-            <a:r>
-              <a:rPr lang="hu-HU" dirty="0"/>
-              <a:t>	</a:t>
-            </a:r>
-            <a:r>
-              <a:rPr lang="hu-HU" dirty="0" err="1"/>
-              <a:t>boasted</a:t>
-            </a:r>
-            <a:r>
-              <a:rPr lang="hu-HU" dirty="0"/>
-              <a:t>		</a:t>
-            </a:r>
-            <a:r>
-              <a:rPr lang="hu-HU" dirty="0" err="1"/>
-              <a:t>the</a:t>
-            </a:r>
-            <a:r>
-              <a:rPr lang="hu-HU" dirty="0"/>
-              <a:t> </a:t>
-            </a:r>
-            <a:r>
-              <a:rPr lang="hu-HU" dirty="0" err="1"/>
-              <a:t>cooking</a:t>
-            </a:r>
-            <a:r>
-              <a:rPr lang="hu-HU" dirty="0"/>
-              <a:t> skill-3SG-INS</a:t>
-            </a:r>
-          </a:p>
-          <a:p>
-            <a:r>
-              <a:rPr lang="hu-HU" i="1" dirty="0"/>
-              <a:t>The chef </a:t>
-            </a:r>
-            <a:r>
-              <a:rPr lang="hu-HU" i="1" dirty="0" err="1"/>
-              <a:t>mentioned</a:t>
-            </a:r>
-            <a:r>
-              <a:rPr lang="hu-HU" i="1" dirty="0"/>
-              <a:t> </a:t>
-            </a:r>
-            <a:r>
-              <a:rPr lang="hu-HU" i="1" dirty="0" err="1"/>
-              <a:t>that</a:t>
-            </a:r>
-            <a:r>
-              <a:rPr lang="hu-HU" i="1" dirty="0"/>
-              <a:t> </a:t>
-            </a:r>
-            <a:r>
-              <a:rPr lang="hu-HU" i="1" dirty="0" err="1"/>
-              <a:t>the</a:t>
-            </a:r>
-            <a:r>
-              <a:rPr lang="hu-HU" i="1" dirty="0"/>
-              <a:t> </a:t>
-            </a:r>
-            <a:r>
-              <a:rPr lang="hu-HU" i="1" dirty="0" err="1"/>
-              <a:t>worker</a:t>
-            </a:r>
-            <a:r>
-              <a:rPr lang="hu-HU" i="1" dirty="0"/>
-              <a:t> </a:t>
-            </a:r>
-            <a:r>
-              <a:rPr lang="hu-HU" i="1" dirty="0" err="1"/>
-              <a:t>boasted</a:t>
-            </a:r>
-            <a:r>
-              <a:rPr lang="hu-HU" i="1" dirty="0"/>
-              <a:t> </a:t>
-            </a:r>
-            <a:r>
-              <a:rPr lang="hu-HU" i="1" dirty="0" err="1"/>
-              <a:t>about</a:t>
-            </a:r>
-            <a:r>
-              <a:rPr lang="hu-HU" i="1" dirty="0"/>
-              <a:t>  </a:t>
-            </a:r>
-            <a:r>
-              <a:rPr lang="hu-HU" i="1" dirty="0" err="1"/>
-              <a:t>his</a:t>
-            </a:r>
-            <a:r>
-              <a:rPr lang="hu-HU" i="1" dirty="0"/>
-              <a:t>/</a:t>
-            </a:r>
-            <a:r>
-              <a:rPr lang="hu-HU" i="1" dirty="0" err="1"/>
-              <a:t>her</a:t>
-            </a:r>
-            <a:r>
-              <a:rPr lang="hu-HU" i="1" dirty="0"/>
-              <a:t> </a:t>
-            </a:r>
-            <a:r>
-              <a:rPr lang="hu-HU" i="1" dirty="0" err="1"/>
-              <a:t>cooking</a:t>
-            </a:r>
-            <a:r>
-              <a:rPr lang="hu-HU" i="1" dirty="0"/>
-              <a:t> </a:t>
-            </a:r>
-            <a:r>
-              <a:rPr lang="hu-HU" i="1" dirty="0" err="1"/>
-              <a:t>skills</a:t>
-            </a:r>
-            <a:r>
-              <a:rPr lang="hu-HU" i="1" dirty="0"/>
-              <a:t>.	</a:t>
-            </a:r>
-            <a:r>
-              <a:rPr lang="hu-HU" dirty="0"/>
-              <a:t>		</a:t>
-            </a:r>
-            <a:endParaRPr lang="en-US" dirty="0"/>
-          </a:p>
-          <a:p>
-            <a:r>
-              <a:rPr lang="hu-HU" dirty="0"/>
-              <a:t>			</a:t>
-            </a:r>
-          </a:p>
-          <a:p>
-            <a:r>
-              <a:rPr lang="hu-HU" b="1" dirty="0"/>
-              <a:t>A szakács	említette	hogy	a dolgozó	megdicsérte	a főzőtudását.</a:t>
-            </a:r>
-          </a:p>
-          <a:p>
-            <a:r>
-              <a:rPr lang="hu-HU" dirty="0" err="1"/>
-              <a:t>the</a:t>
-            </a:r>
-            <a:r>
-              <a:rPr lang="hu-HU" dirty="0"/>
-              <a:t> chef	</a:t>
-            </a:r>
-            <a:r>
-              <a:rPr lang="hu-HU" dirty="0" err="1"/>
-              <a:t>mentioned</a:t>
-            </a:r>
-            <a:r>
-              <a:rPr lang="hu-HU" dirty="0"/>
-              <a:t>	</a:t>
-            </a:r>
-            <a:r>
-              <a:rPr lang="hu-HU" dirty="0" err="1"/>
-              <a:t>that</a:t>
-            </a:r>
-            <a:r>
-              <a:rPr lang="hu-HU" dirty="0"/>
-              <a:t>	</a:t>
-            </a:r>
-            <a:r>
-              <a:rPr lang="en-US" dirty="0"/>
-              <a:t>	</a:t>
-            </a:r>
-            <a:r>
-              <a:rPr lang="hu-HU" dirty="0" err="1"/>
-              <a:t>the</a:t>
-            </a:r>
-            <a:r>
-              <a:rPr lang="hu-HU" dirty="0"/>
-              <a:t> </a:t>
-            </a:r>
-            <a:r>
-              <a:rPr lang="hu-HU" dirty="0" err="1"/>
-              <a:t>worker</a:t>
-            </a:r>
-            <a:r>
-              <a:rPr lang="hu-HU" dirty="0"/>
-              <a:t>	</a:t>
-            </a:r>
-            <a:r>
-              <a:rPr lang="hu-HU" dirty="0" err="1"/>
-              <a:t>praised</a:t>
-            </a:r>
-            <a:r>
-              <a:rPr lang="hu-HU" dirty="0"/>
-              <a:t>	</a:t>
-            </a:r>
-            <a:r>
-              <a:rPr lang="en-US" dirty="0"/>
-              <a:t>		</a:t>
-            </a:r>
-            <a:r>
-              <a:rPr lang="hu-HU" dirty="0" err="1"/>
-              <a:t>the</a:t>
-            </a:r>
-            <a:r>
-              <a:rPr lang="hu-HU" dirty="0"/>
-              <a:t> </a:t>
-            </a:r>
-            <a:r>
-              <a:rPr lang="hu-HU" dirty="0" err="1"/>
-              <a:t>cooking</a:t>
-            </a:r>
-            <a:r>
-              <a:rPr lang="hu-HU" dirty="0"/>
-              <a:t> skill-3SG-DAT</a:t>
-            </a:r>
-          </a:p>
-          <a:p>
-            <a:r>
-              <a:rPr lang="hu-HU" i="1" dirty="0"/>
-              <a:t>The chef </a:t>
-            </a:r>
-            <a:r>
-              <a:rPr lang="hu-HU" i="1" dirty="0" err="1"/>
-              <a:t>mentioned</a:t>
-            </a:r>
-            <a:r>
-              <a:rPr lang="hu-HU" i="1" dirty="0"/>
-              <a:t> </a:t>
-            </a:r>
-            <a:r>
-              <a:rPr lang="hu-HU" i="1" dirty="0" err="1"/>
-              <a:t>that</a:t>
-            </a:r>
-            <a:r>
-              <a:rPr lang="hu-HU" i="1" dirty="0"/>
-              <a:t> </a:t>
-            </a:r>
-            <a:r>
-              <a:rPr lang="hu-HU" i="1" dirty="0" err="1"/>
-              <a:t>the</a:t>
-            </a:r>
-            <a:r>
-              <a:rPr lang="hu-HU" i="1" dirty="0"/>
-              <a:t> </a:t>
-            </a:r>
-            <a:r>
-              <a:rPr lang="hu-HU" i="1" dirty="0" err="1"/>
-              <a:t>worker</a:t>
-            </a:r>
-            <a:r>
-              <a:rPr lang="hu-HU" i="1" dirty="0"/>
-              <a:t> </a:t>
-            </a:r>
-            <a:r>
-              <a:rPr lang="hu-HU" i="1" dirty="0" err="1"/>
-              <a:t>praised</a:t>
-            </a:r>
-            <a:r>
-              <a:rPr lang="hu-HU" i="1" dirty="0"/>
-              <a:t> </a:t>
-            </a:r>
-            <a:r>
-              <a:rPr lang="hu-HU" i="1" dirty="0" err="1"/>
-              <a:t>his</a:t>
-            </a:r>
-            <a:r>
-              <a:rPr lang="hu-HU" i="1" dirty="0"/>
-              <a:t>/</a:t>
-            </a:r>
-            <a:r>
-              <a:rPr lang="hu-HU" i="1" dirty="0" err="1"/>
-              <a:t>her</a:t>
-            </a:r>
-            <a:r>
-              <a:rPr lang="hu-HU" i="1" dirty="0"/>
-              <a:t> </a:t>
-            </a:r>
-            <a:r>
-              <a:rPr lang="hu-HU" i="1" dirty="0" err="1"/>
-              <a:t>cooking</a:t>
-            </a:r>
-            <a:r>
-              <a:rPr lang="hu-HU" i="1" dirty="0"/>
-              <a:t> </a:t>
-            </a:r>
-            <a:r>
-              <a:rPr lang="hu-HU" i="1" dirty="0" err="1"/>
-              <a:t>skills</a:t>
-            </a:r>
-            <a:r>
-              <a:rPr lang="hu-HU" i="1" dirty="0"/>
-              <a:t>.	</a:t>
-            </a:r>
-            <a:r>
-              <a:rPr lang="hu-HU" dirty="0"/>
-              <a:t>				</a:t>
-            </a:r>
-            <a:endParaRPr lang="en-US" dirty="0"/>
-          </a:p>
-          <a:p>
-            <a:r>
-              <a:rPr lang="hu-HU" dirty="0"/>
-              <a:t>	</a:t>
-            </a:r>
-          </a:p>
-          <a:p>
-            <a:r>
-              <a:rPr lang="hu-HU" b="1" dirty="0"/>
-              <a:t>A dolgozó	említette	hogy	a szakács	kérkedett		a főzőtudásával.</a:t>
-            </a:r>
-          </a:p>
-          <a:p>
-            <a:r>
-              <a:rPr lang="hu-HU" dirty="0" err="1"/>
-              <a:t>the</a:t>
-            </a:r>
-            <a:r>
-              <a:rPr lang="hu-HU" dirty="0"/>
-              <a:t> </a:t>
-            </a:r>
-            <a:r>
-              <a:rPr lang="hu-HU" dirty="0" err="1"/>
-              <a:t>worker</a:t>
-            </a:r>
-            <a:r>
-              <a:rPr lang="hu-HU" dirty="0"/>
-              <a:t>	</a:t>
-            </a:r>
-            <a:r>
-              <a:rPr lang="hu-HU" dirty="0" err="1"/>
-              <a:t>mentioned</a:t>
-            </a:r>
-            <a:r>
-              <a:rPr lang="hu-HU" dirty="0"/>
-              <a:t>	</a:t>
-            </a:r>
-            <a:r>
-              <a:rPr lang="hu-HU" dirty="0" err="1"/>
-              <a:t>that</a:t>
-            </a:r>
-            <a:r>
-              <a:rPr lang="hu-HU" dirty="0"/>
-              <a:t>	</a:t>
-            </a:r>
-            <a:r>
-              <a:rPr lang="en-US" dirty="0"/>
-              <a:t>	</a:t>
-            </a:r>
-            <a:r>
-              <a:rPr lang="hu-HU" dirty="0" err="1"/>
-              <a:t>the</a:t>
-            </a:r>
-            <a:r>
-              <a:rPr lang="hu-HU" dirty="0"/>
-              <a:t> chef	</a:t>
-            </a:r>
-            <a:r>
-              <a:rPr lang="hu-HU" dirty="0" err="1"/>
-              <a:t>boasted</a:t>
-            </a:r>
-            <a:r>
-              <a:rPr lang="hu-HU" dirty="0"/>
-              <a:t>		</a:t>
-            </a:r>
-            <a:r>
-              <a:rPr lang="hu-HU" dirty="0" err="1"/>
-              <a:t>the</a:t>
-            </a:r>
-            <a:r>
-              <a:rPr lang="hu-HU" dirty="0"/>
-              <a:t> </a:t>
-            </a:r>
-            <a:r>
-              <a:rPr lang="hu-HU" dirty="0" err="1"/>
-              <a:t>cooking</a:t>
-            </a:r>
-            <a:r>
-              <a:rPr lang="hu-HU" dirty="0"/>
-              <a:t> skill-3SG-INS</a:t>
-            </a:r>
-          </a:p>
-          <a:p>
-            <a:r>
-              <a:rPr lang="hu-HU" i="1" dirty="0"/>
-              <a:t>The </a:t>
-            </a:r>
-            <a:r>
-              <a:rPr lang="hu-HU" i="1" dirty="0" err="1"/>
-              <a:t>worker</a:t>
-            </a:r>
-            <a:r>
-              <a:rPr lang="hu-HU" i="1" dirty="0"/>
-              <a:t> </a:t>
-            </a:r>
-            <a:r>
-              <a:rPr lang="hu-HU" i="1" dirty="0" err="1"/>
-              <a:t>mentioned</a:t>
-            </a:r>
-            <a:r>
-              <a:rPr lang="hu-HU" i="1" dirty="0"/>
-              <a:t> </a:t>
-            </a:r>
-            <a:r>
-              <a:rPr lang="hu-HU" i="1" dirty="0" err="1"/>
-              <a:t>that</a:t>
-            </a:r>
-            <a:r>
-              <a:rPr lang="hu-HU" i="1" dirty="0"/>
-              <a:t> </a:t>
-            </a:r>
-            <a:r>
-              <a:rPr lang="hu-HU" i="1" dirty="0" err="1"/>
-              <a:t>the</a:t>
-            </a:r>
-            <a:r>
-              <a:rPr lang="hu-HU" i="1" dirty="0"/>
-              <a:t> chef </a:t>
-            </a:r>
-            <a:r>
-              <a:rPr lang="hu-HU" i="1" dirty="0" err="1"/>
-              <a:t>boasted</a:t>
-            </a:r>
-            <a:r>
-              <a:rPr lang="hu-HU" i="1" dirty="0"/>
-              <a:t> </a:t>
-            </a:r>
-            <a:r>
-              <a:rPr lang="hu-HU" i="1" dirty="0" err="1"/>
-              <a:t>about</a:t>
-            </a:r>
-            <a:r>
-              <a:rPr lang="hu-HU" i="1" dirty="0"/>
-              <a:t>  </a:t>
-            </a:r>
-            <a:r>
-              <a:rPr lang="hu-HU" i="1" dirty="0" err="1"/>
-              <a:t>his</a:t>
-            </a:r>
-            <a:r>
-              <a:rPr lang="hu-HU" i="1" dirty="0"/>
-              <a:t>/</a:t>
-            </a:r>
-            <a:r>
-              <a:rPr lang="hu-HU" i="1" dirty="0" err="1"/>
-              <a:t>her</a:t>
-            </a:r>
-            <a:r>
-              <a:rPr lang="hu-HU" i="1" dirty="0"/>
-              <a:t> </a:t>
-            </a:r>
-            <a:r>
-              <a:rPr lang="hu-HU" i="1" dirty="0" err="1"/>
-              <a:t>cooking</a:t>
-            </a:r>
-            <a:r>
-              <a:rPr lang="hu-HU" i="1" dirty="0"/>
-              <a:t> </a:t>
-            </a:r>
-            <a:r>
-              <a:rPr lang="hu-HU" i="1" dirty="0" err="1"/>
-              <a:t>skills</a:t>
-            </a:r>
-            <a:r>
-              <a:rPr lang="hu-HU" i="1" dirty="0"/>
-              <a:t>.		</a:t>
-            </a:r>
-            <a:r>
-              <a:rPr lang="hu-HU" dirty="0"/>
-              <a:t>				</a:t>
-            </a:r>
-          </a:p>
-        </p:txBody>
-      </p:sp>
-      <p:sp>
-        <p:nvSpPr>
-          <p:cNvPr id="4" name="Slide Number Placeholder 3">
-            <a:extLst>
-              <a:ext uri="{FF2B5EF4-FFF2-40B4-BE49-F238E27FC236}">
-                <a16:creationId xmlns:a16="http://schemas.microsoft.com/office/drawing/2014/main" id="{BFA423BD-588B-24B8-6D5A-F918ED2B3442}"/>
-              </a:ext>
-            </a:extLst>
-          </p:cNvPr>
-          <p:cNvSpPr>
-            <a:spLocks noGrp="1"/>
-          </p:cNvSpPr>
-          <p:nvPr>
-            <p:ph type="sldNum" sz="quarter" idx="12"/>
-          </p:nvPr>
-        </p:nvSpPr>
-        <p:spPr/>
-        <p:txBody>
-          <a:bodyPr>
-            <a:normAutofit fontScale="92500" lnSpcReduction="10000"/>
-          </a:bodyPr>
-          <a:lstStyle/>
-          <a:p>
-            <a:fld id="{D57F1E4F-1CFF-5643-939E-217C01CDF565}" type="slidenum">
-              <a:rPr lang="en-US" smtClean="0"/>
-              <a:pPr/>
-              <a:t>49</a:t>
-            </a:fld>
-            <a:endParaRPr lang="en-US" dirty="0"/>
-          </a:p>
-        </p:txBody>
-      </p:sp>
-    </p:spTree>
-    <p:extLst>
-      <p:ext uri="{BB962C8B-B14F-4D97-AF65-F5344CB8AC3E}">
-        <p14:creationId xmlns:p14="http://schemas.microsoft.com/office/powerpoint/2010/main" val="462358478"/>
       </p:ext>
     </p:extLst>
   </p:cSld>
@@ -26672,6 +28267,758 @@
         <p:cNvPr id="1" name="">
           <a:extLst>
             <a:ext uri="{FF2B5EF4-FFF2-40B4-BE49-F238E27FC236}">
+              <a16:creationId xmlns:a16="http://schemas.microsoft.com/office/drawing/2014/main" id="{8EDB8975-590F-42D4-FC00-54C0DCD56463}"/>
+            </a:ext>
+          </a:extLst>
+        </p:cNvPr>
+        <p:cNvGrpSpPr/>
+        <p:nvPr/>
+      </p:nvGrpSpPr>
+      <p:grpSpPr>
+        <a:xfrm>
+          <a:off x="0" y="0"/>
+          <a:ext cx="0" cy="0"/>
+          <a:chOff x="0" y="0"/>
+          <a:chExt cx="0" cy="0"/>
+        </a:xfrm>
+      </p:grpSpPr>
+      <p:sp>
+        <p:nvSpPr>
+          <p:cNvPr id="2" name="Title 1">
+            <a:extLst>
+              <a:ext uri="{FF2B5EF4-FFF2-40B4-BE49-F238E27FC236}">
+                <a16:creationId xmlns:a16="http://schemas.microsoft.com/office/drawing/2014/main" id="{76F3C308-F2EC-07E5-35C3-D78E39128849}"/>
+              </a:ext>
+            </a:extLst>
+          </p:cNvPr>
+          <p:cNvSpPr>
+            <a:spLocks noGrp="1"/>
+          </p:cNvSpPr>
+          <p:nvPr>
+            <p:ph type="title"/>
+          </p:nvPr>
+        </p:nvSpPr>
+        <p:spPr>
+          <a:xfrm>
+            <a:off x="1261872" y="365760"/>
+            <a:ext cx="9692640" cy="658707"/>
+          </a:xfrm>
+        </p:spPr>
+        <p:txBody>
+          <a:bodyPr>
+            <a:normAutofit fontScale="90000"/>
+          </a:bodyPr>
+          <a:lstStyle/>
+          <a:p>
+            <a:r>
+              <a:rPr lang="en-US" dirty="0"/>
+              <a:t>Two experiments: 2</a:t>
+            </a:r>
+            <a:endParaRPr lang="hu-HU" dirty="0"/>
+          </a:p>
+        </p:txBody>
+      </p:sp>
+      <p:sp>
+        <p:nvSpPr>
+          <p:cNvPr id="3" name="Content Placeholder 2">
+            <a:extLst>
+              <a:ext uri="{FF2B5EF4-FFF2-40B4-BE49-F238E27FC236}">
+                <a16:creationId xmlns:a16="http://schemas.microsoft.com/office/drawing/2014/main" id="{30310A9F-B466-54AE-B946-A529094D3C5A}"/>
+              </a:ext>
+            </a:extLst>
+          </p:cNvPr>
+          <p:cNvSpPr>
+            <a:spLocks noGrp="1"/>
+          </p:cNvSpPr>
+          <p:nvPr>
+            <p:ph idx="4294967295"/>
+          </p:nvPr>
+        </p:nvSpPr>
+        <p:spPr>
+          <a:xfrm>
+            <a:off x="1104293" y="2286000"/>
+            <a:ext cx="8946541" cy="4238154"/>
+          </a:xfrm>
+        </p:spPr>
+        <p:txBody>
+          <a:bodyPr>
+            <a:normAutofit fontScale="77500" lnSpcReduction="20000"/>
+          </a:bodyPr>
+          <a:lstStyle/>
+          <a:p>
+            <a:pPr marL="457200" indent="-457200"/>
+            <a:endParaRPr lang="en-US" dirty="0"/>
+          </a:p>
+          <a:p>
+            <a:pPr marL="457200" indent="-457200"/>
+            <a:endParaRPr lang="en-US" dirty="0"/>
+          </a:p>
+          <a:p>
+            <a:pPr marL="457200" indent="-457200"/>
+            <a:endParaRPr lang="en-US" dirty="0"/>
+          </a:p>
+          <a:p>
+            <a:pPr marL="857250" lvl="1" indent="-457200"/>
+            <a:endParaRPr lang="en-US" dirty="0"/>
+          </a:p>
+          <a:p>
+            <a:pPr marL="857250" lvl="1" indent="-457200"/>
+            <a:endParaRPr lang="en-US" dirty="0"/>
+          </a:p>
+          <a:p>
+            <a:pPr marL="857250" lvl="1" indent="-457200"/>
+            <a:endParaRPr lang="en-US" dirty="0"/>
+          </a:p>
+          <a:p>
+            <a:pPr marL="857250" lvl="1" indent="-457200"/>
+            <a:endParaRPr lang="en-US" dirty="0"/>
+          </a:p>
+          <a:p>
+            <a:pPr marL="457200" indent="-457200">
+              <a:buFont typeface="+mj-lt"/>
+              <a:buAutoNum type="arabicPeriod" startAt="2"/>
+            </a:pPr>
+            <a:r>
+              <a:rPr lang="en-US" dirty="0">
+                <a:solidFill>
+                  <a:schemeClr val="tx1">
+                    <a:lumMod val="75000"/>
+                  </a:schemeClr>
+                </a:solidFill>
+              </a:rPr>
+              <a:t>Verbal directionality and social bias</a:t>
+            </a:r>
+          </a:p>
+          <a:p>
+            <a:pPr marL="685800" lvl="1"/>
+            <a:r>
+              <a:rPr lang="en-US" dirty="0">
+                <a:solidFill>
+                  <a:schemeClr val="tx1">
+                    <a:lumMod val="75000"/>
+                  </a:schemeClr>
+                </a:solidFill>
+              </a:rPr>
+              <a:t>Testing if gender/status/societal bias can change verb directionality </a:t>
+            </a:r>
+          </a:p>
+          <a:p>
+            <a:pPr marL="685800" lvl="1"/>
+            <a:r>
+              <a:rPr lang="en-US" dirty="0">
+                <a:solidFill>
+                  <a:schemeClr val="tx1">
+                    <a:lumMod val="75000"/>
+                  </a:schemeClr>
+                </a:solidFill>
+              </a:rPr>
+              <a:t>2 halves, 3 conditions, 18 items</a:t>
+            </a:r>
+          </a:p>
+          <a:p>
+            <a:pPr marL="400050" lvl="1" indent="0">
+              <a:buNone/>
+            </a:pPr>
+            <a:endParaRPr lang="en-US" dirty="0"/>
+          </a:p>
+          <a:p>
+            <a:pPr marL="400050" lvl="1" indent="0">
+              <a:buNone/>
+            </a:pPr>
+            <a:endParaRPr lang="en-US" dirty="0"/>
+          </a:p>
+        </p:txBody>
+      </p:sp>
+      <p:sp>
+        <p:nvSpPr>
+          <p:cNvPr id="10" name="TextBox 9">
+            <a:extLst>
+              <a:ext uri="{FF2B5EF4-FFF2-40B4-BE49-F238E27FC236}">
+                <a16:creationId xmlns:a16="http://schemas.microsoft.com/office/drawing/2014/main" id="{169BE7F1-71DA-A390-E953-14BACEA0F235}"/>
+              </a:ext>
+            </a:extLst>
+          </p:cNvPr>
+          <p:cNvSpPr txBox="1"/>
+          <p:nvPr/>
+        </p:nvSpPr>
+        <p:spPr>
+          <a:xfrm>
+            <a:off x="1764792" y="1853248"/>
+            <a:ext cx="10011188" cy="3416320"/>
+          </a:xfrm>
+          <a:prstGeom prst="rect">
+            <a:avLst/>
+          </a:prstGeom>
+          <a:noFill/>
+        </p:spPr>
+        <p:txBody>
+          <a:bodyPr wrap="square">
+            <a:spAutoFit/>
+          </a:bodyPr>
+          <a:lstStyle/>
+          <a:p>
+            <a:r>
+              <a:rPr lang="hu-HU" b="1" dirty="0"/>
+              <a:t>A szakács	említette	hogy	a dolgozó	kérkedett		a főzőtudásával.</a:t>
+            </a:r>
+          </a:p>
+          <a:p>
+            <a:r>
+              <a:rPr lang="hu-HU" dirty="0" err="1"/>
+              <a:t>the</a:t>
+            </a:r>
+            <a:r>
+              <a:rPr lang="hu-HU" dirty="0"/>
+              <a:t> chef	</a:t>
+            </a:r>
+            <a:r>
+              <a:rPr lang="hu-HU" dirty="0" err="1"/>
+              <a:t>mentioned</a:t>
+            </a:r>
+            <a:r>
+              <a:rPr lang="hu-HU" dirty="0"/>
+              <a:t>	</a:t>
+            </a:r>
+            <a:r>
+              <a:rPr lang="hu-HU" dirty="0" err="1"/>
+              <a:t>that</a:t>
+            </a:r>
+            <a:r>
+              <a:rPr lang="hu-HU" dirty="0"/>
+              <a:t>	</a:t>
+            </a:r>
+            <a:r>
+              <a:rPr lang="en-US" dirty="0"/>
+              <a:t>	</a:t>
+            </a:r>
+            <a:r>
+              <a:rPr lang="hu-HU" dirty="0" err="1"/>
+              <a:t>the</a:t>
+            </a:r>
+            <a:r>
+              <a:rPr lang="hu-HU" dirty="0"/>
+              <a:t> </a:t>
+            </a:r>
+            <a:r>
+              <a:rPr lang="hu-HU" dirty="0" err="1"/>
+              <a:t>worker</a:t>
+            </a:r>
+            <a:r>
+              <a:rPr lang="hu-HU" dirty="0"/>
+              <a:t>	</a:t>
+            </a:r>
+            <a:r>
+              <a:rPr lang="hu-HU" dirty="0" err="1"/>
+              <a:t>boasted</a:t>
+            </a:r>
+            <a:r>
+              <a:rPr lang="hu-HU" dirty="0"/>
+              <a:t>		</a:t>
+            </a:r>
+            <a:r>
+              <a:rPr lang="hu-HU" dirty="0" err="1"/>
+              <a:t>the</a:t>
+            </a:r>
+            <a:r>
+              <a:rPr lang="hu-HU" dirty="0"/>
+              <a:t> </a:t>
+            </a:r>
+            <a:r>
+              <a:rPr lang="hu-HU" dirty="0" err="1"/>
+              <a:t>cooking</a:t>
+            </a:r>
+            <a:r>
+              <a:rPr lang="hu-HU" dirty="0"/>
+              <a:t> skill-3SG-INS</a:t>
+            </a:r>
+          </a:p>
+          <a:p>
+            <a:r>
+              <a:rPr lang="hu-HU" i="1" dirty="0"/>
+              <a:t>The chef </a:t>
+            </a:r>
+            <a:r>
+              <a:rPr lang="hu-HU" i="1" dirty="0" err="1"/>
+              <a:t>mentioned</a:t>
+            </a:r>
+            <a:r>
+              <a:rPr lang="hu-HU" i="1" dirty="0"/>
+              <a:t> </a:t>
+            </a:r>
+            <a:r>
+              <a:rPr lang="hu-HU" i="1" dirty="0" err="1"/>
+              <a:t>that</a:t>
+            </a:r>
+            <a:r>
+              <a:rPr lang="hu-HU" i="1" dirty="0"/>
+              <a:t> </a:t>
+            </a:r>
+            <a:r>
+              <a:rPr lang="hu-HU" i="1" dirty="0" err="1"/>
+              <a:t>the</a:t>
+            </a:r>
+            <a:r>
+              <a:rPr lang="hu-HU" i="1" dirty="0"/>
+              <a:t> </a:t>
+            </a:r>
+            <a:r>
+              <a:rPr lang="hu-HU" i="1" dirty="0" err="1"/>
+              <a:t>worker</a:t>
+            </a:r>
+            <a:r>
+              <a:rPr lang="hu-HU" i="1" dirty="0"/>
+              <a:t> </a:t>
+            </a:r>
+            <a:r>
+              <a:rPr lang="hu-HU" i="1" dirty="0" err="1"/>
+              <a:t>boasted</a:t>
+            </a:r>
+            <a:r>
+              <a:rPr lang="hu-HU" i="1" dirty="0"/>
+              <a:t> </a:t>
+            </a:r>
+            <a:r>
+              <a:rPr lang="hu-HU" i="1" dirty="0" err="1"/>
+              <a:t>about</a:t>
+            </a:r>
+            <a:r>
+              <a:rPr lang="hu-HU" i="1" dirty="0"/>
+              <a:t>  </a:t>
+            </a:r>
+            <a:r>
+              <a:rPr lang="hu-HU" i="1" dirty="0" err="1"/>
+              <a:t>his</a:t>
+            </a:r>
+            <a:r>
+              <a:rPr lang="hu-HU" i="1" dirty="0"/>
+              <a:t>/</a:t>
+            </a:r>
+            <a:r>
+              <a:rPr lang="hu-HU" i="1" dirty="0" err="1"/>
+              <a:t>her</a:t>
+            </a:r>
+            <a:r>
+              <a:rPr lang="hu-HU" i="1" dirty="0"/>
+              <a:t> </a:t>
+            </a:r>
+            <a:r>
+              <a:rPr lang="hu-HU" i="1" dirty="0" err="1"/>
+              <a:t>cooking</a:t>
+            </a:r>
+            <a:r>
+              <a:rPr lang="hu-HU" i="1" dirty="0"/>
+              <a:t> </a:t>
+            </a:r>
+            <a:r>
+              <a:rPr lang="hu-HU" i="1" dirty="0" err="1"/>
+              <a:t>skills</a:t>
+            </a:r>
+            <a:r>
+              <a:rPr lang="hu-HU" i="1" dirty="0"/>
+              <a:t>.	</a:t>
+            </a:r>
+            <a:r>
+              <a:rPr lang="hu-HU" dirty="0"/>
+              <a:t>		</a:t>
+            </a:r>
+            <a:endParaRPr lang="en-US" dirty="0"/>
+          </a:p>
+          <a:p>
+            <a:r>
+              <a:rPr lang="hu-HU" dirty="0"/>
+              <a:t>			</a:t>
+            </a:r>
+          </a:p>
+          <a:p>
+            <a:r>
+              <a:rPr lang="hu-HU" b="1" dirty="0"/>
+              <a:t>A szakács	említette	hogy	a dolgozó	megdicsérte	a főzőtudását.</a:t>
+            </a:r>
+          </a:p>
+          <a:p>
+            <a:r>
+              <a:rPr lang="hu-HU" dirty="0" err="1"/>
+              <a:t>the</a:t>
+            </a:r>
+            <a:r>
+              <a:rPr lang="hu-HU" dirty="0"/>
+              <a:t> chef	</a:t>
+            </a:r>
+            <a:r>
+              <a:rPr lang="hu-HU" dirty="0" err="1"/>
+              <a:t>mentioned</a:t>
+            </a:r>
+            <a:r>
+              <a:rPr lang="hu-HU" dirty="0"/>
+              <a:t>	</a:t>
+            </a:r>
+            <a:r>
+              <a:rPr lang="hu-HU" dirty="0" err="1"/>
+              <a:t>that</a:t>
+            </a:r>
+            <a:r>
+              <a:rPr lang="hu-HU" dirty="0"/>
+              <a:t>	</a:t>
+            </a:r>
+            <a:r>
+              <a:rPr lang="en-US" dirty="0"/>
+              <a:t>	</a:t>
+            </a:r>
+            <a:r>
+              <a:rPr lang="hu-HU" dirty="0" err="1"/>
+              <a:t>the</a:t>
+            </a:r>
+            <a:r>
+              <a:rPr lang="hu-HU" dirty="0"/>
+              <a:t> </a:t>
+            </a:r>
+            <a:r>
+              <a:rPr lang="hu-HU" dirty="0" err="1"/>
+              <a:t>worker</a:t>
+            </a:r>
+            <a:r>
+              <a:rPr lang="hu-HU" dirty="0"/>
+              <a:t>	</a:t>
+            </a:r>
+            <a:r>
+              <a:rPr lang="hu-HU" dirty="0" err="1"/>
+              <a:t>praised</a:t>
+            </a:r>
+            <a:r>
+              <a:rPr lang="hu-HU" dirty="0"/>
+              <a:t>	</a:t>
+            </a:r>
+            <a:r>
+              <a:rPr lang="en-US" dirty="0"/>
+              <a:t>		</a:t>
+            </a:r>
+            <a:r>
+              <a:rPr lang="hu-HU" dirty="0" err="1"/>
+              <a:t>the</a:t>
+            </a:r>
+            <a:r>
+              <a:rPr lang="hu-HU" dirty="0"/>
+              <a:t> </a:t>
+            </a:r>
+            <a:r>
+              <a:rPr lang="hu-HU" dirty="0" err="1"/>
+              <a:t>cooking</a:t>
+            </a:r>
+            <a:r>
+              <a:rPr lang="hu-HU" dirty="0"/>
+              <a:t> skill-3SG-DAT</a:t>
+            </a:r>
+          </a:p>
+          <a:p>
+            <a:r>
+              <a:rPr lang="hu-HU" i="1" dirty="0"/>
+              <a:t>The chef </a:t>
+            </a:r>
+            <a:r>
+              <a:rPr lang="hu-HU" i="1" dirty="0" err="1"/>
+              <a:t>mentioned</a:t>
+            </a:r>
+            <a:r>
+              <a:rPr lang="hu-HU" i="1" dirty="0"/>
+              <a:t> </a:t>
+            </a:r>
+            <a:r>
+              <a:rPr lang="hu-HU" i="1" dirty="0" err="1"/>
+              <a:t>that</a:t>
+            </a:r>
+            <a:r>
+              <a:rPr lang="hu-HU" i="1" dirty="0"/>
+              <a:t> </a:t>
+            </a:r>
+            <a:r>
+              <a:rPr lang="hu-HU" i="1" dirty="0" err="1"/>
+              <a:t>the</a:t>
+            </a:r>
+            <a:r>
+              <a:rPr lang="hu-HU" i="1" dirty="0"/>
+              <a:t> </a:t>
+            </a:r>
+            <a:r>
+              <a:rPr lang="hu-HU" i="1" dirty="0" err="1"/>
+              <a:t>worker</a:t>
+            </a:r>
+            <a:r>
+              <a:rPr lang="hu-HU" i="1" dirty="0"/>
+              <a:t> </a:t>
+            </a:r>
+            <a:r>
+              <a:rPr lang="hu-HU" i="1" dirty="0" err="1"/>
+              <a:t>praised</a:t>
+            </a:r>
+            <a:r>
+              <a:rPr lang="hu-HU" i="1" dirty="0"/>
+              <a:t> </a:t>
+            </a:r>
+            <a:r>
+              <a:rPr lang="hu-HU" i="1" dirty="0" err="1"/>
+              <a:t>his</a:t>
+            </a:r>
+            <a:r>
+              <a:rPr lang="hu-HU" i="1" dirty="0"/>
+              <a:t>/</a:t>
+            </a:r>
+            <a:r>
+              <a:rPr lang="hu-HU" i="1" dirty="0" err="1"/>
+              <a:t>her</a:t>
+            </a:r>
+            <a:r>
+              <a:rPr lang="hu-HU" i="1" dirty="0"/>
+              <a:t> </a:t>
+            </a:r>
+            <a:r>
+              <a:rPr lang="hu-HU" i="1" dirty="0" err="1"/>
+              <a:t>cooking</a:t>
+            </a:r>
+            <a:r>
+              <a:rPr lang="hu-HU" i="1" dirty="0"/>
+              <a:t> </a:t>
+            </a:r>
+            <a:r>
+              <a:rPr lang="hu-HU" i="1" dirty="0" err="1"/>
+              <a:t>skills</a:t>
+            </a:r>
+            <a:r>
+              <a:rPr lang="hu-HU" i="1" dirty="0"/>
+              <a:t>.	</a:t>
+            </a:r>
+            <a:r>
+              <a:rPr lang="hu-HU" dirty="0"/>
+              <a:t>				</a:t>
+            </a:r>
+            <a:endParaRPr lang="en-US" dirty="0"/>
+          </a:p>
+          <a:p>
+            <a:r>
+              <a:rPr lang="hu-HU" dirty="0"/>
+              <a:t>	</a:t>
+            </a:r>
+          </a:p>
+          <a:p>
+            <a:r>
+              <a:rPr lang="hu-HU" b="1" dirty="0"/>
+              <a:t>A dolgozó	említette	hogy	a szakács	kérkedett		a főzőtudásával.</a:t>
+            </a:r>
+          </a:p>
+          <a:p>
+            <a:r>
+              <a:rPr lang="hu-HU" dirty="0" err="1"/>
+              <a:t>the</a:t>
+            </a:r>
+            <a:r>
+              <a:rPr lang="hu-HU" dirty="0"/>
+              <a:t> </a:t>
+            </a:r>
+            <a:r>
+              <a:rPr lang="hu-HU" dirty="0" err="1"/>
+              <a:t>worker</a:t>
+            </a:r>
+            <a:r>
+              <a:rPr lang="hu-HU" dirty="0"/>
+              <a:t>	</a:t>
+            </a:r>
+            <a:r>
+              <a:rPr lang="hu-HU" dirty="0" err="1"/>
+              <a:t>mentioned</a:t>
+            </a:r>
+            <a:r>
+              <a:rPr lang="hu-HU" dirty="0"/>
+              <a:t>	</a:t>
+            </a:r>
+            <a:r>
+              <a:rPr lang="hu-HU" dirty="0" err="1"/>
+              <a:t>that</a:t>
+            </a:r>
+            <a:r>
+              <a:rPr lang="hu-HU" dirty="0"/>
+              <a:t>	</a:t>
+            </a:r>
+            <a:r>
+              <a:rPr lang="en-US" dirty="0"/>
+              <a:t>	</a:t>
+            </a:r>
+            <a:r>
+              <a:rPr lang="hu-HU" dirty="0" err="1"/>
+              <a:t>the</a:t>
+            </a:r>
+            <a:r>
+              <a:rPr lang="hu-HU" dirty="0"/>
+              <a:t> chef	</a:t>
+            </a:r>
+            <a:r>
+              <a:rPr lang="hu-HU" dirty="0" err="1"/>
+              <a:t>boasted</a:t>
+            </a:r>
+            <a:r>
+              <a:rPr lang="hu-HU" dirty="0"/>
+              <a:t>		</a:t>
+            </a:r>
+            <a:r>
+              <a:rPr lang="hu-HU" dirty="0" err="1"/>
+              <a:t>the</a:t>
+            </a:r>
+            <a:r>
+              <a:rPr lang="hu-HU" dirty="0"/>
+              <a:t> </a:t>
+            </a:r>
+            <a:r>
+              <a:rPr lang="hu-HU" dirty="0" err="1"/>
+              <a:t>cooking</a:t>
+            </a:r>
+            <a:r>
+              <a:rPr lang="hu-HU" dirty="0"/>
+              <a:t> skill-3SG-INS</a:t>
+            </a:r>
+          </a:p>
+          <a:p>
+            <a:r>
+              <a:rPr lang="hu-HU" i="1" dirty="0"/>
+              <a:t>The </a:t>
+            </a:r>
+            <a:r>
+              <a:rPr lang="hu-HU" i="1" dirty="0" err="1"/>
+              <a:t>worker</a:t>
+            </a:r>
+            <a:r>
+              <a:rPr lang="hu-HU" i="1" dirty="0"/>
+              <a:t> </a:t>
+            </a:r>
+            <a:r>
+              <a:rPr lang="hu-HU" i="1" dirty="0" err="1"/>
+              <a:t>mentioned</a:t>
+            </a:r>
+            <a:r>
+              <a:rPr lang="hu-HU" i="1" dirty="0"/>
+              <a:t> </a:t>
+            </a:r>
+            <a:r>
+              <a:rPr lang="hu-HU" i="1" dirty="0" err="1"/>
+              <a:t>that</a:t>
+            </a:r>
+            <a:r>
+              <a:rPr lang="hu-HU" i="1" dirty="0"/>
+              <a:t> </a:t>
+            </a:r>
+            <a:r>
+              <a:rPr lang="hu-HU" i="1" dirty="0" err="1"/>
+              <a:t>the</a:t>
+            </a:r>
+            <a:r>
+              <a:rPr lang="hu-HU" i="1" dirty="0"/>
+              <a:t> chef </a:t>
+            </a:r>
+            <a:r>
+              <a:rPr lang="hu-HU" i="1" dirty="0" err="1"/>
+              <a:t>boasted</a:t>
+            </a:r>
+            <a:r>
+              <a:rPr lang="hu-HU" i="1" dirty="0"/>
+              <a:t> </a:t>
+            </a:r>
+            <a:r>
+              <a:rPr lang="hu-HU" i="1" dirty="0" err="1"/>
+              <a:t>about</a:t>
+            </a:r>
+            <a:r>
+              <a:rPr lang="hu-HU" i="1" dirty="0"/>
+              <a:t>  </a:t>
+            </a:r>
+            <a:r>
+              <a:rPr lang="hu-HU" i="1" dirty="0" err="1"/>
+              <a:t>his</a:t>
+            </a:r>
+            <a:r>
+              <a:rPr lang="hu-HU" i="1" dirty="0"/>
+              <a:t>/</a:t>
+            </a:r>
+            <a:r>
+              <a:rPr lang="hu-HU" i="1" dirty="0" err="1"/>
+              <a:t>her</a:t>
+            </a:r>
+            <a:r>
+              <a:rPr lang="hu-HU" i="1" dirty="0"/>
+              <a:t> </a:t>
+            </a:r>
+            <a:r>
+              <a:rPr lang="hu-HU" i="1" dirty="0" err="1"/>
+              <a:t>cooking</a:t>
+            </a:r>
+            <a:r>
+              <a:rPr lang="hu-HU" i="1" dirty="0"/>
+              <a:t> </a:t>
+            </a:r>
+            <a:r>
+              <a:rPr lang="hu-HU" i="1" dirty="0" err="1"/>
+              <a:t>skills</a:t>
+            </a:r>
+            <a:r>
+              <a:rPr lang="hu-HU" i="1" dirty="0"/>
+              <a:t>.		</a:t>
+            </a:r>
+            <a:r>
+              <a:rPr lang="hu-HU" dirty="0"/>
+              <a:t>				</a:t>
+            </a:r>
+          </a:p>
+        </p:txBody>
+      </p:sp>
+      <p:sp>
+        <p:nvSpPr>
+          <p:cNvPr id="4" name="Slide Number Placeholder 3">
+            <a:extLst>
+              <a:ext uri="{FF2B5EF4-FFF2-40B4-BE49-F238E27FC236}">
+                <a16:creationId xmlns:a16="http://schemas.microsoft.com/office/drawing/2014/main" id="{BFA423BD-588B-24B8-6D5A-F918ED2B3442}"/>
+              </a:ext>
+            </a:extLst>
+          </p:cNvPr>
+          <p:cNvSpPr>
+            <a:spLocks noGrp="1"/>
+          </p:cNvSpPr>
+          <p:nvPr>
+            <p:ph type="sldNum" sz="quarter" idx="12"/>
+          </p:nvPr>
+        </p:nvSpPr>
+        <p:spPr/>
+        <p:txBody>
+          <a:bodyPr>
+            <a:normAutofit fontScale="92500" lnSpcReduction="10000"/>
+          </a:bodyPr>
+          <a:lstStyle/>
+          <a:p>
+            <a:fld id="{D57F1E4F-1CFF-5643-939E-217C01CDF565}" type="slidenum">
+              <a:rPr lang="en-US" smtClean="0"/>
+              <a:pPr/>
+              <a:t>50</a:t>
+            </a:fld>
+            <a:endParaRPr lang="en-US" dirty="0"/>
+          </a:p>
+        </p:txBody>
+      </p:sp>
+    </p:spTree>
+    <p:extLst>
+      <p:ext uri="{BB962C8B-B14F-4D97-AF65-F5344CB8AC3E}">
+        <p14:creationId xmlns:p14="http://schemas.microsoft.com/office/powerpoint/2010/main" val="462358478"/>
+      </p:ext>
+    </p:extLst>
+  </p:cSld>
+  <p:clrMapOvr>
+    <a:masterClrMapping/>
+  </p:clrMapOvr>
+</p:sld>
+</file>
+
+<file path=ppt/slides/slide51.xml><?xml version="1.0" encoding="utf-8"?>
+<p:sld xmlns:a="http://schemas.openxmlformats.org/drawingml/2006/main" xmlns:r="http://schemas.openxmlformats.org/officeDocument/2006/relationships" xmlns:p="http://schemas.openxmlformats.org/presentationml/2006/main" show="0">
+  <p:cSld>
+    <p:spTree>
+      <p:nvGrpSpPr>
+        <p:cNvPr id="1" name="">
+          <a:extLst>
+            <a:ext uri="{FF2B5EF4-FFF2-40B4-BE49-F238E27FC236}">
               <a16:creationId xmlns:a16="http://schemas.microsoft.com/office/drawing/2014/main" id="{30CCDE47-3E18-2BD4-C49C-CB86F27619D0}"/>
             </a:ext>
           </a:extLst>
@@ -27532,7 +29879,7 @@
             <a:fld id="{D57F1E4F-1CFF-5643-939E-217C01CDF565}" type="slidenum">
               <a:rPr lang="en-US" smtClean="0"/>
               <a:pPr/>
-              <a:t>50</a:t>
+              <a:t>51</a:t>
             </a:fld>
             <a:endParaRPr lang="en-US" dirty="0"/>
           </a:p>
@@ -27551,7 +29898,7 @@
 </p:sld>
 </file>
 
-<file path=ppt/slides/slide51.xml><?xml version="1.0" encoding="utf-8"?>
+<file path=ppt/slides/slide52.xml><?xml version="1.0" encoding="utf-8"?>
 <p:sld xmlns:a="http://schemas.openxmlformats.org/drawingml/2006/main" xmlns:r="http://schemas.openxmlformats.org/officeDocument/2006/relationships" xmlns:p="http://schemas.openxmlformats.org/presentationml/2006/main" show="0">
   <p:cSld>
     <p:spTree>
@@ -28489,7 +30836,7 @@
             <a:fld id="{D57F1E4F-1CFF-5643-939E-217C01CDF565}" type="slidenum">
               <a:rPr lang="en-US" smtClean="0"/>
               <a:pPr/>
-              <a:t>51</a:t>
+              <a:t>52</a:t>
             </a:fld>
             <a:endParaRPr lang="en-US" dirty="0"/>
           </a:p>
@@ -28508,7 +30855,7 @@
 </p:sld>
 </file>
 
-<file path=ppt/slides/slide52.xml><?xml version="1.0" encoding="utf-8"?>
+<file path=ppt/slides/slide53.xml><?xml version="1.0" encoding="utf-8"?>
 <p:sld xmlns:a="http://schemas.openxmlformats.org/drawingml/2006/main" xmlns:r="http://schemas.openxmlformats.org/officeDocument/2006/relationships" xmlns:p="http://schemas.openxmlformats.org/presentationml/2006/main" show="0">
   <p:cSld>
     <p:spTree>
@@ -28991,7 +31338,7 @@
             <a:fld id="{D57F1E4F-1CFF-5643-939E-217C01CDF565}" type="slidenum">
               <a:rPr lang="en-US" smtClean="0"/>
               <a:pPr/>
-              <a:t>52</a:t>
+              <a:t>53</a:t>
             </a:fld>
             <a:endParaRPr lang="en-US" dirty="0"/>
           </a:p>
@@ -29010,7 +31357,7 @@
 </p:sld>
 </file>
 
-<file path=ppt/slides/slide53.xml><?xml version="1.0" encoding="utf-8"?>
+<file path=ppt/slides/slide54.xml><?xml version="1.0" encoding="utf-8"?>
 <p:sld xmlns:a="http://schemas.openxmlformats.org/drawingml/2006/main" xmlns:r="http://schemas.openxmlformats.org/officeDocument/2006/relationships" xmlns:p="http://schemas.openxmlformats.org/presentationml/2006/main" show="0">
   <p:cSld>
     <p:spTree>
@@ -29609,7 +31956,7 @@
             <a:fld id="{D57F1E4F-1CFF-5643-939E-217C01CDF565}" type="slidenum">
               <a:rPr lang="en-US" smtClean="0"/>
               <a:pPr/>
-              <a:t>53</a:t>
+              <a:t>54</a:t>
             </a:fld>
             <a:endParaRPr lang="en-US" dirty="0"/>
           </a:p>
@@ -29628,7 +31975,7 @@
 </p:sld>
 </file>
 
-<file path=ppt/slides/slide54.xml><?xml version="1.0" encoding="utf-8"?>
+<file path=ppt/slides/slide55.xml><?xml version="1.0" encoding="utf-8"?>
 <p:sld xmlns:a="http://schemas.openxmlformats.org/drawingml/2006/main" xmlns:r="http://schemas.openxmlformats.org/officeDocument/2006/relationships" xmlns:p="http://schemas.openxmlformats.org/presentationml/2006/main" show="0">
   <p:cSld>
     <p:spTree>
@@ -30251,7 +32598,7 @@
             <a:fld id="{D57F1E4F-1CFF-5643-939E-217C01CDF565}" type="slidenum">
               <a:rPr lang="en-US" smtClean="0"/>
               <a:pPr/>
-              <a:t>54</a:t>
+              <a:t>55</a:t>
             </a:fld>
             <a:endParaRPr lang="en-US" dirty="0"/>
           </a:p>
@@ -30270,7 +32617,7 @@
 </p:sld>
 </file>
 
-<file path=ppt/slides/slide55.xml><?xml version="1.0" encoding="utf-8"?>
+<file path=ppt/slides/slide56.xml><?xml version="1.0" encoding="utf-8"?>
 <p:sld xmlns:a="http://schemas.openxmlformats.org/drawingml/2006/main" xmlns:r="http://schemas.openxmlformats.org/officeDocument/2006/relationships" xmlns:p="http://schemas.openxmlformats.org/presentationml/2006/main" show="0">
   <p:cSld>
     <p:spTree>
@@ -30566,7 +32913,7 @@
             <a:fld id="{D57F1E4F-1CFF-5643-939E-217C01CDF565}" type="slidenum">
               <a:rPr lang="en-US" smtClean="0"/>
               <a:pPr/>
-              <a:t>55</a:t>
+              <a:t>56</a:t>
             </a:fld>
             <a:endParaRPr lang="en-US" dirty="0"/>
           </a:p>
@@ -30585,7 +32932,7 @@
 </p:sld>
 </file>
 
-<file path=ppt/slides/slide56.xml><?xml version="1.0" encoding="utf-8"?>
+<file path=ppt/slides/slide57.xml><?xml version="1.0" encoding="utf-8"?>
 <p:sld xmlns:a="http://schemas.openxmlformats.org/drawingml/2006/main" xmlns:r="http://schemas.openxmlformats.org/officeDocument/2006/relationships" xmlns:p="http://schemas.openxmlformats.org/presentationml/2006/main" show="0">
   <p:cSld>
     <p:spTree>
@@ -31231,7 +33578,7 @@
             <a:fld id="{D57F1E4F-1CFF-5643-939E-217C01CDF565}" type="slidenum">
               <a:rPr lang="en-US" smtClean="0"/>
               <a:pPr/>
-              <a:t>56</a:t>
+              <a:t>57</a:t>
             </a:fld>
             <a:endParaRPr lang="en-US" dirty="0"/>
           </a:p>
@@ -31250,7 +33597,7 @@
 </p:sld>
 </file>
 
-<file path=ppt/slides/slide57.xml><?xml version="1.0" encoding="utf-8"?>
+<file path=ppt/slides/slide58.xml><?xml version="1.0" encoding="utf-8"?>
 <p:sld xmlns:a="http://schemas.openxmlformats.org/drawingml/2006/main" xmlns:r="http://schemas.openxmlformats.org/officeDocument/2006/relationships" xmlns:p="http://schemas.openxmlformats.org/presentationml/2006/main" show="0">
   <p:cSld>
     <p:spTree>
@@ -31390,7 +33737,7 @@
             <a:fld id="{D57F1E4F-1CFF-5643-939E-217C01CDF565}" type="slidenum">
               <a:rPr lang="en-US" smtClean="0"/>
               <a:pPr/>
-              <a:t>57</a:t>
+              <a:t>58</a:t>
             </a:fld>
             <a:endParaRPr lang="en-US" dirty="0"/>
           </a:p>
@@ -31409,7 +33756,7 @@
 </p:sld>
 </file>
 
-<file path=ppt/slides/slide58.xml><?xml version="1.0" encoding="utf-8"?>
+<file path=ppt/slides/slide59.xml><?xml version="1.0" encoding="utf-8"?>
 <p:sld xmlns:a="http://schemas.openxmlformats.org/drawingml/2006/main" xmlns:r="http://schemas.openxmlformats.org/officeDocument/2006/relationships" xmlns:p="http://schemas.openxmlformats.org/presentationml/2006/main" show="0">
   <p:cSld>
     <p:spTree>
@@ -31585,7 +33932,7 @@
             <a:fld id="{D57F1E4F-1CFF-5643-939E-217C01CDF565}" type="slidenum">
               <a:rPr lang="en-US" smtClean="0"/>
               <a:pPr/>
-              <a:t>58</a:t>
+              <a:t>59</a:t>
             </a:fld>
             <a:endParaRPr lang="en-US" dirty="0"/>
           </a:p>
